--- a/docs/pptx/carbo/jx-carbo-linsubhr-sens-throm2.pptx
+++ b/docs/pptx/carbo/jx-carbo-linsubhr-sens-throm2.pptx
@@ -5339,7 +5339,7 @@
           <p:spPr>
             <a:xfrm>
               <a:off x="817517" y="1896563"/>
-              <a:ext cx="6169365" cy="82021"/>
+              <a:ext cx="6833128" cy="82021"/>
             </a:xfrm>
             <a:prstGeom prst="rect">
               <a:avLst/>
@@ -5371,7 +5371,7 @@
                   <a:latin typeface="Helvetica"/>
                   <a:cs typeface="Helvetica"/>
                 </a:rPr>
-                <a:t>subHR per 0.1 ratio decline: 1.18 (1.02-1.36), p = 0.027  |  per IQR decline (Δ = 0.28): 1.58 (1.05-2.36)  |  IQR: [0.70, 0.98]</a:t>
+                <a:t>subHR per 0.1 ratio decline: 1.18 (1.02-1.36), p_Bonf = 0.163 (n = 6)  |  per IQR decline (Δ = 0.28): 1.58 (1.05-2.36)  |  IQR: [0.70, 0.98]</a:t>
               </a:r>
             </a:p>
           </p:txBody>

--- a/docs/pptx/carbo/jx-carbo-linsubhr-sens-throm2.pptx
+++ b/docs/pptx/carbo/jx-carbo-linsubhr-sens-throm2.pptx
@@ -5062,8 +5062,8 @@
           </p:nvSpPr>
           <p:spPr>
             <a:xfrm>
-              <a:off x="2155289" y="5785772"/>
-              <a:ext cx="155356" cy="80101"/>
+              <a:off x="2152181" y="5785772"/>
+              <a:ext cx="161574" cy="80101"/>
             </a:xfrm>
             <a:prstGeom prst="rect">
               <a:avLst/>
@@ -5095,7 +5095,7 @@
                   <a:latin typeface="Helvetica"/>
                   <a:cs typeface="Helvetica"/>
                 </a:rPr>
-                <a:t>0.6</a:t>
+                <a:t>-40</a:t>
               </a:r>
             </a:p>
           </p:txBody>
@@ -5108,8 +5108,8 @@
           </p:nvSpPr>
           <p:spPr>
             <a:xfrm>
-              <a:off x="3887213" y="5785772"/>
-              <a:ext cx="155356" cy="80101"/>
+              <a:off x="3884104" y="5785772"/>
+              <a:ext cx="161574" cy="80101"/>
             </a:xfrm>
             <a:prstGeom prst="rect">
               <a:avLst/>
@@ -5141,7 +5141,7 @@
                   <a:latin typeface="Helvetica"/>
                   <a:cs typeface="Helvetica"/>
                 </a:rPr>
-                <a:t>0.8</a:t>
+                <a:t>-20</a:t>
               </a:r>
             </a:p>
           </p:txBody>
@@ -5154,8 +5154,8 @@
           </p:nvSpPr>
           <p:spPr>
             <a:xfrm>
-              <a:off x="5619136" y="5785772"/>
-              <a:ext cx="155356" cy="80101"/>
+              <a:off x="5665725" y="5785772"/>
+              <a:ext cx="62179" cy="80101"/>
             </a:xfrm>
             <a:prstGeom prst="rect">
               <a:avLst/>
@@ -5187,7 +5187,7 @@
                   <a:latin typeface="Helvetica"/>
                   <a:cs typeface="Helvetica"/>
                 </a:rPr>
-                <a:t>1.0</a:t>
+                <a:t>0</a:t>
               </a:r>
             </a:p>
           </p:txBody>
@@ -5200,8 +5200,8 @@
           </p:nvSpPr>
           <p:spPr>
             <a:xfrm>
-              <a:off x="7351060" y="5785772"/>
-              <a:ext cx="155356" cy="80101"/>
+              <a:off x="7366559" y="5785772"/>
+              <a:ext cx="124358" cy="80101"/>
             </a:xfrm>
             <a:prstGeom prst="rect">
               <a:avLst/>
@@ -5233,7 +5233,7 @@
                   <a:latin typeface="Helvetica"/>
                   <a:cs typeface="Helvetica"/>
                 </a:rPr>
-                <a:t>1.2</a:t>
+                <a:t>20</a:t>
               </a:r>
             </a:p>
           </p:txBody>
@@ -5246,8 +5246,8 @@
           </p:nvSpPr>
           <p:spPr>
             <a:xfrm>
-              <a:off x="2691419" y="5925448"/>
-              <a:ext cx="4051889" cy="100218"/>
+              <a:off x="1561815" y="5925448"/>
+              <a:ext cx="6311097" cy="100218"/>
             </a:xfrm>
             <a:prstGeom prst="rect">
               <a:avLst/>
@@ -5279,7 +5279,7 @@
                   <a:latin typeface="Helvetica"/>
                   <a:cs typeface="Helvetica"/>
                 </a:rPr>
-                <a:t>Sensitivity eGFR Ratio (CKD-EPI 2012 CysC / CKD-EPI 2021 Cr)</a:t>
+                <a:t>Sensitivity eGFR Difference (%): 100 × (CKD-EPI 2012 CysC − CKD-EPI 2021 Cr) / CKD-EPI 2021 Cr</a:t>
               </a:r>
             </a:p>
           </p:txBody>
@@ -5339,7 +5339,7 @@
           <p:spPr>
             <a:xfrm>
               <a:off x="817517" y="1896563"/>
-              <a:ext cx="6833128" cy="82021"/>
+              <a:ext cx="6959864" cy="82021"/>
             </a:xfrm>
             <a:prstGeom prst="rect">
               <a:avLst/>
@@ -5371,7 +5371,7 @@
                   <a:latin typeface="Helvetica"/>
                   <a:cs typeface="Helvetica"/>
                 </a:rPr>
-                <a:t>subHR per 0.1 ratio decline: 1.18 (1.02-1.36), p_Bonf = 0.163 (n = 6)  |  per IQR decline (Δ = 0.28): 1.58 (1.05-2.36)  |  IQR: [0.70, 0.98]</a:t>
+                <a:t>subHR per 10 % decline: 1.18 (1.02-1.36), p_Bonf = 0.163 (n = 6)  |  per IQR decline (Δ = 28.0 %): 1.58 (1.05-2.36)  |  IQR: [-30.0, -2.0] %</a:t>
               </a:r>
             </a:p>
           </p:txBody>

--- a/docs/pptx/carbo/jx-carbo-linsubhr-sens-throm2.pptx
+++ b/docs/pptx/carbo/jx-carbo-linsubhr-sens-throm2.pptx
@@ -2265,34 +2265,26 @@
         </p:sp>
         <p:sp>
           <p:nvSpPr>
-            <p:cNvPr id="4" name="pl4"/>
+            <p:cNvPr id="4" name="rc4"/>
             <p:cNvSpPr/>
             <p:nvPr/>
           </p:nvSpPr>
           <p:spPr>
             <a:xfrm>
-              <a:off x="817517" y="5142518"/>
-              <a:ext cx="7799693" cy="0"/>
+              <a:off x="457200" y="1600200"/>
+              <a:ext cx="8229600" cy="4525962"/>
             </a:xfrm>
-            <a:custGeom>
+            <a:prstGeom prst="rect">
               <a:avLst/>
-              <a:pathLst>
-                <a:path w="7799693" h="0">
-                  <a:moveTo>
-                    <a:pt x="0" y="0"/>
-                  </a:moveTo>
-                  <a:lnTo>
-                    <a:pt x="7799693" y="0"/>
-                  </a:lnTo>
-                  <a:lnTo>
-                    <a:pt x="7799693" y="0"/>
-                  </a:lnTo>
-                </a:path>
-              </a:pathLst>
-            </a:custGeom>
-            <a:ln w="6775" cap="flat">
+            </a:prstGeom>
+            <a:solidFill>
+              <a:srgbClr val="FFFFFF">
+                <a:alpha val="100000"/>
+              </a:srgbClr>
+            </a:solidFill>
+            <a:ln w="13550" cap="rnd">
               <a:solidFill>
-                <a:srgbClr val="EBEBEB">
+                <a:srgbClr val="FFFFFF">
                   <a:alpha val="100000"/>
                 </a:srgbClr>
               </a:solidFill>
@@ -2314,21 +2306,21 @@
           </p:nvSpPr>
           <p:spPr>
             <a:xfrm>
-              <a:off x="817517" y="4313054"/>
-              <a:ext cx="7799693" cy="0"/>
+              <a:off x="887106" y="3250627"/>
+              <a:ext cx="7660515" cy="0"/>
             </a:xfrm>
             <a:custGeom>
               <a:avLst/>
               <a:pathLst>
-                <a:path w="7799693" h="0">
+                <a:path w="7660515" h="0">
                   <a:moveTo>
                     <a:pt x="0" y="0"/>
                   </a:moveTo>
                   <a:lnTo>
-                    <a:pt x="7799693" y="0"/>
-                  </a:lnTo>
-                  <a:lnTo>
-                    <a:pt x="7799693" y="0"/>
+                    <a:pt x="7660515" y="0"/>
+                  </a:lnTo>
+                  <a:lnTo>
+                    <a:pt x="7660515" y="0"/>
                   </a:lnTo>
                 </a:path>
               </a:pathLst>
@@ -2357,21 +2349,21 @@
           </p:nvSpPr>
           <p:spPr>
             <a:xfrm>
-              <a:off x="817517" y="3483591"/>
-              <a:ext cx="7799693" cy="0"/>
+              <a:off x="887106" y="2951293"/>
+              <a:ext cx="7660515" cy="0"/>
             </a:xfrm>
             <a:custGeom>
               <a:avLst/>
               <a:pathLst>
-                <a:path w="7799693" h="0">
+                <a:path w="7660515" h="0">
                   <a:moveTo>
                     <a:pt x="0" y="0"/>
                   </a:moveTo>
                   <a:lnTo>
-                    <a:pt x="7799693" y="0"/>
-                  </a:lnTo>
-                  <a:lnTo>
-                    <a:pt x="7799693" y="0"/>
+                    <a:pt x="7660515" y="0"/>
+                  </a:lnTo>
+                  <a:lnTo>
+                    <a:pt x="7660515" y="0"/>
                   </a:lnTo>
                 </a:path>
               </a:pathLst>
@@ -2400,21 +2392,21 @@
           </p:nvSpPr>
           <p:spPr>
             <a:xfrm>
-              <a:off x="817517" y="2654127"/>
-              <a:ext cx="7799693" cy="0"/>
+              <a:off x="887106" y="2651959"/>
+              <a:ext cx="7660515" cy="0"/>
             </a:xfrm>
             <a:custGeom>
               <a:avLst/>
               <a:pathLst>
-                <a:path w="7799693" h="0">
+                <a:path w="7660515" h="0">
                   <a:moveTo>
                     <a:pt x="0" y="0"/>
                   </a:moveTo>
                   <a:lnTo>
-                    <a:pt x="7799693" y="0"/>
-                  </a:lnTo>
-                  <a:lnTo>
-                    <a:pt x="7799693" y="0"/>
+                    <a:pt x="7660515" y="0"/>
+                  </a:lnTo>
+                  <a:lnTo>
+                    <a:pt x="7660515" y="0"/>
                   </a:lnTo>
                 </a:path>
               </a:pathLst>
@@ -2443,21 +2435,21 @@
           </p:nvSpPr>
           <p:spPr>
             <a:xfrm>
-              <a:off x="1367006" y="2073503"/>
-              <a:ext cx="0" cy="3649639"/>
+              <a:off x="887106" y="2352625"/>
+              <a:ext cx="7660515" cy="0"/>
             </a:xfrm>
             <a:custGeom>
               <a:avLst/>
               <a:pathLst>
-                <a:path w="0" h="3649639">
+                <a:path w="7660515" h="0">
                   <a:moveTo>
-                    <a:pt x="0" y="3649639"/>
+                    <a:pt x="0" y="0"/>
                   </a:moveTo>
                   <a:lnTo>
-                    <a:pt x="0" y="0"/>
-                  </a:lnTo>
-                  <a:lnTo>
-                    <a:pt x="0" y="0"/>
+                    <a:pt x="7660515" y="0"/>
+                  </a:lnTo>
+                  <a:lnTo>
+                    <a:pt x="7660515" y="0"/>
                   </a:lnTo>
                 </a:path>
               </a:pathLst>
@@ -2486,15 +2478,15 @@
           </p:nvSpPr>
           <p:spPr>
             <a:xfrm>
-              <a:off x="3098929" y="2073503"/>
-              <a:ext cx="0" cy="3649639"/>
+              <a:off x="1426790" y="2143092"/>
+              <a:ext cx="0" cy="1317069"/>
             </a:xfrm>
             <a:custGeom>
               <a:avLst/>
               <a:pathLst>
-                <a:path w="0" h="3649639">
+                <a:path w="0" h="1317069">
                   <a:moveTo>
-                    <a:pt x="0" y="3649639"/>
+                    <a:pt x="0" y="1317069"/>
                   </a:moveTo>
                   <a:lnTo>
                     <a:pt x="0" y="0"/>
@@ -2529,15 +2521,15 @@
           </p:nvSpPr>
           <p:spPr>
             <a:xfrm>
-              <a:off x="4830853" y="2073503"/>
-              <a:ext cx="0" cy="3649639"/>
+              <a:off x="3127809" y="2143092"/>
+              <a:ext cx="0" cy="1317069"/>
             </a:xfrm>
             <a:custGeom>
               <a:avLst/>
               <a:pathLst>
-                <a:path w="0" h="3649639">
+                <a:path w="0" h="1317069">
                   <a:moveTo>
-                    <a:pt x="0" y="3649639"/>
+                    <a:pt x="0" y="1317069"/>
                   </a:moveTo>
                   <a:lnTo>
                     <a:pt x="0" y="0"/>
@@ -2572,15 +2564,15 @@
           </p:nvSpPr>
           <p:spPr>
             <a:xfrm>
-              <a:off x="6562776" y="2073503"/>
-              <a:ext cx="0" cy="3649639"/>
+              <a:off x="4828828" y="2143092"/>
+              <a:ext cx="0" cy="1317069"/>
             </a:xfrm>
             <a:custGeom>
               <a:avLst/>
               <a:pathLst>
-                <a:path w="0" h="3649639">
+                <a:path w="0" h="1317069">
                   <a:moveTo>
-                    <a:pt x="0" y="3649639"/>
+                    <a:pt x="0" y="1317069"/>
                   </a:moveTo>
                   <a:lnTo>
                     <a:pt x="0" y="0"/>
@@ -2615,15 +2607,15 @@
           </p:nvSpPr>
           <p:spPr>
             <a:xfrm>
-              <a:off x="8294700" y="2073503"/>
-              <a:ext cx="0" cy="3649639"/>
+              <a:off x="6529847" y="2143092"/>
+              <a:ext cx="0" cy="1317069"/>
             </a:xfrm>
             <a:custGeom>
               <a:avLst/>
               <a:pathLst>
-                <a:path w="0" h="3649639">
+                <a:path w="0" h="1317069">
                   <a:moveTo>
-                    <a:pt x="0" y="3649639"/>
+                    <a:pt x="0" y="1317069"/>
                   </a:moveTo>
                   <a:lnTo>
                     <a:pt x="0" y="0"/>
@@ -2658,26 +2650,26 @@
           </p:nvSpPr>
           <p:spPr>
             <a:xfrm>
-              <a:off x="817517" y="5557249"/>
-              <a:ext cx="7799693" cy="0"/>
+              <a:off x="8230866" y="2143092"/>
+              <a:ext cx="0" cy="1317069"/>
             </a:xfrm>
             <a:custGeom>
               <a:avLst/>
               <a:pathLst>
-                <a:path w="7799693" h="0">
+                <a:path w="0" h="1317069">
                   <a:moveTo>
+                    <a:pt x="0" y="1317069"/>
+                  </a:moveTo>
+                  <a:lnTo>
                     <a:pt x="0" y="0"/>
-                  </a:moveTo>
-                  <a:lnTo>
-                    <a:pt x="7799693" y="0"/>
-                  </a:lnTo>
-                  <a:lnTo>
-                    <a:pt x="7799693" y="0"/>
+                  </a:lnTo>
+                  <a:lnTo>
+                    <a:pt x="0" y="0"/>
                   </a:lnTo>
                 </a:path>
               </a:pathLst>
             </a:custGeom>
-            <a:ln w="13550" cap="flat">
+            <a:ln w="6775" cap="flat">
               <a:solidFill>
                 <a:srgbClr val="EBEBEB">
                   <a:alpha val="100000"/>
@@ -2701,21 +2693,21 @@
           </p:nvSpPr>
           <p:spPr>
             <a:xfrm>
-              <a:off x="817517" y="4727786"/>
-              <a:ext cx="7799693" cy="0"/>
+              <a:off x="887106" y="3400294"/>
+              <a:ext cx="7660515" cy="0"/>
             </a:xfrm>
             <a:custGeom>
               <a:avLst/>
               <a:pathLst>
-                <a:path w="7799693" h="0">
+                <a:path w="7660515" h="0">
                   <a:moveTo>
                     <a:pt x="0" y="0"/>
                   </a:moveTo>
                   <a:lnTo>
-                    <a:pt x="7799693" y="0"/>
-                  </a:lnTo>
-                  <a:lnTo>
-                    <a:pt x="7799693" y="0"/>
+                    <a:pt x="7660515" y="0"/>
+                  </a:lnTo>
+                  <a:lnTo>
+                    <a:pt x="7660515" y="0"/>
                   </a:lnTo>
                 </a:path>
               </a:pathLst>
@@ -2744,21 +2736,21 @@
           </p:nvSpPr>
           <p:spPr>
             <a:xfrm>
-              <a:off x="817517" y="3898322"/>
-              <a:ext cx="7799693" cy="0"/>
+              <a:off x="887106" y="3100960"/>
+              <a:ext cx="7660515" cy="0"/>
             </a:xfrm>
             <a:custGeom>
               <a:avLst/>
               <a:pathLst>
-                <a:path w="7799693" h="0">
+                <a:path w="7660515" h="0">
                   <a:moveTo>
                     <a:pt x="0" y="0"/>
                   </a:moveTo>
                   <a:lnTo>
-                    <a:pt x="7799693" y="0"/>
-                  </a:lnTo>
-                  <a:lnTo>
-                    <a:pt x="7799693" y="0"/>
+                    <a:pt x="7660515" y="0"/>
+                  </a:lnTo>
+                  <a:lnTo>
+                    <a:pt x="7660515" y="0"/>
                   </a:lnTo>
                 </a:path>
               </a:pathLst>
@@ -2787,21 +2779,21 @@
           </p:nvSpPr>
           <p:spPr>
             <a:xfrm>
-              <a:off x="817517" y="3068859"/>
-              <a:ext cx="7799693" cy="0"/>
+              <a:off x="887106" y="2801626"/>
+              <a:ext cx="7660515" cy="0"/>
             </a:xfrm>
             <a:custGeom>
               <a:avLst/>
               <a:pathLst>
-                <a:path w="7799693" h="0">
+                <a:path w="7660515" h="0">
                   <a:moveTo>
                     <a:pt x="0" y="0"/>
                   </a:moveTo>
                   <a:lnTo>
-                    <a:pt x="7799693" y="0"/>
-                  </a:lnTo>
-                  <a:lnTo>
-                    <a:pt x="7799693" y="0"/>
+                    <a:pt x="7660515" y="0"/>
+                  </a:lnTo>
+                  <a:lnTo>
+                    <a:pt x="7660515" y="0"/>
                   </a:lnTo>
                 </a:path>
               </a:pathLst>
@@ -2830,21 +2822,21 @@
           </p:nvSpPr>
           <p:spPr>
             <a:xfrm>
-              <a:off x="817517" y="2239395"/>
-              <a:ext cx="7799693" cy="0"/>
+              <a:off x="887106" y="2502292"/>
+              <a:ext cx="7660515" cy="0"/>
             </a:xfrm>
             <a:custGeom>
               <a:avLst/>
               <a:pathLst>
-                <a:path w="7799693" h="0">
+                <a:path w="7660515" h="0">
                   <a:moveTo>
                     <a:pt x="0" y="0"/>
                   </a:moveTo>
                   <a:lnTo>
-                    <a:pt x="7799693" y="0"/>
-                  </a:lnTo>
-                  <a:lnTo>
-                    <a:pt x="7799693" y="0"/>
+                    <a:pt x="7660515" y="0"/>
+                  </a:lnTo>
+                  <a:lnTo>
+                    <a:pt x="7660515" y="0"/>
                   </a:lnTo>
                 </a:path>
               </a:pathLst>
@@ -2873,21 +2865,21 @@
           </p:nvSpPr>
           <p:spPr>
             <a:xfrm>
-              <a:off x="2232968" y="2073503"/>
-              <a:ext cx="0" cy="3649639"/>
+              <a:off x="887106" y="2202958"/>
+              <a:ext cx="7660515" cy="0"/>
             </a:xfrm>
             <a:custGeom>
               <a:avLst/>
               <a:pathLst>
-                <a:path w="0" h="3649639">
+                <a:path w="7660515" h="0">
                   <a:moveTo>
-                    <a:pt x="0" y="3649639"/>
+                    <a:pt x="0" y="0"/>
                   </a:moveTo>
                   <a:lnTo>
-                    <a:pt x="0" y="0"/>
-                  </a:lnTo>
-                  <a:lnTo>
-                    <a:pt x="0" y="0"/>
+                    <a:pt x="7660515" y="0"/>
+                  </a:lnTo>
+                  <a:lnTo>
+                    <a:pt x="7660515" y="0"/>
                   </a:lnTo>
                 </a:path>
               </a:pathLst>
@@ -2916,15 +2908,15 @@
           </p:nvSpPr>
           <p:spPr>
             <a:xfrm>
-              <a:off x="3964891" y="2073503"/>
-              <a:ext cx="0" cy="3649639"/>
+              <a:off x="2277299" y="2143092"/>
+              <a:ext cx="0" cy="1317069"/>
             </a:xfrm>
             <a:custGeom>
               <a:avLst/>
               <a:pathLst>
-                <a:path w="0" h="3649639">
+                <a:path w="0" h="1317069">
                   <a:moveTo>
-                    <a:pt x="0" y="3649639"/>
+                    <a:pt x="0" y="1317069"/>
                   </a:moveTo>
                   <a:lnTo>
                     <a:pt x="0" y="0"/>
@@ -2959,15 +2951,15 @@
           </p:nvSpPr>
           <p:spPr>
             <a:xfrm>
-              <a:off x="5696815" y="2073503"/>
-              <a:ext cx="0" cy="3649639"/>
+              <a:off x="3978318" y="2143092"/>
+              <a:ext cx="0" cy="1317069"/>
             </a:xfrm>
             <a:custGeom>
               <a:avLst/>
               <a:pathLst>
-                <a:path w="0" h="3649639">
+                <a:path w="0" h="1317069">
                   <a:moveTo>
-                    <a:pt x="0" y="3649639"/>
+                    <a:pt x="0" y="1317069"/>
                   </a:moveTo>
                   <a:lnTo>
                     <a:pt x="0" y="0"/>
@@ -3002,15 +2994,15 @@
           </p:nvSpPr>
           <p:spPr>
             <a:xfrm>
-              <a:off x="7428738" y="2073503"/>
-              <a:ext cx="0" cy="3649639"/>
+              <a:off x="5679337" y="2143092"/>
+              <a:ext cx="0" cy="1317069"/>
             </a:xfrm>
             <a:custGeom>
               <a:avLst/>
               <a:pathLst>
-                <a:path w="0" h="3649639">
+                <a:path w="0" h="1317069">
                   <a:moveTo>
-                    <a:pt x="0" y="3649639"/>
+                    <a:pt x="0" y="1317069"/>
                   </a:moveTo>
                   <a:lnTo>
                     <a:pt x="0" y="0"/>
@@ -3039,618 +3031,661 @@
         </p:sp>
         <p:sp>
           <p:nvSpPr>
-            <p:cNvPr id="22" name="pg22"/>
+            <p:cNvPr id="22" name="pl22"/>
             <p:cNvSpPr/>
             <p:nvPr/>
           </p:nvSpPr>
           <p:spPr>
             <a:xfrm>
-              <a:off x="1172049" y="3064649"/>
-              <a:ext cx="7090630" cy="2289306"/>
+              <a:off x="7380356" y="2143092"/>
+              <a:ext cx="0" cy="1317069"/>
             </a:xfrm>
             <a:custGeom>
               <a:avLst/>
               <a:pathLst>
-                <a:path w="7090630" h="2289306">
+                <a:path w="0" h="1317069">
+                  <a:moveTo>
+                    <a:pt x="0" y="1317069"/>
+                  </a:moveTo>
+                  <a:lnTo>
+                    <a:pt x="0" y="0"/>
+                  </a:lnTo>
+                  <a:lnTo>
+                    <a:pt x="0" y="0"/>
+                  </a:lnTo>
+                </a:path>
+              </a:pathLst>
+            </a:custGeom>
+            <a:ln w="13550" cap="flat">
+              <a:solidFill>
+                <a:srgbClr val="EBEBEB">
+                  <a:alpha val="100000"/>
+                </a:srgbClr>
+              </a:solidFill>
+              <a:prstDash val="solid"/>
+              <a:round/>
+            </a:ln>
+          </p:spPr>
+          <p:txBody>
+            <a:bodyPr/>
+            <a:lstStyle/>
+            <a:p/>
+          </p:txBody>
+        </p:sp>
+        <p:sp>
+          <p:nvSpPr>
+            <p:cNvPr id="23" name="pg23"/>
+            <p:cNvSpPr/>
+            <p:nvPr/>
+          </p:nvSpPr>
+          <p:spPr>
+            <a:xfrm>
+              <a:off x="1235312" y="2500773"/>
+              <a:ext cx="6964104" cy="826156"/>
+            </a:xfrm>
+            <a:custGeom>
+              <a:avLst/>
+              <a:pathLst>
+                <a:path w="6964104" h="826156">
                   <a:moveTo>
                     <a:pt x="0" y="0"/>
                   </a:moveTo>
                   <a:lnTo>
-                    <a:pt x="71622" y="62314"/>
-                  </a:lnTo>
-                  <a:lnTo>
-                    <a:pt x="143245" y="123070"/>
-                  </a:lnTo>
-                  <a:lnTo>
-                    <a:pt x="214867" y="182307"/>
-                  </a:lnTo>
-                  <a:lnTo>
-                    <a:pt x="286490" y="240064"/>
-                  </a:lnTo>
-                  <a:lnTo>
-                    <a:pt x="358112" y="296377"/>
-                  </a:lnTo>
-                  <a:lnTo>
-                    <a:pt x="429735" y="351281"/>
-                  </a:lnTo>
-                  <a:lnTo>
-                    <a:pt x="501357" y="404814"/>
-                  </a:lnTo>
-                  <a:lnTo>
-                    <a:pt x="572980" y="457008"/>
-                  </a:lnTo>
-                  <a:lnTo>
-                    <a:pt x="644602" y="507897"/>
-                  </a:lnTo>
-                  <a:lnTo>
-                    <a:pt x="716225" y="557514"/>
-                  </a:lnTo>
-                  <a:lnTo>
-                    <a:pt x="787847" y="605890"/>
-                  </a:lnTo>
-                  <a:lnTo>
-                    <a:pt x="859470" y="653057"/>
-                  </a:lnTo>
-                  <a:lnTo>
-                    <a:pt x="931092" y="699045"/>
-                  </a:lnTo>
-                  <a:lnTo>
-                    <a:pt x="1002715" y="743883"/>
-                  </a:lnTo>
-                  <a:lnTo>
-                    <a:pt x="1074337" y="787601"/>
-                  </a:lnTo>
-                  <a:lnTo>
-                    <a:pt x="1145960" y="830225"/>
-                  </a:lnTo>
-                  <a:lnTo>
-                    <a:pt x="1217582" y="871784"/>
-                  </a:lnTo>
-                  <a:lnTo>
-                    <a:pt x="1289205" y="912304"/>
-                  </a:lnTo>
-                  <a:lnTo>
-                    <a:pt x="1360827" y="951811"/>
-                  </a:lnTo>
-                  <a:lnTo>
-                    <a:pt x="1432450" y="990330"/>
-                  </a:lnTo>
-                  <a:lnTo>
-                    <a:pt x="1504073" y="1027886"/>
-                  </a:lnTo>
-                  <a:lnTo>
-                    <a:pt x="1575695" y="1064504"/>
-                  </a:lnTo>
-                  <a:lnTo>
-                    <a:pt x="1647318" y="1100205"/>
-                  </a:lnTo>
-                  <a:lnTo>
-                    <a:pt x="1718940" y="1135015"/>
-                  </a:lnTo>
-                  <a:lnTo>
-                    <a:pt x="1790563" y="1168954"/>
-                  </a:lnTo>
-                  <a:lnTo>
-                    <a:pt x="1862185" y="1202045"/>
-                  </a:lnTo>
-                  <a:lnTo>
-                    <a:pt x="1933808" y="1234308"/>
-                  </a:lnTo>
-                  <a:lnTo>
-                    <a:pt x="2005430" y="1265765"/>
-                  </a:lnTo>
-                  <a:lnTo>
-                    <a:pt x="2077053" y="1296435"/>
-                  </a:lnTo>
-                  <a:lnTo>
-                    <a:pt x="2148675" y="1326339"/>
-                  </a:lnTo>
-                  <a:lnTo>
-                    <a:pt x="2220298" y="1355495"/>
-                  </a:lnTo>
-                  <a:lnTo>
-                    <a:pt x="2291920" y="1383923"/>
-                  </a:lnTo>
-                  <a:lnTo>
-                    <a:pt x="2363543" y="1411639"/>
-                  </a:lnTo>
-                  <a:lnTo>
-                    <a:pt x="2435165" y="1438663"/>
-                  </a:lnTo>
-                  <a:lnTo>
-                    <a:pt x="2506788" y="1465011"/>
-                  </a:lnTo>
-                  <a:lnTo>
-                    <a:pt x="2578410" y="1490700"/>
-                  </a:lnTo>
-                  <a:lnTo>
-                    <a:pt x="2650033" y="1515747"/>
-                  </a:lnTo>
-                  <a:lnTo>
-                    <a:pt x="2721655" y="1540168"/>
-                  </a:lnTo>
-                  <a:lnTo>
-                    <a:pt x="2793278" y="1563979"/>
-                  </a:lnTo>
-                  <a:lnTo>
-                    <a:pt x="2864901" y="1587194"/>
-                  </a:lnTo>
-                  <a:lnTo>
-                    <a:pt x="2936523" y="1609829"/>
-                  </a:lnTo>
-                  <a:lnTo>
-                    <a:pt x="3008146" y="1631898"/>
-                  </a:lnTo>
-                  <a:lnTo>
-                    <a:pt x="3079768" y="1653415"/>
-                  </a:lnTo>
-                  <a:lnTo>
-                    <a:pt x="3151391" y="1663816"/>
-                  </a:lnTo>
-                  <a:lnTo>
-                    <a:pt x="3223013" y="1665074"/>
-                  </a:lnTo>
-                  <a:lnTo>
-                    <a:pt x="3294636" y="1666329"/>
-                  </a:lnTo>
-                  <a:lnTo>
-                    <a:pt x="3366258" y="1667583"/>
-                  </a:lnTo>
-                  <a:lnTo>
-                    <a:pt x="3437881" y="1668835"/>
-                  </a:lnTo>
-                  <a:lnTo>
-                    <a:pt x="3509503" y="1670085"/>
-                  </a:lnTo>
-                  <a:lnTo>
-                    <a:pt x="3581126" y="1671333"/>
-                  </a:lnTo>
-                  <a:lnTo>
-                    <a:pt x="3652748" y="1672579"/>
-                  </a:lnTo>
-                  <a:lnTo>
-                    <a:pt x="3724371" y="1673823"/>
-                  </a:lnTo>
-                  <a:lnTo>
-                    <a:pt x="3795993" y="1675065"/>
-                  </a:lnTo>
-                  <a:lnTo>
-                    <a:pt x="3867616" y="1676306"/>
-                  </a:lnTo>
-                  <a:lnTo>
-                    <a:pt x="3939238" y="1677544"/>
-                  </a:lnTo>
-                  <a:lnTo>
-                    <a:pt x="4010861" y="1678781"/>
-                  </a:lnTo>
-                  <a:lnTo>
-                    <a:pt x="4082483" y="1680016"/>
-                  </a:lnTo>
-                  <a:lnTo>
-                    <a:pt x="4154106" y="1681249"/>
-                  </a:lnTo>
-                  <a:lnTo>
-                    <a:pt x="4225729" y="1682480"/>
-                  </a:lnTo>
-                  <a:lnTo>
-                    <a:pt x="4297351" y="1683709"/>
-                  </a:lnTo>
-                  <a:lnTo>
-                    <a:pt x="4368974" y="1684936"/>
-                  </a:lnTo>
-                  <a:lnTo>
-                    <a:pt x="4440596" y="1686161"/>
-                  </a:lnTo>
-                  <a:lnTo>
-                    <a:pt x="4512219" y="1687385"/>
-                  </a:lnTo>
-                  <a:lnTo>
-                    <a:pt x="4583841" y="1688607"/>
-                  </a:lnTo>
-                  <a:lnTo>
-                    <a:pt x="4655464" y="1689827"/>
-                  </a:lnTo>
-                  <a:lnTo>
-                    <a:pt x="4727086" y="1691045"/>
-                  </a:lnTo>
-                  <a:lnTo>
-                    <a:pt x="4798709" y="1692261"/>
-                  </a:lnTo>
-                  <a:lnTo>
-                    <a:pt x="4870331" y="1693475"/>
-                  </a:lnTo>
-                  <a:lnTo>
-                    <a:pt x="4941954" y="1694688"/>
-                  </a:lnTo>
-                  <a:lnTo>
-                    <a:pt x="5013576" y="1695898"/>
-                  </a:lnTo>
-                  <a:lnTo>
-                    <a:pt x="5085199" y="1697107"/>
-                  </a:lnTo>
-                  <a:lnTo>
-                    <a:pt x="5156821" y="1698314"/>
-                  </a:lnTo>
-                  <a:lnTo>
-                    <a:pt x="5228444" y="1699519"/>
-                  </a:lnTo>
-                  <a:lnTo>
-                    <a:pt x="5300066" y="1700723"/>
-                  </a:lnTo>
-                  <a:lnTo>
-                    <a:pt x="5371689" y="1701924"/>
-                  </a:lnTo>
-                  <a:lnTo>
-                    <a:pt x="5443311" y="1703124"/>
-                  </a:lnTo>
-                  <a:lnTo>
-                    <a:pt x="5514934" y="1704322"/>
-                  </a:lnTo>
-                  <a:lnTo>
-                    <a:pt x="5586557" y="1705518"/>
-                  </a:lnTo>
-                  <a:lnTo>
-                    <a:pt x="5658179" y="1706712"/>
-                  </a:lnTo>
-                  <a:lnTo>
-                    <a:pt x="5729802" y="1707904"/>
-                  </a:lnTo>
-                  <a:lnTo>
-                    <a:pt x="5801424" y="1709095"/>
-                  </a:lnTo>
-                  <a:lnTo>
-                    <a:pt x="5873047" y="1710284"/>
-                  </a:lnTo>
-                  <a:lnTo>
-                    <a:pt x="5944669" y="1711471"/>
-                  </a:lnTo>
-                  <a:lnTo>
-                    <a:pt x="6016292" y="1712656"/>
-                  </a:lnTo>
-                  <a:lnTo>
-                    <a:pt x="6087914" y="1713839"/>
-                  </a:lnTo>
-                  <a:lnTo>
-                    <a:pt x="6159537" y="1715021"/>
-                  </a:lnTo>
-                  <a:lnTo>
-                    <a:pt x="6231159" y="1716200"/>
-                  </a:lnTo>
-                  <a:lnTo>
-                    <a:pt x="6302782" y="1717379"/>
-                  </a:lnTo>
-                  <a:lnTo>
-                    <a:pt x="6374404" y="1718555"/>
-                  </a:lnTo>
-                  <a:lnTo>
-                    <a:pt x="6446027" y="1719729"/>
-                  </a:lnTo>
-                  <a:lnTo>
-                    <a:pt x="6517649" y="1720902"/>
-                  </a:lnTo>
-                  <a:lnTo>
-                    <a:pt x="6589272" y="1722073"/>
-                  </a:lnTo>
-                  <a:lnTo>
-                    <a:pt x="6660894" y="1723242"/>
-                  </a:lnTo>
-                  <a:lnTo>
-                    <a:pt x="6732517" y="1724409"/>
-                  </a:lnTo>
-                  <a:lnTo>
-                    <a:pt x="6804139" y="1725575"/>
-                  </a:lnTo>
-                  <a:lnTo>
-                    <a:pt x="6875762" y="1726738"/>
-                  </a:lnTo>
-                  <a:lnTo>
-                    <a:pt x="6947385" y="1727900"/>
-                  </a:lnTo>
-                  <a:lnTo>
-                    <a:pt x="7019007" y="1729061"/>
-                  </a:lnTo>
-                  <a:lnTo>
-                    <a:pt x="7090630" y="1730219"/>
-                  </a:lnTo>
-                  <a:lnTo>
-                    <a:pt x="7090630" y="2289306"/>
-                  </a:lnTo>
-                  <a:lnTo>
-                    <a:pt x="7019007" y="2284094"/>
-                  </a:lnTo>
-                  <a:lnTo>
-                    <a:pt x="6947385" y="2278747"/>
-                  </a:lnTo>
-                  <a:lnTo>
-                    <a:pt x="6875762" y="2273264"/>
-                  </a:lnTo>
-                  <a:lnTo>
-                    <a:pt x="6804139" y="2267640"/>
-                  </a:lnTo>
-                  <a:lnTo>
-                    <a:pt x="6732517" y="2261872"/>
-                  </a:lnTo>
-                  <a:lnTo>
-                    <a:pt x="6660894" y="2255956"/>
-                  </a:lnTo>
-                  <a:lnTo>
-                    <a:pt x="6589272" y="2249888"/>
-                  </a:lnTo>
-                  <a:lnTo>
-                    <a:pt x="6517649" y="2243665"/>
-                  </a:lnTo>
-                  <a:lnTo>
-                    <a:pt x="6446027" y="2237282"/>
-                  </a:lnTo>
-                  <a:lnTo>
-                    <a:pt x="6374404" y="2230736"/>
-                  </a:lnTo>
-                  <a:lnTo>
-                    <a:pt x="6302782" y="2224021"/>
-                  </a:lnTo>
-                  <a:lnTo>
-                    <a:pt x="6231159" y="2217135"/>
-                  </a:lnTo>
-                  <a:lnTo>
-                    <a:pt x="6159537" y="2210071"/>
-                  </a:lnTo>
-                  <a:lnTo>
-                    <a:pt x="6087914" y="2202827"/>
-                  </a:lnTo>
-                  <a:lnTo>
-                    <a:pt x="6016292" y="2195397"/>
-                  </a:lnTo>
-                  <a:lnTo>
-                    <a:pt x="5944669" y="2187777"/>
-                  </a:lnTo>
-                  <a:lnTo>
-                    <a:pt x="5873047" y="2179961"/>
-                  </a:lnTo>
-                  <a:lnTo>
-                    <a:pt x="5801424" y="2171945"/>
-                  </a:lnTo>
-                  <a:lnTo>
-                    <a:pt x="5729802" y="2163723"/>
-                  </a:lnTo>
-                  <a:lnTo>
-                    <a:pt x="5658179" y="2155290"/>
-                  </a:lnTo>
-                  <a:lnTo>
-                    <a:pt x="5586557" y="2146641"/>
-                  </a:lnTo>
-                  <a:lnTo>
-                    <a:pt x="5514934" y="2137771"/>
-                  </a:lnTo>
-                  <a:lnTo>
-                    <a:pt x="5443311" y="2128673"/>
-                  </a:lnTo>
-                  <a:lnTo>
-                    <a:pt x="5371689" y="2119341"/>
-                  </a:lnTo>
-                  <a:lnTo>
-                    <a:pt x="5300066" y="2109771"/>
-                  </a:lnTo>
-                  <a:lnTo>
-                    <a:pt x="5228444" y="2099955"/>
-                  </a:lnTo>
-                  <a:lnTo>
-                    <a:pt x="5156821" y="2089887"/>
-                  </a:lnTo>
-                  <a:lnTo>
-                    <a:pt x="5085199" y="2079561"/>
-                  </a:lnTo>
-                  <a:lnTo>
-                    <a:pt x="5013576" y="2068970"/>
-                  </a:lnTo>
-                  <a:lnTo>
-                    <a:pt x="4941954" y="2058108"/>
-                  </a:lnTo>
-                  <a:lnTo>
-                    <a:pt x="4870331" y="2046968"/>
-                  </a:lnTo>
-                  <a:lnTo>
-                    <a:pt x="4798709" y="2035541"/>
-                  </a:lnTo>
-                  <a:lnTo>
-                    <a:pt x="4727086" y="2023822"/>
-                  </a:lnTo>
-                  <a:lnTo>
-                    <a:pt x="4655464" y="2011802"/>
-                  </a:lnTo>
-                  <a:lnTo>
-                    <a:pt x="4583841" y="1999474"/>
-                  </a:lnTo>
-                  <a:lnTo>
-                    <a:pt x="4512219" y="1986830"/>
-                  </a:lnTo>
-                  <a:lnTo>
-                    <a:pt x="4440596" y="1973862"/>
-                  </a:lnTo>
-                  <a:lnTo>
-                    <a:pt x="4368974" y="1960561"/>
-                  </a:lnTo>
-                  <a:lnTo>
-                    <a:pt x="4297351" y="1946919"/>
-                  </a:lnTo>
-                  <a:lnTo>
-                    <a:pt x="4225729" y="1932928"/>
-                  </a:lnTo>
-                  <a:lnTo>
-                    <a:pt x="4154106" y="1918577"/>
-                  </a:lnTo>
-                  <a:lnTo>
-                    <a:pt x="4082483" y="1903859"/>
-                  </a:lnTo>
-                  <a:lnTo>
-                    <a:pt x="4010861" y="1888763"/>
-                  </a:lnTo>
-                  <a:lnTo>
-                    <a:pt x="3939238" y="1873280"/>
-                  </a:lnTo>
-                  <a:lnTo>
-                    <a:pt x="3867616" y="1857401"/>
-                  </a:lnTo>
-                  <a:lnTo>
-                    <a:pt x="3795993" y="1841114"/>
-                  </a:lnTo>
-                  <a:lnTo>
-                    <a:pt x="3724371" y="1824409"/>
-                  </a:lnTo>
-                  <a:lnTo>
-                    <a:pt x="3652748" y="1807276"/>
-                  </a:lnTo>
-                  <a:lnTo>
-                    <a:pt x="3581126" y="1789704"/>
-                  </a:lnTo>
-                  <a:lnTo>
-                    <a:pt x="3509503" y="1771681"/>
-                  </a:lnTo>
-                  <a:lnTo>
-                    <a:pt x="3437881" y="1753197"/>
-                  </a:lnTo>
-                  <a:lnTo>
-                    <a:pt x="3366258" y="1734238"/>
-                  </a:lnTo>
-                  <a:lnTo>
-                    <a:pt x="3294636" y="1714793"/>
-                  </a:lnTo>
-                  <a:lnTo>
-                    <a:pt x="3223013" y="1694849"/>
-                  </a:lnTo>
-                  <a:lnTo>
-                    <a:pt x="3151391" y="1674395"/>
-                  </a:lnTo>
-                  <a:lnTo>
-                    <a:pt x="3079768" y="1662557"/>
-                  </a:lnTo>
-                  <a:lnTo>
-                    <a:pt x="3008146" y="1661296"/>
-                  </a:lnTo>
-                  <a:lnTo>
-                    <a:pt x="2936523" y="1660032"/>
-                  </a:lnTo>
-                  <a:lnTo>
-                    <a:pt x="2864901" y="1658767"/>
-                  </a:lnTo>
-                  <a:lnTo>
-                    <a:pt x="2793278" y="1657500"/>
-                  </a:lnTo>
-                  <a:lnTo>
-                    <a:pt x="2721655" y="1656231"/>
-                  </a:lnTo>
-                  <a:lnTo>
-                    <a:pt x="2650033" y="1654960"/>
-                  </a:lnTo>
-                  <a:lnTo>
-                    <a:pt x="2578410" y="1653687"/>
-                  </a:lnTo>
-                  <a:lnTo>
-                    <a:pt x="2506788" y="1652413"/>
-                  </a:lnTo>
-                  <a:lnTo>
-                    <a:pt x="2435165" y="1651136"/>
-                  </a:lnTo>
-                  <a:lnTo>
-                    <a:pt x="2363543" y="1649857"/>
-                  </a:lnTo>
-                  <a:lnTo>
-                    <a:pt x="2291920" y="1648577"/>
-                  </a:lnTo>
-                  <a:lnTo>
-                    <a:pt x="2220298" y="1647294"/>
-                  </a:lnTo>
-                  <a:lnTo>
-                    <a:pt x="2148675" y="1646010"/>
-                  </a:lnTo>
-                  <a:lnTo>
-                    <a:pt x="2077053" y="1644723"/>
-                  </a:lnTo>
-                  <a:lnTo>
-                    <a:pt x="2005430" y="1643435"/>
-                  </a:lnTo>
-                  <a:lnTo>
-                    <a:pt x="1933808" y="1642144"/>
-                  </a:lnTo>
-                  <a:lnTo>
-                    <a:pt x="1862185" y="1640852"/>
-                  </a:lnTo>
-                  <a:lnTo>
-                    <a:pt x="1790563" y="1639558"/>
-                  </a:lnTo>
-                  <a:lnTo>
-                    <a:pt x="1718940" y="1638261"/>
-                  </a:lnTo>
-                  <a:lnTo>
-                    <a:pt x="1647318" y="1636963"/>
-                  </a:lnTo>
-                  <a:lnTo>
-                    <a:pt x="1575695" y="1635663"/>
-                  </a:lnTo>
-                  <a:lnTo>
-                    <a:pt x="1504073" y="1634361"/>
-                  </a:lnTo>
-                  <a:lnTo>
-                    <a:pt x="1432450" y="1633057"/>
-                  </a:lnTo>
-                  <a:lnTo>
-                    <a:pt x="1360827" y="1631751"/>
-                  </a:lnTo>
-                  <a:lnTo>
-                    <a:pt x="1289205" y="1630442"/>
-                  </a:lnTo>
-                  <a:lnTo>
-                    <a:pt x="1217582" y="1629132"/>
-                  </a:lnTo>
-                  <a:lnTo>
-                    <a:pt x="1145960" y="1627820"/>
-                  </a:lnTo>
-                  <a:lnTo>
-                    <a:pt x="1074337" y="1626506"/>
-                  </a:lnTo>
-                  <a:lnTo>
-                    <a:pt x="1002715" y="1625190"/>
-                  </a:lnTo>
-                  <a:lnTo>
-                    <a:pt x="931092" y="1623872"/>
-                  </a:lnTo>
-                  <a:lnTo>
-                    <a:pt x="859470" y="1622552"/>
-                  </a:lnTo>
-                  <a:lnTo>
-                    <a:pt x="787847" y="1621230"/>
-                  </a:lnTo>
-                  <a:lnTo>
-                    <a:pt x="716225" y="1619906"/>
-                  </a:lnTo>
-                  <a:lnTo>
-                    <a:pt x="644602" y="1618579"/>
-                  </a:lnTo>
-                  <a:lnTo>
-                    <a:pt x="572980" y="1617251"/>
-                  </a:lnTo>
-                  <a:lnTo>
-                    <a:pt x="501357" y="1615921"/>
-                  </a:lnTo>
-                  <a:lnTo>
-                    <a:pt x="429735" y="1614589"/>
-                  </a:lnTo>
-                  <a:lnTo>
-                    <a:pt x="358112" y="1613255"/>
-                  </a:lnTo>
-                  <a:lnTo>
-                    <a:pt x="286490" y="1611919"/>
-                  </a:lnTo>
-                  <a:lnTo>
-                    <a:pt x="214867" y="1610580"/>
-                  </a:lnTo>
-                  <a:lnTo>
-                    <a:pt x="143245" y="1609240"/>
-                  </a:lnTo>
-                  <a:lnTo>
-                    <a:pt x="71622" y="1607898"/>
-                  </a:lnTo>
-                  <a:lnTo>
-                    <a:pt x="0" y="1606553"/>
+                    <a:pt x="70344" y="22487"/>
+                  </a:lnTo>
+                  <a:lnTo>
+                    <a:pt x="140688" y="44413"/>
+                  </a:lnTo>
+                  <a:lnTo>
+                    <a:pt x="211033" y="65790"/>
+                  </a:lnTo>
+                  <a:lnTo>
+                    <a:pt x="281377" y="86633"/>
+                  </a:lnTo>
+                  <a:lnTo>
+                    <a:pt x="351722" y="106955"/>
+                  </a:lnTo>
+                  <a:lnTo>
+                    <a:pt x="422066" y="126769"/>
+                  </a:lnTo>
+                  <a:lnTo>
+                    <a:pt x="492411" y="146087"/>
+                  </a:lnTo>
+                  <a:lnTo>
+                    <a:pt x="562755" y="164923"/>
+                  </a:lnTo>
+                  <a:lnTo>
+                    <a:pt x="633100" y="183288"/>
+                  </a:lnTo>
+                  <a:lnTo>
+                    <a:pt x="703444" y="201193"/>
+                  </a:lnTo>
+                  <a:lnTo>
+                    <a:pt x="773789" y="218651"/>
+                  </a:lnTo>
+                  <a:lnTo>
+                    <a:pt x="844133" y="235673"/>
+                  </a:lnTo>
+                  <a:lnTo>
+                    <a:pt x="914478" y="252269"/>
+                  </a:lnTo>
+                  <a:lnTo>
+                    <a:pt x="984822" y="268450"/>
+                  </a:lnTo>
+                  <a:lnTo>
+                    <a:pt x="1055167" y="284226"/>
+                  </a:lnTo>
+                  <a:lnTo>
+                    <a:pt x="1125511" y="299608"/>
+                  </a:lnTo>
+                  <a:lnTo>
+                    <a:pt x="1195856" y="314606"/>
+                  </a:lnTo>
+                  <a:lnTo>
+                    <a:pt x="1266200" y="329229"/>
+                  </a:lnTo>
+                  <a:lnTo>
+                    <a:pt x="1336545" y="343486"/>
+                  </a:lnTo>
+                  <a:lnTo>
+                    <a:pt x="1406889" y="357386"/>
+                  </a:lnTo>
+                  <a:lnTo>
+                    <a:pt x="1477234" y="370940"/>
+                  </a:lnTo>
+                  <a:lnTo>
+                    <a:pt x="1547578" y="384154"/>
+                  </a:lnTo>
+                  <a:lnTo>
+                    <a:pt x="1617923" y="397038"/>
+                  </a:lnTo>
+                  <a:lnTo>
+                    <a:pt x="1688267" y="409600"/>
+                  </a:lnTo>
+                  <a:lnTo>
+                    <a:pt x="1758612" y="421848"/>
+                  </a:lnTo>
+                  <a:lnTo>
+                    <a:pt x="1828956" y="433789"/>
+                  </a:lnTo>
+                  <a:lnTo>
+                    <a:pt x="1899301" y="445432"/>
+                  </a:lnTo>
+                  <a:lnTo>
+                    <a:pt x="1969645" y="456785"/>
+                  </a:lnTo>
+                  <a:lnTo>
+                    <a:pt x="2039990" y="467853"/>
+                  </a:lnTo>
+                  <a:lnTo>
+                    <a:pt x="2110334" y="478644"/>
+                  </a:lnTo>
+                  <a:lnTo>
+                    <a:pt x="2180679" y="489166"/>
+                  </a:lnTo>
+                  <a:lnTo>
+                    <a:pt x="2251023" y="499425"/>
+                  </a:lnTo>
+                  <a:lnTo>
+                    <a:pt x="2321368" y="509427"/>
+                  </a:lnTo>
+                  <a:lnTo>
+                    <a:pt x="2391712" y="519179"/>
+                  </a:lnTo>
+                  <a:lnTo>
+                    <a:pt x="2462057" y="528688"/>
+                  </a:lnTo>
+                  <a:lnTo>
+                    <a:pt x="2532401" y="537958"/>
+                  </a:lnTo>
+                  <a:lnTo>
+                    <a:pt x="2602746" y="546997"/>
+                  </a:lnTo>
+                  <a:lnTo>
+                    <a:pt x="2673090" y="555810"/>
+                  </a:lnTo>
+                  <a:lnTo>
+                    <a:pt x="2743435" y="564403"/>
+                  </a:lnTo>
+                  <a:lnTo>
+                    <a:pt x="2813779" y="572781"/>
+                  </a:lnTo>
+                  <a:lnTo>
+                    <a:pt x="2884124" y="580949"/>
+                  </a:lnTo>
+                  <a:lnTo>
+                    <a:pt x="2954468" y="588913"/>
+                  </a:lnTo>
+                  <a:lnTo>
+                    <a:pt x="3024813" y="596678"/>
+                  </a:lnTo>
+                  <a:lnTo>
+                    <a:pt x="3095157" y="600432"/>
+                  </a:lnTo>
+                  <a:lnTo>
+                    <a:pt x="3165502" y="600886"/>
+                  </a:lnTo>
+                  <a:lnTo>
+                    <a:pt x="3235846" y="601339"/>
+                  </a:lnTo>
+                  <a:lnTo>
+                    <a:pt x="3306191" y="601791"/>
+                  </a:lnTo>
+                  <a:lnTo>
+                    <a:pt x="3376535" y="602243"/>
+                  </a:lnTo>
+                  <a:lnTo>
+                    <a:pt x="3446880" y="602694"/>
+                  </a:lnTo>
+                  <a:lnTo>
+                    <a:pt x="3517224" y="603144"/>
+                  </a:lnTo>
+                  <a:lnTo>
+                    <a:pt x="3587569" y="603594"/>
+                  </a:lnTo>
+                  <a:lnTo>
+                    <a:pt x="3657913" y="604043"/>
+                  </a:lnTo>
+                  <a:lnTo>
+                    <a:pt x="3728257" y="604491"/>
+                  </a:lnTo>
+                  <a:lnTo>
+                    <a:pt x="3798602" y="604939"/>
+                  </a:lnTo>
+                  <a:lnTo>
+                    <a:pt x="3868946" y="605386"/>
+                  </a:lnTo>
+                  <a:lnTo>
+                    <a:pt x="3939291" y="605832"/>
+                  </a:lnTo>
+                  <a:lnTo>
+                    <a:pt x="4009635" y="606278"/>
+                  </a:lnTo>
+                  <a:lnTo>
+                    <a:pt x="4079980" y="606723"/>
+                  </a:lnTo>
+                  <a:lnTo>
+                    <a:pt x="4150324" y="607167"/>
+                  </a:lnTo>
+                  <a:lnTo>
+                    <a:pt x="4220669" y="607611"/>
+                  </a:lnTo>
+                  <a:lnTo>
+                    <a:pt x="4291013" y="608053"/>
+                  </a:lnTo>
+                  <a:lnTo>
+                    <a:pt x="4361358" y="608496"/>
+                  </a:lnTo>
+                  <a:lnTo>
+                    <a:pt x="4431702" y="608937"/>
+                  </a:lnTo>
+                  <a:lnTo>
+                    <a:pt x="4502047" y="609378"/>
+                  </a:lnTo>
+                  <a:lnTo>
+                    <a:pt x="4572391" y="609818"/>
+                  </a:lnTo>
+                  <a:lnTo>
+                    <a:pt x="4642736" y="610258"/>
+                  </a:lnTo>
+                  <a:lnTo>
+                    <a:pt x="4713080" y="610697"/>
+                  </a:lnTo>
+                  <a:lnTo>
+                    <a:pt x="4783425" y="611135"/>
+                  </a:lnTo>
+                  <a:lnTo>
+                    <a:pt x="4853769" y="611573"/>
+                  </a:lnTo>
+                  <a:lnTo>
+                    <a:pt x="4924114" y="612009"/>
+                  </a:lnTo>
+                  <a:lnTo>
+                    <a:pt x="4994458" y="612446"/>
+                  </a:lnTo>
+                  <a:lnTo>
+                    <a:pt x="5064803" y="612881"/>
+                  </a:lnTo>
+                  <a:lnTo>
+                    <a:pt x="5135147" y="613316"/>
+                  </a:lnTo>
+                  <a:lnTo>
+                    <a:pt x="5205492" y="613750"/>
+                  </a:lnTo>
+                  <a:lnTo>
+                    <a:pt x="5275836" y="614184"/>
+                  </a:lnTo>
+                  <a:lnTo>
+                    <a:pt x="5346181" y="614617"/>
+                  </a:lnTo>
+                  <a:lnTo>
+                    <a:pt x="5416525" y="615049"/>
+                  </a:lnTo>
+                  <a:lnTo>
+                    <a:pt x="5486870" y="615481"/>
+                  </a:lnTo>
+                  <a:lnTo>
+                    <a:pt x="5557214" y="615912"/>
+                  </a:lnTo>
+                  <a:lnTo>
+                    <a:pt x="5627559" y="616342"/>
+                  </a:lnTo>
+                  <a:lnTo>
+                    <a:pt x="5697903" y="616772"/>
+                  </a:lnTo>
+                  <a:lnTo>
+                    <a:pt x="5768248" y="617201"/>
+                  </a:lnTo>
+                  <a:lnTo>
+                    <a:pt x="5838592" y="617629"/>
+                  </a:lnTo>
+                  <a:lnTo>
+                    <a:pt x="5908937" y="618057"/>
+                  </a:lnTo>
+                  <a:lnTo>
+                    <a:pt x="5979281" y="618484"/>
+                  </a:lnTo>
+                  <a:lnTo>
+                    <a:pt x="6049626" y="618910"/>
+                  </a:lnTo>
+                  <a:lnTo>
+                    <a:pt x="6119970" y="619336"/>
+                  </a:lnTo>
+                  <a:lnTo>
+                    <a:pt x="6190315" y="619761"/>
+                  </a:lnTo>
+                  <a:lnTo>
+                    <a:pt x="6260659" y="620186"/>
+                  </a:lnTo>
+                  <a:lnTo>
+                    <a:pt x="6331004" y="620609"/>
+                  </a:lnTo>
+                  <a:lnTo>
+                    <a:pt x="6401348" y="621033"/>
+                  </a:lnTo>
+                  <a:lnTo>
+                    <a:pt x="6471693" y="621455"/>
+                  </a:lnTo>
+                  <a:lnTo>
+                    <a:pt x="6542037" y="621877"/>
+                  </a:lnTo>
+                  <a:lnTo>
+                    <a:pt x="6612382" y="622298"/>
+                  </a:lnTo>
+                  <a:lnTo>
+                    <a:pt x="6682726" y="622719"/>
+                  </a:lnTo>
+                  <a:lnTo>
+                    <a:pt x="6753071" y="623139"/>
+                  </a:lnTo>
+                  <a:lnTo>
+                    <a:pt x="6823415" y="623558"/>
+                  </a:lnTo>
+                  <a:lnTo>
+                    <a:pt x="6893760" y="623977"/>
+                  </a:lnTo>
+                  <a:lnTo>
+                    <a:pt x="6964104" y="624395"/>
+                  </a:lnTo>
+                  <a:lnTo>
+                    <a:pt x="6964104" y="826156"/>
+                  </a:lnTo>
+                  <a:lnTo>
+                    <a:pt x="6893760" y="824275"/>
+                  </a:lnTo>
+                  <a:lnTo>
+                    <a:pt x="6823415" y="822346"/>
+                  </a:lnTo>
+                  <a:lnTo>
+                    <a:pt x="6753071" y="820367"/>
+                  </a:lnTo>
+                  <a:lnTo>
+                    <a:pt x="6682726" y="818338"/>
+                  </a:lnTo>
+                  <a:lnTo>
+                    <a:pt x="6612382" y="816256"/>
+                  </a:lnTo>
+                  <a:lnTo>
+                    <a:pt x="6542037" y="814121"/>
+                  </a:lnTo>
+                  <a:lnTo>
+                    <a:pt x="6471693" y="811931"/>
+                  </a:lnTo>
+                  <a:lnTo>
+                    <a:pt x="6401348" y="809686"/>
+                  </a:lnTo>
+                  <a:lnTo>
+                    <a:pt x="6331004" y="807382"/>
+                  </a:lnTo>
+                  <a:lnTo>
+                    <a:pt x="6260659" y="805020"/>
+                  </a:lnTo>
+                  <a:lnTo>
+                    <a:pt x="6190315" y="802597"/>
+                  </a:lnTo>
+                  <a:lnTo>
+                    <a:pt x="6119970" y="800111"/>
+                  </a:lnTo>
+                  <a:lnTo>
+                    <a:pt x="6049626" y="797562"/>
+                  </a:lnTo>
+                  <a:lnTo>
+                    <a:pt x="5979281" y="794948"/>
+                  </a:lnTo>
+                  <a:lnTo>
+                    <a:pt x="5908937" y="792267"/>
+                  </a:lnTo>
+                  <a:lnTo>
+                    <a:pt x="5838592" y="789517"/>
+                  </a:lnTo>
+                  <a:lnTo>
+                    <a:pt x="5768248" y="786696"/>
+                  </a:lnTo>
+                  <a:lnTo>
+                    <a:pt x="5697903" y="783803"/>
+                  </a:lnTo>
+                  <a:lnTo>
+                    <a:pt x="5627559" y="780836"/>
+                  </a:lnTo>
+                  <a:lnTo>
+                    <a:pt x="5557214" y="777793"/>
+                  </a:lnTo>
+                  <a:lnTo>
+                    <a:pt x="5486870" y="774672"/>
+                  </a:lnTo>
+                  <a:lnTo>
+                    <a:pt x="5416525" y="771471"/>
+                  </a:lnTo>
+                  <a:lnTo>
+                    <a:pt x="5346181" y="768188"/>
+                  </a:lnTo>
+                  <a:lnTo>
+                    <a:pt x="5275836" y="764820"/>
+                  </a:lnTo>
+                  <a:lnTo>
+                    <a:pt x="5205492" y="761366"/>
+                  </a:lnTo>
+                  <a:lnTo>
+                    <a:pt x="5135147" y="757824"/>
+                  </a:lnTo>
+                  <a:lnTo>
+                    <a:pt x="5064803" y="754191"/>
+                  </a:lnTo>
+                  <a:lnTo>
+                    <a:pt x="4994458" y="750464"/>
+                  </a:lnTo>
+                  <a:lnTo>
+                    <a:pt x="4924114" y="746642"/>
+                  </a:lnTo>
+                  <a:lnTo>
+                    <a:pt x="4853769" y="742723"/>
+                  </a:lnTo>
+                  <a:lnTo>
+                    <a:pt x="4783425" y="738702"/>
+                  </a:lnTo>
+                  <a:lnTo>
+                    <a:pt x="4713080" y="734579"/>
+                  </a:lnTo>
+                  <a:lnTo>
+                    <a:pt x="4642736" y="730349"/>
+                  </a:lnTo>
+                  <a:lnTo>
+                    <a:pt x="4572391" y="726012"/>
+                  </a:lnTo>
+                  <a:lnTo>
+                    <a:pt x="4502047" y="721563"/>
+                  </a:lnTo>
+                  <a:lnTo>
+                    <a:pt x="4431702" y="717000"/>
+                  </a:lnTo>
+                  <a:lnTo>
+                    <a:pt x="4361358" y="712320"/>
+                  </a:lnTo>
+                  <a:lnTo>
+                    <a:pt x="4291013" y="707520"/>
+                  </a:lnTo>
+                  <a:lnTo>
+                    <a:pt x="4220669" y="702597"/>
+                  </a:lnTo>
+                  <a:lnTo>
+                    <a:pt x="4150324" y="697548"/>
+                  </a:lnTo>
+                  <a:lnTo>
+                    <a:pt x="4079980" y="692369"/>
+                  </a:lnTo>
+                  <a:lnTo>
+                    <a:pt x="4009635" y="687058"/>
+                  </a:lnTo>
+                  <a:lnTo>
+                    <a:pt x="3939291" y="681610"/>
+                  </a:lnTo>
+                  <a:lnTo>
+                    <a:pt x="3868946" y="676023"/>
+                  </a:lnTo>
+                  <a:lnTo>
+                    <a:pt x="3798602" y="670292"/>
+                  </a:lnTo>
+                  <a:lnTo>
+                    <a:pt x="3728257" y="664414"/>
+                  </a:lnTo>
+                  <a:lnTo>
+                    <a:pt x="3657913" y="658386"/>
+                  </a:lnTo>
+                  <a:lnTo>
+                    <a:pt x="3587569" y="652203"/>
+                  </a:lnTo>
+                  <a:lnTo>
+                    <a:pt x="3517224" y="645862"/>
+                  </a:lnTo>
+                  <a:lnTo>
+                    <a:pt x="3446880" y="639358"/>
+                  </a:lnTo>
+                  <a:lnTo>
+                    <a:pt x="3376535" y="632687"/>
+                  </a:lnTo>
+                  <a:lnTo>
+                    <a:pt x="3306191" y="625845"/>
+                  </a:lnTo>
+                  <a:lnTo>
+                    <a:pt x="3235846" y="618828"/>
+                  </a:lnTo>
+                  <a:lnTo>
+                    <a:pt x="3165502" y="611631"/>
+                  </a:lnTo>
+                  <a:lnTo>
+                    <a:pt x="3095157" y="604249"/>
+                  </a:lnTo>
+                  <a:lnTo>
+                    <a:pt x="3024813" y="599977"/>
+                  </a:lnTo>
+                  <a:lnTo>
+                    <a:pt x="2954468" y="599522"/>
+                  </a:lnTo>
+                  <a:lnTo>
+                    <a:pt x="2884124" y="599066"/>
+                  </a:lnTo>
+                  <a:lnTo>
+                    <a:pt x="2813779" y="598610"/>
+                  </a:lnTo>
+                  <a:lnTo>
+                    <a:pt x="2743435" y="598152"/>
+                  </a:lnTo>
+                  <a:lnTo>
+                    <a:pt x="2673090" y="597695"/>
+                  </a:lnTo>
+                  <a:lnTo>
+                    <a:pt x="2602746" y="597236"/>
+                  </a:lnTo>
+                  <a:lnTo>
+                    <a:pt x="2532401" y="596777"/>
+                  </a:lnTo>
+                  <a:lnTo>
+                    <a:pt x="2462057" y="596317"/>
+                  </a:lnTo>
+                  <a:lnTo>
+                    <a:pt x="2391712" y="595856"/>
+                  </a:lnTo>
+                  <a:lnTo>
+                    <a:pt x="2321368" y="595394"/>
+                  </a:lnTo>
+                  <a:lnTo>
+                    <a:pt x="2251023" y="594932"/>
+                  </a:lnTo>
+                  <a:lnTo>
+                    <a:pt x="2180679" y="594469"/>
+                  </a:lnTo>
+                  <a:lnTo>
+                    <a:pt x="2110334" y="594006"/>
+                  </a:lnTo>
+                  <a:lnTo>
+                    <a:pt x="2039990" y="593542"/>
+                  </a:lnTo>
+                  <a:lnTo>
+                    <a:pt x="1969645" y="593077"/>
+                  </a:lnTo>
+                  <a:lnTo>
+                    <a:pt x="1899301" y="592611"/>
+                  </a:lnTo>
+                  <a:lnTo>
+                    <a:pt x="1828956" y="592145"/>
+                  </a:lnTo>
+                  <a:lnTo>
+                    <a:pt x="1758612" y="591677"/>
+                  </a:lnTo>
+                  <a:lnTo>
+                    <a:pt x="1688267" y="591210"/>
+                  </a:lnTo>
+                  <a:lnTo>
+                    <a:pt x="1617923" y="590741"/>
+                  </a:lnTo>
+                  <a:lnTo>
+                    <a:pt x="1547578" y="590272"/>
+                  </a:lnTo>
+                  <a:lnTo>
+                    <a:pt x="1477234" y="589802"/>
+                  </a:lnTo>
+                  <a:lnTo>
+                    <a:pt x="1406889" y="589331"/>
+                  </a:lnTo>
+                  <a:lnTo>
+                    <a:pt x="1336545" y="588860"/>
+                  </a:lnTo>
+                  <a:lnTo>
+                    <a:pt x="1266200" y="588388"/>
+                  </a:lnTo>
+                  <a:lnTo>
+                    <a:pt x="1195856" y="587915"/>
+                  </a:lnTo>
+                  <a:lnTo>
+                    <a:pt x="1125511" y="587442"/>
+                  </a:lnTo>
+                  <a:lnTo>
+                    <a:pt x="1055167" y="586967"/>
+                  </a:lnTo>
+                  <a:lnTo>
+                    <a:pt x="984822" y="586493"/>
+                  </a:lnTo>
+                  <a:lnTo>
+                    <a:pt x="914478" y="586017"/>
+                  </a:lnTo>
+                  <a:lnTo>
+                    <a:pt x="844133" y="585540"/>
+                  </a:lnTo>
+                  <a:lnTo>
+                    <a:pt x="773789" y="585063"/>
+                  </a:lnTo>
+                  <a:lnTo>
+                    <a:pt x="703444" y="584586"/>
+                  </a:lnTo>
+                  <a:lnTo>
+                    <a:pt x="633100" y="584107"/>
+                  </a:lnTo>
+                  <a:lnTo>
+                    <a:pt x="562755" y="583628"/>
+                  </a:lnTo>
+                  <a:lnTo>
+                    <a:pt x="492411" y="583148"/>
+                  </a:lnTo>
+                  <a:lnTo>
+                    <a:pt x="422066" y="582667"/>
+                  </a:lnTo>
+                  <a:lnTo>
+                    <a:pt x="351722" y="582185"/>
+                  </a:lnTo>
+                  <a:lnTo>
+                    <a:pt x="281377" y="581703"/>
+                  </a:lnTo>
+                  <a:lnTo>
+                    <a:pt x="211033" y="581220"/>
+                  </a:lnTo>
+                  <a:lnTo>
+                    <a:pt x="140688" y="580737"/>
+                  </a:lnTo>
+                  <a:lnTo>
+                    <a:pt x="70344" y="580252"/>
+                  </a:lnTo>
+                  <a:lnTo>
+                    <a:pt x="0" y="579767"/>
                   </a:lnTo>
                   <a:close/>
                 </a:path>
@@ -3670,643 +3705,318 @@
         </p:sp>
         <p:sp>
           <p:nvSpPr>
-            <p:cNvPr id="23" name="pl23"/>
-            <p:cNvSpPr/>
-            <p:nvPr/>
-          </p:nvSpPr>
-          <p:spPr>
-            <a:xfrm>
-              <a:off x="1172049" y="3064649"/>
-              <a:ext cx="7090630" cy="1730219"/>
-            </a:xfrm>
-            <a:custGeom>
-              <a:avLst/>
-              <a:pathLst>
-                <a:path w="7090630" h="1730219">
-                  <a:moveTo>
-                    <a:pt x="0" y="0"/>
-                  </a:moveTo>
-                  <a:lnTo>
-                    <a:pt x="71622" y="62314"/>
-                  </a:lnTo>
-                  <a:lnTo>
-                    <a:pt x="143245" y="123070"/>
-                  </a:lnTo>
-                  <a:lnTo>
-                    <a:pt x="214867" y="182307"/>
-                  </a:lnTo>
-                  <a:lnTo>
-                    <a:pt x="286490" y="240064"/>
-                  </a:lnTo>
-                  <a:lnTo>
-                    <a:pt x="358112" y="296377"/>
-                  </a:lnTo>
-                  <a:lnTo>
-                    <a:pt x="429735" y="351281"/>
-                  </a:lnTo>
-                  <a:lnTo>
-                    <a:pt x="501357" y="404814"/>
-                  </a:lnTo>
-                  <a:lnTo>
-                    <a:pt x="572980" y="457008"/>
-                  </a:lnTo>
-                  <a:lnTo>
-                    <a:pt x="644602" y="507897"/>
-                  </a:lnTo>
-                  <a:lnTo>
-                    <a:pt x="716225" y="557514"/>
-                  </a:lnTo>
-                  <a:lnTo>
-                    <a:pt x="787847" y="605890"/>
-                  </a:lnTo>
-                  <a:lnTo>
-                    <a:pt x="859470" y="653057"/>
-                  </a:lnTo>
-                  <a:lnTo>
-                    <a:pt x="931092" y="699045"/>
-                  </a:lnTo>
-                  <a:lnTo>
-                    <a:pt x="1002715" y="743883"/>
-                  </a:lnTo>
-                  <a:lnTo>
-                    <a:pt x="1074337" y="787601"/>
-                  </a:lnTo>
-                  <a:lnTo>
-                    <a:pt x="1145960" y="830225"/>
-                  </a:lnTo>
-                  <a:lnTo>
-                    <a:pt x="1217582" y="871784"/>
-                  </a:lnTo>
-                  <a:lnTo>
-                    <a:pt x="1289205" y="912304"/>
-                  </a:lnTo>
-                  <a:lnTo>
-                    <a:pt x="1360827" y="951811"/>
-                  </a:lnTo>
-                  <a:lnTo>
-                    <a:pt x="1432450" y="990330"/>
-                  </a:lnTo>
-                  <a:lnTo>
-                    <a:pt x="1504073" y="1027886"/>
-                  </a:lnTo>
-                  <a:lnTo>
-                    <a:pt x="1575695" y="1064504"/>
-                  </a:lnTo>
-                  <a:lnTo>
-                    <a:pt x="1647318" y="1100205"/>
-                  </a:lnTo>
-                  <a:lnTo>
-                    <a:pt x="1718940" y="1135015"/>
-                  </a:lnTo>
-                  <a:lnTo>
-                    <a:pt x="1790563" y="1168954"/>
-                  </a:lnTo>
-                  <a:lnTo>
-                    <a:pt x="1862185" y="1202045"/>
-                  </a:lnTo>
-                  <a:lnTo>
-                    <a:pt x="1933808" y="1234308"/>
-                  </a:lnTo>
-                  <a:lnTo>
-                    <a:pt x="2005430" y="1265765"/>
-                  </a:lnTo>
-                  <a:lnTo>
-                    <a:pt x="2077053" y="1296435"/>
-                  </a:lnTo>
-                  <a:lnTo>
-                    <a:pt x="2148675" y="1326339"/>
-                  </a:lnTo>
-                  <a:lnTo>
-                    <a:pt x="2220298" y="1355495"/>
-                  </a:lnTo>
-                  <a:lnTo>
-                    <a:pt x="2291920" y="1383923"/>
-                  </a:lnTo>
-                  <a:lnTo>
-                    <a:pt x="2363543" y="1411639"/>
-                  </a:lnTo>
-                  <a:lnTo>
-                    <a:pt x="2435165" y="1438663"/>
-                  </a:lnTo>
-                  <a:lnTo>
-                    <a:pt x="2506788" y="1465011"/>
-                  </a:lnTo>
-                  <a:lnTo>
-                    <a:pt x="2578410" y="1490700"/>
-                  </a:lnTo>
-                  <a:lnTo>
-                    <a:pt x="2650033" y="1515747"/>
-                  </a:lnTo>
-                  <a:lnTo>
-                    <a:pt x="2721655" y="1540168"/>
-                  </a:lnTo>
-                  <a:lnTo>
-                    <a:pt x="2793278" y="1563979"/>
-                  </a:lnTo>
-                  <a:lnTo>
-                    <a:pt x="2864901" y="1587194"/>
-                  </a:lnTo>
-                  <a:lnTo>
-                    <a:pt x="2936523" y="1609829"/>
-                  </a:lnTo>
-                  <a:lnTo>
-                    <a:pt x="3008146" y="1631898"/>
-                  </a:lnTo>
-                  <a:lnTo>
-                    <a:pt x="3079768" y="1653415"/>
-                  </a:lnTo>
-                  <a:lnTo>
-                    <a:pt x="3151391" y="1663816"/>
-                  </a:lnTo>
-                  <a:lnTo>
-                    <a:pt x="3223013" y="1665074"/>
-                  </a:lnTo>
-                  <a:lnTo>
-                    <a:pt x="3294636" y="1666329"/>
-                  </a:lnTo>
-                  <a:lnTo>
-                    <a:pt x="3366258" y="1667583"/>
-                  </a:lnTo>
-                  <a:lnTo>
-                    <a:pt x="3437881" y="1668835"/>
-                  </a:lnTo>
-                  <a:lnTo>
-                    <a:pt x="3509503" y="1670085"/>
-                  </a:lnTo>
-                  <a:lnTo>
-                    <a:pt x="3581126" y="1671333"/>
-                  </a:lnTo>
-                  <a:lnTo>
-                    <a:pt x="3652748" y="1672579"/>
-                  </a:lnTo>
-                  <a:lnTo>
-                    <a:pt x="3724371" y="1673823"/>
-                  </a:lnTo>
-                  <a:lnTo>
-                    <a:pt x="3795993" y="1675065"/>
-                  </a:lnTo>
-                  <a:lnTo>
-                    <a:pt x="3867616" y="1676306"/>
-                  </a:lnTo>
-                  <a:lnTo>
-                    <a:pt x="3939238" y="1677544"/>
-                  </a:lnTo>
-                  <a:lnTo>
-                    <a:pt x="4010861" y="1678781"/>
-                  </a:lnTo>
-                  <a:lnTo>
-                    <a:pt x="4082483" y="1680016"/>
-                  </a:lnTo>
-                  <a:lnTo>
-                    <a:pt x="4154106" y="1681249"/>
-                  </a:lnTo>
-                  <a:lnTo>
-                    <a:pt x="4225729" y="1682480"/>
-                  </a:lnTo>
-                  <a:lnTo>
-                    <a:pt x="4297351" y="1683709"/>
-                  </a:lnTo>
-                  <a:lnTo>
-                    <a:pt x="4368974" y="1684936"/>
-                  </a:lnTo>
-                  <a:lnTo>
-                    <a:pt x="4440596" y="1686161"/>
-                  </a:lnTo>
-                  <a:lnTo>
-                    <a:pt x="4512219" y="1687385"/>
-                  </a:lnTo>
-                  <a:lnTo>
-                    <a:pt x="4583841" y="1688607"/>
-                  </a:lnTo>
-                  <a:lnTo>
-                    <a:pt x="4655464" y="1689827"/>
-                  </a:lnTo>
-                  <a:lnTo>
-                    <a:pt x="4727086" y="1691045"/>
-                  </a:lnTo>
-                  <a:lnTo>
-                    <a:pt x="4798709" y="1692261"/>
-                  </a:lnTo>
-                  <a:lnTo>
-                    <a:pt x="4870331" y="1693475"/>
-                  </a:lnTo>
-                  <a:lnTo>
-                    <a:pt x="4941954" y="1694688"/>
-                  </a:lnTo>
-                  <a:lnTo>
-                    <a:pt x="5013576" y="1695898"/>
-                  </a:lnTo>
-                  <a:lnTo>
-                    <a:pt x="5085199" y="1697107"/>
-                  </a:lnTo>
-                  <a:lnTo>
-                    <a:pt x="5156821" y="1698314"/>
-                  </a:lnTo>
-                  <a:lnTo>
-                    <a:pt x="5228444" y="1699519"/>
-                  </a:lnTo>
-                  <a:lnTo>
-                    <a:pt x="5300066" y="1700723"/>
-                  </a:lnTo>
-                  <a:lnTo>
-                    <a:pt x="5371689" y="1701924"/>
-                  </a:lnTo>
-                  <a:lnTo>
-                    <a:pt x="5443311" y="1703124"/>
-                  </a:lnTo>
-                  <a:lnTo>
-                    <a:pt x="5514934" y="1704322"/>
-                  </a:lnTo>
-                  <a:lnTo>
-                    <a:pt x="5586557" y="1705518"/>
-                  </a:lnTo>
-                  <a:lnTo>
-                    <a:pt x="5658179" y="1706712"/>
-                  </a:lnTo>
-                  <a:lnTo>
-                    <a:pt x="5729802" y="1707904"/>
-                  </a:lnTo>
-                  <a:lnTo>
-                    <a:pt x="5801424" y="1709095"/>
-                  </a:lnTo>
-                  <a:lnTo>
-                    <a:pt x="5873047" y="1710284"/>
-                  </a:lnTo>
-                  <a:lnTo>
-                    <a:pt x="5944669" y="1711471"/>
-                  </a:lnTo>
-                  <a:lnTo>
-                    <a:pt x="6016292" y="1712656"/>
-                  </a:lnTo>
-                  <a:lnTo>
-                    <a:pt x="6087914" y="1713839"/>
-                  </a:lnTo>
-                  <a:lnTo>
-                    <a:pt x="6159537" y="1715021"/>
-                  </a:lnTo>
-                  <a:lnTo>
-                    <a:pt x="6231159" y="1716200"/>
-                  </a:lnTo>
-                  <a:lnTo>
-                    <a:pt x="6302782" y="1717379"/>
-                  </a:lnTo>
-                  <a:lnTo>
-                    <a:pt x="6374404" y="1718555"/>
-                  </a:lnTo>
-                  <a:lnTo>
-                    <a:pt x="6446027" y="1719729"/>
-                  </a:lnTo>
-                  <a:lnTo>
-                    <a:pt x="6517649" y="1720902"/>
-                  </a:lnTo>
-                  <a:lnTo>
-                    <a:pt x="6589272" y="1722073"/>
-                  </a:lnTo>
-                  <a:lnTo>
-                    <a:pt x="6660894" y="1723242"/>
-                  </a:lnTo>
-                  <a:lnTo>
-                    <a:pt x="6732517" y="1724409"/>
-                  </a:lnTo>
-                  <a:lnTo>
-                    <a:pt x="6804139" y="1725575"/>
-                  </a:lnTo>
-                  <a:lnTo>
-                    <a:pt x="6875762" y="1726738"/>
-                  </a:lnTo>
-                  <a:lnTo>
-                    <a:pt x="6947385" y="1727900"/>
-                  </a:lnTo>
-                  <a:lnTo>
-                    <a:pt x="7019007" y="1729061"/>
-                  </a:lnTo>
-                  <a:lnTo>
-                    <a:pt x="7090630" y="1730219"/>
-                  </a:lnTo>
-                </a:path>
-              </a:pathLst>
-            </a:custGeom>
-          </p:spPr>
-          <p:txBody>
-            <a:bodyPr/>
-            <a:lstStyle/>
-            <a:p/>
-          </p:txBody>
-        </p:sp>
-        <p:sp>
-          <p:nvSpPr>
             <p:cNvPr id="24" name="pl24"/>
             <p:cNvSpPr/>
             <p:nvPr/>
           </p:nvSpPr>
           <p:spPr>
             <a:xfrm>
-              <a:off x="1172049" y="4671202"/>
-              <a:ext cx="7090630" cy="682752"/>
+              <a:off x="1235312" y="2500773"/>
+              <a:ext cx="6964104" cy="624395"/>
             </a:xfrm>
             <a:custGeom>
               <a:avLst/>
               <a:pathLst>
-                <a:path w="7090630" h="682752">
+                <a:path w="6964104" h="624395">
                   <a:moveTo>
-                    <a:pt x="7090630" y="682752"/>
+                    <a:pt x="0" y="0"/>
                   </a:moveTo>
                   <a:lnTo>
-                    <a:pt x="7019007" y="677540"/>
-                  </a:lnTo>
-                  <a:lnTo>
-                    <a:pt x="6947385" y="672193"/>
-                  </a:lnTo>
-                  <a:lnTo>
-                    <a:pt x="6875762" y="666710"/>
-                  </a:lnTo>
-                  <a:lnTo>
-                    <a:pt x="6804139" y="661086"/>
-                  </a:lnTo>
-                  <a:lnTo>
-                    <a:pt x="6732517" y="655318"/>
-                  </a:lnTo>
-                  <a:lnTo>
-                    <a:pt x="6660894" y="649402"/>
-                  </a:lnTo>
-                  <a:lnTo>
-                    <a:pt x="6589272" y="643334"/>
-                  </a:lnTo>
-                  <a:lnTo>
-                    <a:pt x="6517649" y="637111"/>
-                  </a:lnTo>
-                  <a:lnTo>
-                    <a:pt x="6446027" y="630728"/>
-                  </a:lnTo>
-                  <a:lnTo>
-                    <a:pt x="6374404" y="624182"/>
-                  </a:lnTo>
-                  <a:lnTo>
-                    <a:pt x="6302782" y="617467"/>
-                  </a:lnTo>
-                  <a:lnTo>
-                    <a:pt x="6231159" y="610581"/>
-                  </a:lnTo>
-                  <a:lnTo>
-                    <a:pt x="6159537" y="603518"/>
-                  </a:lnTo>
-                  <a:lnTo>
-                    <a:pt x="6087914" y="596273"/>
-                  </a:lnTo>
-                  <a:lnTo>
-                    <a:pt x="6016292" y="588843"/>
-                  </a:lnTo>
-                  <a:lnTo>
-                    <a:pt x="5944669" y="581223"/>
-                  </a:lnTo>
-                  <a:lnTo>
-                    <a:pt x="5873047" y="573407"/>
-                  </a:lnTo>
-                  <a:lnTo>
-                    <a:pt x="5801424" y="565391"/>
-                  </a:lnTo>
-                  <a:lnTo>
-                    <a:pt x="5729802" y="557169"/>
-                  </a:lnTo>
-                  <a:lnTo>
-                    <a:pt x="5658179" y="548736"/>
-                  </a:lnTo>
-                  <a:lnTo>
-                    <a:pt x="5586557" y="540087"/>
-                  </a:lnTo>
-                  <a:lnTo>
-                    <a:pt x="5514934" y="531217"/>
-                  </a:lnTo>
-                  <a:lnTo>
-                    <a:pt x="5443311" y="522119"/>
-                  </a:lnTo>
-                  <a:lnTo>
-                    <a:pt x="5371689" y="512787"/>
-                  </a:lnTo>
-                  <a:lnTo>
-                    <a:pt x="5300066" y="503217"/>
-                  </a:lnTo>
-                  <a:lnTo>
-                    <a:pt x="5228444" y="493401"/>
-                  </a:lnTo>
-                  <a:lnTo>
-                    <a:pt x="5156821" y="483333"/>
-                  </a:lnTo>
-                  <a:lnTo>
-                    <a:pt x="5085199" y="473007"/>
-                  </a:lnTo>
-                  <a:lnTo>
-                    <a:pt x="5013576" y="462417"/>
-                  </a:lnTo>
-                  <a:lnTo>
-                    <a:pt x="4941954" y="451554"/>
-                  </a:lnTo>
-                  <a:lnTo>
-                    <a:pt x="4870331" y="440414"/>
-                  </a:lnTo>
-                  <a:lnTo>
-                    <a:pt x="4798709" y="428987"/>
-                  </a:lnTo>
-                  <a:lnTo>
-                    <a:pt x="4727086" y="417268"/>
-                  </a:lnTo>
-                  <a:lnTo>
-                    <a:pt x="4655464" y="405248"/>
-                  </a:lnTo>
-                  <a:lnTo>
-                    <a:pt x="4583841" y="392920"/>
-                  </a:lnTo>
-                  <a:lnTo>
-                    <a:pt x="4512219" y="380276"/>
-                  </a:lnTo>
-                  <a:lnTo>
-                    <a:pt x="4440596" y="367308"/>
-                  </a:lnTo>
-                  <a:lnTo>
-                    <a:pt x="4368974" y="354007"/>
-                  </a:lnTo>
-                  <a:lnTo>
-                    <a:pt x="4297351" y="340365"/>
-                  </a:lnTo>
-                  <a:lnTo>
-                    <a:pt x="4225729" y="326374"/>
-                  </a:lnTo>
-                  <a:lnTo>
-                    <a:pt x="4154106" y="312023"/>
-                  </a:lnTo>
-                  <a:lnTo>
-                    <a:pt x="4082483" y="297305"/>
-                  </a:lnTo>
-                  <a:lnTo>
-                    <a:pt x="4010861" y="282209"/>
-                  </a:lnTo>
-                  <a:lnTo>
-                    <a:pt x="3939238" y="266727"/>
-                  </a:lnTo>
-                  <a:lnTo>
-                    <a:pt x="3867616" y="250847"/>
-                  </a:lnTo>
-                  <a:lnTo>
-                    <a:pt x="3795993" y="234560"/>
-                  </a:lnTo>
-                  <a:lnTo>
-                    <a:pt x="3724371" y="217855"/>
-                  </a:lnTo>
-                  <a:lnTo>
-                    <a:pt x="3652748" y="200722"/>
-                  </a:lnTo>
-                  <a:lnTo>
-                    <a:pt x="3581126" y="183150"/>
-                  </a:lnTo>
-                  <a:lnTo>
-                    <a:pt x="3509503" y="165128"/>
-                  </a:lnTo>
-                  <a:lnTo>
-                    <a:pt x="3437881" y="146643"/>
-                  </a:lnTo>
-                  <a:lnTo>
-                    <a:pt x="3366258" y="127684"/>
-                  </a:lnTo>
-                  <a:lnTo>
-                    <a:pt x="3294636" y="108239"/>
-                  </a:lnTo>
-                  <a:lnTo>
-                    <a:pt x="3223013" y="88296"/>
-                  </a:lnTo>
-                  <a:lnTo>
-                    <a:pt x="3151391" y="67841"/>
-                  </a:lnTo>
-                  <a:lnTo>
-                    <a:pt x="3079768" y="56003"/>
-                  </a:lnTo>
-                  <a:lnTo>
-                    <a:pt x="3008146" y="54742"/>
-                  </a:lnTo>
-                  <a:lnTo>
-                    <a:pt x="2936523" y="53479"/>
-                  </a:lnTo>
-                  <a:lnTo>
-                    <a:pt x="2864901" y="52213"/>
-                  </a:lnTo>
-                  <a:lnTo>
-                    <a:pt x="2793278" y="50946"/>
-                  </a:lnTo>
-                  <a:lnTo>
-                    <a:pt x="2721655" y="49677"/>
-                  </a:lnTo>
-                  <a:lnTo>
-                    <a:pt x="2650033" y="48406"/>
-                  </a:lnTo>
-                  <a:lnTo>
-                    <a:pt x="2578410" y="47134"/>
-                  </a:lnTo>
-                  <a:lnTo>
-                    <a:pt x="2506788" y="45859"/>
-                  </a:lnTo>
-                  <a:lnTo>
-                    <a:pt x="2435165" y="44582"/>
-                  </a:lnTo>
-                  <a:lnTo>
-                    <a:pt x="2363543" y="43303"/>
-                  </a:lnTo>
-                  <a:lnTo>
-                    <a:pt x="2291920" y="42023"/>
-                  </a:lnTo>
-                  <a:lnTo>
-                    <a:pt x="2220298" y="40740"/>
-                  </a:lnTo>
-                  <a:lnTo>
-                    <a:pt x="2148675" y="39456"/>
-                  </a:lnTo>
-                  <a:lnTo>
-                    <a:pt x="2077053" y="38169"/>
-                  </a:lnTo>
-                  <a:lnTo>
-                    <a:pt x="2005430" y="36881"/>
-                  </a:lnTo>
-                  <a:lnTo>
-                    <a:pt x="1933808" y="35590"/>
-                  </a:lnTo>
-                  <a:lnTo>
-                    <a:pt x="1862185" y="34298"/>
-                  </a:lnTo>
-                  <a:lnTo>
-                    <a:pt x="1790563" y="33004"/>
-                  </a:lnTo>
-                  <a:lnTo>
-                    <a:pt x="1718940" y="31708"/>
-                  </a:lnTo>
-                  <a:lnTo>
-                    <a:pt x="1647318" y="30409"/>
-                  </a:lnTo>
-                  <a:lnTo>
-                    <a:pt x="1575695" y="29109"/>
-                  </a:lnTo>
-                  <a:lnTo>
-                    <a:pt x="1504073" y="27807"/>
-                  </a:lnTo>
-                  <a:lnTo>
-                    <a:pt x="1432450" y="26503"/>
-                  </a:lnTo>
-                  <a:lnTo>
-                    <a:pt x="1360827" y="25197"/>
-                  </a:lnTo>
-                  <a:lnTo>
-                    <a:pt x="1289205" y="23889"/>
-                  </a:lnTo>
-                  <a:lnTo>
-                    <a:pt x="1217582" y="22578"/>
-                  </a:lnTo>
-                  <a:lnTo>
-                    <a:pt x="1145960" y="21266"/>
-                  </a:lnTo>
-                  <a:lnTo>
-                    <a:pt x="1074337" y="19952"/>
-                  </a:lnTo>
-                  <a:lnTo>
-                    <a:pt x="1002715" y="18636"/>
-                  </a:lnTo>
-                  <a:lnTo>
-                    <a:pt x="931092" y="17318"/>
-                  </a:lnTo>
-                  <a:lnTo>
-                    <a:pt x="859470" y="15998"/>
-                  </a:lnTo>
-                  <a:lnTo>
-                    <a:pt x="787847" y="14676"/>
-                  </a:lnTo>
-                  <a:lnTo>
-                    <a:pt x="716225" y="13352"/>
-                  </a:lnTo>
-                  <a:lnTo>
-                    <a:pt x="644602" y="12026"/>
-                  </a:lnTo>
-                  <a:lnTo>
-                    <a:pt x="572980" y="10698"/>
-                  </a:lnTo>
-                  <a:lnTo>
-                    <a:pt x="501357" y="9367"/>
-                  </a:lnTo>
-                  <a:lnTo>
-                    <a:pt x="429735" y="8035"/>
-                  </a:lnTo>
-                  <a:lnTo>
-                    <a:pt x="358112" y="6701"/>
-                  </a:lnTo>
-                  <a:lnTo>
-                    <a:pt x="286490" y="5365"/>
-                  </a:lnTo>
-                  <a:lnTo>
-                    <a:pt x="214867" y="4026"/>
-                  </a:lnTo>
-                  <a:lnTo>
-                    <a:pt x="143245" y="2686"/>
-                  </a:lnTo>
-                  <a:lnTo>
-                    <a:pt x="71622" y="1344"/>
-                  </a:lnTo>
-                  <a:lnTo>
-                    <a:pt x="0" y="0"/>
+                    <a:pt x="70344" y="22487"/>
+                  </a:lnTo>
+                  <a:lnTo>
+                    <a:pt x="140688" y="44413"/>
+                  </a:lnTo>
+                  <a:lnTo>
+                    <a:pt x="211033" y="65790"/>
+                  </a:lnTo>
+                  <a:lnTo>
+                    <a:pt x="281377" y="86633"/>
+                  </a:lnTo>
+                  <a:lnTo>
+                    <a:pt x="351722" y="106955"/>
+                  </a:lnTo>
+                  <a:lnTo>
+                    <a:pt x="422066" y="126769"/>
+                  </a:lnTo>
+                  <a:lnTo>
+                    <a:pt x="492411" y="146087"/>
+                  </a:lnTo>
+                  <a:lnTo>
+                    <a:pt x="562755" y="164923"/>
+                  </a:lnTo>
+                  <a:lnTo>
+                    <a:pt x="633100" y="183288"/>
+                  </a:lnTo>
+                  <a:lnTo>
+                    <a:pt x="703444" y="201193"/>
+                  </a:lnTo>
+                  <a:lnTo>
+                    <a:pt x="773789" y="218651"/>
+                  </a:lnTo>
+                  <a:lnTo>
+                    <a:pt x="844133" y="235673"/>
+                  </a:lnTo>
+                  <a:lnTo>
+                    <a:pt x="914478" y="252269"/>
+                  </a:lnTo>
+                  <a:lnTo>
+                    <a:pt x="984822" y="268450"/>
+                  </a:lnTo>
+                  <a:lnTo>
+                    <a:pt x="1055167" y="284226"/>
+                  </a:lnTo>
+                  <a:lnTo>
+                    <a:pt x="1125511" y="299608"/>
+                  </a:lnTo>
+                  <a:lnTo>
+                    <a:pt x="1195856" y="314606"/>
+                  </a:lnTo>
+                  <a:lnTo>
+                    <a:pt x="1266200" y="329229"/>
+                  </a:lnTo>
+                  <a:lnTo>
+                    <a:pt x="1336545" y="343486"/>
+                  </a:lnTo>
+                  <a:lnTo>
+                    <a:pt x="1406889" y="357386"/>
+                  </a:lnTo>
+                  <a:lnTo>
+                    <a:pt x="1477234" y="370940"/>
+                  </a:lnTo>
+                  <a:lnTo>
+                    <a:pt x="1547578" y="384154"/>
+                  </a:lnTo>
+                  <a:lnTo>
+                    <a:pt x="1617923" y="397038"/>
+                  </a:lnTo>
+                  <a:lnTo>
+                    <a:pt x="1688267" y="409600"/>
+                  </a:lnTo>
+                  <a:lnTo>
+                    <a:pt x="1758612" y="421848"/>
+                  </a:lnTo>
+                  <a:lnTo>
+                    <a:pt x="1828956" y="433789"/>
+                  </a:lnTo>
+                  <a:lnTo>
+                    <a:pt x="1899301" y="445432"/>
+                  </a:lnTo>
+                  <a:lnTo>
+                    <a:pt x="1969645" y="456785"/>
+                  </a:lnTo>
+                  <a:lnTo>
+                    <a:pt x="2039990" y="467853"/>
+                  </a:lnTo>
+                  <a:lnTo>
+                    <a:pt x="2110334" y="478644"/>
+                  </a:lnTo>
+                  <a:lnTo>
+                    <a:pt x="2180679" y="489166"/>
+                  </a:lnTo>
+                  <a:lnTo>
+                    <a:pt x="2251023" y="499425"/>
+                  </a:lnTo>
+                  <a:lnTo>
+                    <a:pt x="2321368" y="509427"/>
+                  </a:lnTo>
+                  <a:lnTo>
+                    <a:pt x="2391712" y="519179"/>
+                  </a:lnTo>
+                  <a:lnTo>
+                    <a:pt x="2462057" y="528688"/>
+                  </a:lnTo>
+                  <a:lnTo>
+                    <a:pt x="2532401" y="537958"/>
+                  </a:lnTo>
+                  <a:lnTo>
+                    <a:pt x="2602746" y="546997"/>
+                  </a:lnTo>
+                  <a:lnTo>
+                    <a:pt x="2673090" y="555810"/>
+                  </a:lnTo>
+                  <a:lnTo>
+                    <a:pt x="2743435" y="564403"/>
+                  </a:lnTo>
+                  <a:lnTo>
+                    <a:pt x="2813779" y="572781"/>
+                  </a:lnTo>
+                  <a:lnTo>
+                    <a:pt x="2884124" y="580949"/>
+                  </a:lnTo>
+                  <a:lnTo>
+                    <a:pt x="2954468" y="588913"/>
+                  </a:lnTo>
+                  <a:lnTo>
+                    <a:pt x="3024813" y="596678"/>
+                  </a:lnTo>
+                  <a:lnTo>
+                    <a:pt x="3095157" y="600432"/>
+                  </a:lnTo>
+                  <a:lnTo>
+                    <a:pt x="3165502" y="600886"/>
+                  </a:lnTo>
+                  <a:lnTo>
+                    <a:pt x="3235846" y="601339"/>
+                  </a:lnTo>
+                  <a:lnTo>
+                    <a:pt x="3306191" y="601791"/>
+                  </a:lnTo>
+                  <a:lnTo>
+                    <a:pt x="3376535" y="602243"/>
+                  </a:lnTo>
+                  <a:lnTo>
+                    <a:pt x="3446880" y="602694"/>
+                  </a:lnTo>
+                  <a:lnTo>
+                    <a:pt x="3517224" y="603144"/>
+                  </a:lnTo>
+                  <a:lnTo>
+                    <a:pt x="3587569" y="603594"/>
+                  </a:lnTo>
+                  <a:lnTo>
+                    <a:pt x="3657913" y="604043"/>
+                  </a:lnTo>
+                  <a:lnTo>
+                    <a:pt x="3728257" y="604491"/>
+                  </a:lnTo>
+                  <a:lnTo>
+                    <a:pt x="3798602" y="604939"/>
+                  </a:lnTo>
+                  <a:lnTo>
+                    <a:pt x="3868946" y="605386"/>
+                  </a:lnTo>
+                  <a:lnTo>
+                    <a:pt x="3939291" y="605832"/>
+                  </a:lnTo>
+                  <a:lnTo>
+                    <a:pt x="4009635" y="606278"/>
+                  </a:lnTo>
+                  <a:lnTo>
+                    <a:pt x="4079980" y="606723"/>
+                  </a:lnTo>
+                  <a:lnTo>
+                    <a:pt x="4150324" y="607167"/>
+                  </a:lnTo>
+                  <a:lnTo>
+                    <a:pt x="4220669" y="607611"/>
+                  </a:lnTo>
+                  <a:lnTo>
+                    <a:pt x="4291013" y="608053"/>
+                  </a:lnTo>
+                  <a:lnTo>
+                    <a:pt x="4361358" y="608496"/>
+                  </a:lnTo>
+                  <a:lnTo>
+                    <a:pt x="4431702" y="608937"/>
+                  </a:lnTo>
+                  <a:lnTo>
+                    <a:pt x="4502047" y="609378"/>
+                  </a:lnTo>
+                  <a:lnTo>
+                    <a:pt x="4572391" y="609818"/>
+                  </a:lnTo>
+                  <a:lnTo>
+                    <a:pt x="4642736" y="610258"/>
+                  </a:lnTo>
+                  <a:lnTo>
+                    <a:pt x="4713080" y="610697"/>
+                  </a:lnTo>
+                  <a:lnTo>
+                    <a:pt x="4783425" y="611135"/>
+                  </a:lnTo>
+                  <a:lnTo>
+                    <a:pt x="4853769" y="611573"/>
+                  </a:lnTo>
+                  <a:lnTo>
+                    <a:pt x="4924114" y="612009"/>
+                  </a:lnTo>
+                  <a:lnTo>
+                    <a:pt x="4994458" y="612446"/>
+                  </a:lnTo>
+                  <a:lnTo>
+                    <a:pt x="5064803" y="612881"/>
+                  </a:lnTo>
+                  <a:lnTo>
+                    <a:pt x="5135147" y="613316"/>
+                  </a:lnTo>
+                  <a:lnTo>
+                    <a:pt x="5205492" y="613750"/>
+                  </a:lnTo>
+                  <a:lnTo>
+                    <a:pt x="5275836" y="614184"/>
+                  </a:lnTo>
+                  <a:lnTo>
+                    <a:pt x="5346181" y="614617"/>
+                  </a:lnTo>
+                  <a:lnTo>
+                    <a:pt x="5416525" y="615049"/>
+                  </a:lnTo>
+                  <a:lnTo>
+                    <a:pt x="5486870" y="615481"/>
+                  </a:lnTo>
+                  <a:lnTo>
+                    <a:pt x="5557214" y="615912"/>
+                  </a:lnTo>
+                  <a:lnTo>
+                    <a:pt x="5627559" y="616342"/>
+                  </a:lnTo>
+                  <a:lnTo>
+                    <a:pt x="5697903" y="616772"/>
+                  </a:lnTo>
+                  <a:lnTo>
+                    <a:pt x="5768248" y="617201"/>
+                  </a:lnTo>
+                  <a:lnTo>
+                    <a:pt x="5838592" y="617629"/>
+                  </a:lnTo>
+                  <a:lnTo>
+                    <a:pt x="5908937" y="618057"/>
+                  </a:lnTo>
+                  <a:lnTo>
+                    <a:pt x="5979281" y="618484"/>
+                  </a:lnTo>
+                  <a:lnTo>
+                    <a:pt x="6049626" y="618910"/>
+                  </a:lnTo>
+                  <a:lnTo>
+                    <a:pt x="6119970" y="619336"/>
+                  </a:lnTo>
+                  <a:lnTo>
+                    <a:pt x="6190315" y="619761"/>
+                  </a:lnTo>
+                  <a:lnTo>
+                    <a:pt x="6260659" y="620186"/>
+                  </a:lnTo>
+                  <a:lnTo>
+                    <a:pt x="6331004" y="620609"/>
+                  </a:lnTo>
+                  <a:lnTo>
+                    <a:pt x="6401348" y="621033"/>
+                  </a:lnTo>
+                  <a:lnTo>
+                    <a:pt x="6471693" y="621455"/>
+                  </a:lnTo>
+                  <a:lnTo>
+                    <a:pt x="6542037" y="621877"/>
+                  </a:lnTo>
+                  <a:lnTo>
+                    <a:pt x="6612382" y="622298"/>
+                  </a:lnTo>
+                  <a:lnTo>
+                    <a:pt x="6682726" y="622719"/>
+                  </a:lnTo>
+                  <a:lnTo>
+                    <a:pt x="6753071" y="623139"/>
+                  </a:lnTo>
+                  <a:lnTo>
+                    <a:pt x="6823415" y="623558"/>
+                  </a:lnTo>
+                  <a:lnTo>
+                    <a:pt x="6893760" y="623977"/>
+                  </a:lnTo>
+                  <a:lnTo>
+                    <a:pt x="6964104" y="624395"/>
                   </a:lnTo>
                 </a:path>
               </a:pathLst>
@@ -4326,312 +4036,637 @@
           </p:nvSpPr>
           <p:spPr>
             <a:xfrm>
-              <a:off x="1172049" y="4071127"/>
-              <a:ext cx="7090630" cy="1092438"/>
+              <a:off x="1235312" y="3080540"/>
+              <a:ext cx="6964104" cy="246389"/>
             </a:xfrm>
             <a:custGeom>
               <a:avLst/>
               <a:pathLst>
-                <a:path w="7090630" h="1092438">
+                <a:path w="6964104" h="246389">
+                  <a:moveTo>
+                    <a:pt x="6964104" y="246389"/>
+                  </a:moveTo>
+                  <a:lnTo>
+                    <a:pt x="6893760" y="244508"/>
+                  </a:lnTo>
+                  <a:lnTo>
+                    <a:pt x="6823415" y="242578"/>
+                  </a:lnTo>
+                  <a:lnTo>
+                    <a:pt x="6753071" y="240600"/>
+                  </a:lnTo>
+                  <a:lnTo>
+                    <a:pt x="6682726" y="238570"/>
+                  </a:lnTo>
+                  <a:lnTo>
+                    <a:pt x="6612382" y="236489"/>
+                  </a:lnTo>
+                  <a:lnTo>
+                    <a:pt x="6542037" y="234354"/>
+                  </a:lnTo>
+                  <a:lnTo>
+                    <a:pt x="6471693" y="232164"/>
+                  </a:lnTo>
+                  <a:lnTo>
+                    <a:pt x="6401348" y="229918"/>
+                  </a:lnTo>
+                  <a:lnTo>
+                    <a:pt x="6331004" y="227615"/>
+                  </a:lnTo>
+                  <a:lnTo>
+                    <a:pt x="6260659" y="225252"/>
+                  </a:lnTo>
+                  <a:lnTo>
+                    <a:pt x="6190315" y="222829"/>
+                  </a:lnTo>
+                  <a:lnTo>
+                    <a:pt x="6119970" y="220344"/>
+                  </a:lnTo>
+                  <a:lnTo>
+                    <a:pt x="6049626" y="217795"/>
+                  </a:lnTo>
+                  <a:lnTo>
+                    <a:pt x="5979281" y="215181"/>
+                  </a:lnTo>
+                  <a:lnTo>
+                    <a:pt x="5908937" y="212499"/>
+                  </a:lnTo>
+                  <a:lnTo>
+                    <a:pt x="5838592" y="209749"/>
+                  </a:lnTo>
+                  <a:lnTo>
+                    <a:pt x="5768248" y="206929"/>
+                  </a:lnTo>
+                  <a:lnTo>
+                    <a:pt x="5697903" y="204036"/>
+                  </a:lnTo>
+                  <a:lnTo>
+                    <a:pt x="5627559" y="201069"/>
+                  </a:lnTo>
+                  <a:lnTo>
+                    <a:pt x="5557214" y="198026"/>
+                  </a:lnTo>
+                  <a:lnTo>
+                    <a:pt x="5486870" y="194905"/>
+                  </a:lnTo>
+                  <a:lnTo>
+                    <a:pt x="5416525" y="191703"/>
+                  </a:lnTo>
+                  <a:lnTo>
+                    <a:pt x="5346181" y="188420"/>
+                  </a:lnTo>
+                  <a:lnTo>
+                    <a:pt x="5275836" y="185053"/>
+                  </a:lnTo>
+                  <a:lnTo>
+                    <a:pt x="5205492" y="181599"/>
+                  </a:lnTo>
+                  <a:lnTo>
+                    <a:pt x="5135147" y="178056"/>
+                  </a:lnTo>
+                  <a:lnTo>
+                    <a:pt x="5064803" y="174423"/>
+                  </a:lnTo>
+                  <a:lnTo>
+                    <a:pt x="4994458" y="170697"/>
+                  </a:lnTo>
+                  <a:lnTo>
+                    <a:pt x="4924114" y="166875"/>
+                  </a:lnTo>
+                  <a:lnTo>
+                    <a:pt x="4853769" y="162955"/>
+                  </a:lnTo>
+                  <a:lnTo>
+                    <a:pt x="4783425" y="158935"/>
+                  </a:lnTo>
+                  <a:lnTo>
+                    <a:pt x="4713080" y="154811"/>
+                  </a:lnTo>
+                  <a:lnTo>
+                    <a:pt x="4642736" y="150582"/>
+                  </a:lnTo>
+                  <a:lnTo>
+                    <a:pt x="4572391" y="146244"/>
+                  </a:lnTo>
+                  <a:lnTo>
+                    <a:pt x="4502047" y="141795"/>
+                  </a:lnTo>
+                  <a:lnTo>
+                    <a:pt x="4431702" y="137232"/>
+                  </a:lnTo>
+                  <a:lnTo>
+                    <a:pt x="4361358" y="132553"/>
+                  </a:lnTo>
+                  <a:lnTo>
+                    <a:pt x="4291013" y="127753"/>
+                  </a:lnTo>
+                  <a:lnTo>
+                    <a:pt x="4220669" y="122830"/>
+                  </a:lnTo>
+                  <a:lnTo>
+                    <a:pt x="4150324" y="117780"/>
+                  </a:lnTo>
+                  <a:lnTo>
+                    <a:pt x="4079980" y="112602"/>
+                  </a:lnTo>
+                  <a:lnTo>
+                    <a:pt x="4009635" y="107290"/>
+                  </a:lnTo>
+                  <a:lnTo>
+                    <a:pt x="3939291" y="101842"/>
+                  </a:lnTo>
+                  <a:lnTo>
+                    <a:pt x="3868946" y="96255"/>
+                  </a:lnTo>
+                  <a:lnTo>
+                    <a:pt x="3798602" y="90524"/>
+                  </a:lnTo>
+                  <a:lnTo>
+                    <a:pt x="3728257" y="84647"/>
+                  </a:lnTo>
+                  <a:lnTo>
+                    <a:pt x="3657913" y="78619"/>
+                  </a:lnTo>
+                  <a:lnTo>
+                    <a:pt x="3587569" y="72436"/>
+                  </a:lnTo>
+                  <a:lnTo>
+                    <a:pt x="3517224" y="66094"/>
+                  </a:lnTo>
+                  <a:lnTo>
+                    <a:pt x="3446880" y="59590"/>
+                  </a:lnTo>
+                  <a:lnTo>
+                    <a:pt x="3376535" y="52920"/>
+                  </a:lnTo>
+                  <a:lnTo>
+                    <a:pt x="3306191" y="46078"/>
+                  </a:lnTo>
+                  <a:lnTo>
+                    <a:pt x="3235846" y="39061"/>
+                  </a:lnTo>
+                  <a:lnTo>
+                    <a:pt x="3165502" y="31863"/>
+                  </a:lnTo>
+                  <a:lnTo>
+                    <a:pt x="3095157" y="24482"/>
+                  </a:lnTo>
+                  <a:lnTo>
+                    <a:pt x="3024813" y="20210"/>
+                  </a:lnTo>
+                  <a:lnTo>
+                    <a:pt x="2954468" y="19755"/>
+                  </a:lnTo>
+                  <a:lnTo>
+                    <a:pt x="2884124" y="19299"/>
+                  </a:lnTo>
+                  <a:lnTo>
+                    <a:pt x="2813779" y="18842"/>
+                  </a:lnTo>
+                  <a:lnTo>
+                    <a:pt x="2743435" y="18385"/>
+                  </a:lnTo>
+                  <a:lnTo>
+                    <a:pt x="2673090" y="17927"/>
+                  </a:lnTo>
+                  <a:lnTo>
+                    <a:pt x="2602746" y="17468"/>
+                  </a:lnTo>
+                  <a:lnTo>
+                    <a:pt x="2532401" y="17009"/>
+                  </a:lnTo>
+                  <a:lnTo>
+                    <a:pt x="2462057" y="16549"/>
+                  </a:lnTo>
+                  <a:lnTo>
+                    <a:pt x="2391712" y="16088"/>
+                  </a:lnTo>
+                  <a:lnTo>
+                    <a:pt x="2321368" y="15627"/>
+                  </a:lnTo>
+                  <a:lnTo>
+                    <a:pt x="2251023" y="15165"/>
+                  </a:lnTo>
+                  <a:lnTo>
+                    <a:pt x="2180679" y="14702"/>
+                  </a:lnTo>
+                  <a:lnTo>
+                    <a:pt x="2110334" y="14238"/>
+                  </a:lnTo>
+                  <a:lnTo>
+                    <a:pt x="2039990" y="13774"/>
+                  </a:lnTo>
+                  <a:lnTo>
+                    <a:pt x="1969645" y="13309"/>
+                  </a:lnTo>
+                  <a:lnTo>
+                    <a:pt x="1899301" y="12843"/>
+                  </a:lnTo>
+                  <a:lnTo>
+                    <a:pt x="1828956" y="12377"/>
+                  </a:lnTo>
+                  <a:lnTo>
+                    <a:pt x="1758612" y="11910"/>
+                  </a:lnTo>
+                  <a:lnTo>
+                    <a:pt x="1688267" y="11442"/>
+                  </a:lnTo>
+                  <a:lnTo>
+                    <a:pt x="1617923" y="10974"/>
+                  </a:lnTo>
+                  <a:lnTo>
+                    <a:pt x="1547578" y="10504"/>
+                  </a:lnTo>
+                  <a:lnTo>
+                    <a:pt x="1477234" y="10035"/>
+                  </a:lnTo>
+                  <a:lnTo>
+                    <a:pt x="1406889" y="9564"/>
+                  </a:lnTo>
+                  <a:lnTo>
+                    <a:pt x="1336545" y="9093"/>
+                  </a:lnTo>
+                  <a:lnTo>
+                    <a:pt x="1266200" y="8620"/>
+                  </a:lnTo>
+                  <a:lnTo>
+                    <a:pt x="1195856" y="8148"/>
+                  </a:lnTo>
+                  <a:lnTo>
+                    <a:pt x="1125511" y="7674"/>
+                  </a:lnTo>
+                  <a:lnTo>
+                    <a:pt x="1055167" y="7200"/>
+                  </a:lnTo>
+                  <a:lnTo>
+                    <a:pt x="984822" y="6725"/>
+                  </a:lnTo>
+                  <a:lnTo>
+                    <a:pt x="914478" y="6249"/>
+                  </a:lnTo>
+                  <a:lnTo>
+                    <a:pt x="844133" y="5773"/>
+                  </a:lnTo>
+                  <a:lnTo>
+                    <a:pt x="773789" y="5296"/>
+                  </a:lnTo>
+                  <a:lnTo>
+                    <a:pt x="703444" y="4818"/>
+                  </a:lnTo>
+                  <a:lnTo>
+                    <a:pt x="633100" y="4339"/>
+                  </a:lnTo>
+                  <a:lnTo>
+                    <a:pt x="562755" y="3860"/>
+                  </a:lnTo>
+                  <a:lnTo>
+                    <a:pt x="492411" y="3380"/>
+                  </a:lnTo>
+                  <a:lnTo>
+                    <a:pt x="422066" y="2899"/>
+                  </a:lnTo>
+                  <a:lnTo>
+                    <a:pt x="351722" y="2418"/>
+                  </a:lnTo>
+                  <a:lnTo>
+                    <a:pt x="281377" y="1936"/>
+                  </a:lnTo>
+                  <a:lnTo>
+                    <a:pt x="211033" y="1453"/>
+                  </a:lnTo>
+                  <a:lnTo>
+                    <a:pt x="140688" y="969"/>
+                  </a:lnTo>
+                  <a:lnTo>
+                    <a:pt x="70344" y="485"/>
+                  </a:lnTo>
+                  <a:lnTo>
+                    <a:pt x="0" y="0"/>
+                  </a:lnTo>
+                </a:path>
+              </a:pathLst>
+            </a:custGeom>
+          </p:spPr>
+          <p:txBody>
+            <a:bodyPr/>
+            <a:lstStyle/>
+            <a:p/>
+          </p:txBody>
+        </p:sp>
+        <p:sp>
+          <p:nvSpPr>
+            <p:cNvPr id="26" name="pl26"/>
+            <p:cNvSpPr/>
+            <p:nvPr/>
+          </p:nvSpPr>
+          <p:spPr>
+            <a:xfrm>
+              <a:off x="1235312" y="2863987"/>
+              <a:ext cx="6964104" cy="394235"/>
+            </a:xfrm>
+            <a:custGeom>
+              <a:avLst/>
+              <a:pathLst>
+                <a:path w="6964104" h="394235">
                   <a:moveTo>
                     <a:pt x="0" y="0"/>
                   </a:moveTo>
                   <a:lnTo>
-                    <a:pt x="71622" y="19807"/>
-                  </a:lnTo>
-                  <a:lnTo>
-                    <a:pt x="143245" y="39351"/>
-                  </a:lnTo>
-                  <a:lnTo>
-                    <a:pt x="214867" y="58634"/>
-                  </a:lnTo>
-                  <a:lnTo>
-                    <a:pt x="286490" y="77660"/>
-                  </a:lnTo>
-                  <a:lnTo>
-                    <a:pt x="358112" y="96432"/>
-                  </a:lnTo>
-                  <a:lnTo>
-                    <a:pt x="429735" y="114954"/>
-                  </a:lnTo>
-                  <a:lnTo>
-                    <a:pt x="501357" y="133230"/>
-                  </a:lnTo>
-                  <a:lnTo>
-                    <a:pt x="572980" y="151261"/>
-                  </a:lnTo>
-                  <a:lnTo>
-                    <a:pt x="644602" y="169053"/>
-                  </a:lnTo>
-                  <a:lnTo>
-                    <a:pt x="716225" y="186607"/>
-                  </a:lnTo>
-                  <a:lnTo>
-                    <a:pt x="787847" y="203928"/>
-                  </a:lnTo>
-                  <a:lnTo>
-                    <a:pt x="859470" y="221017"/>
-                  </a:lnTo>
-                  <a:lnTo>
-                    <a:pt x="931092" y="237879"/>
-                  </a:lnTo>
-                  <a:lnTo>
-                    <a:pt x="1002715" y="254516"/>
-                  </a:lnTo>
-                  <a:lnTo>
-                    <a:pt x="1074337" y="270931"/>
-                  </a:lnTo>
-                  <a:lnTo>
-                    <a:pt x="1145960" y="287127"/>
-                  </a:lnTo>
-                  <a:lnTo>
-                    <a:pt x="1217582" y="303108"/>
-                  </a:lnTo>
-                  <a:lnTo>
-                    <a:pt x="1289205" y="318876"/>
-                  </a:lnTo>
-                  <a:lnTo>
-                    <a:pt x="1360827" y="334433"/>
-                  </a:lnTo>
-                  <a:lnTo>
-                    <a:pt x="1432450" y="349783"/>
-                  </a:lnTo>
-                  <a:lnTo>
-                    <a:pt x="1504073" y="364929"/>
-                  </a:lnTo>
-                  <a:lnTo>
-                    <a:pt x="1575695" y="379872"/>
-                  </a:lnTo>
-                  <a:lnTo>
-                    <a:pt x="1647318" y="394617"/>
-                  </a:lnTo>
-                  <a:lnTo>
-                    <a:pt x="1718940" y="409165"/>
-                  </a:lnTo>
-                  <a:lnTo>
-                    <a:pt x="1790563" y="423519"/>
-                  </a:lnTo>
-                  <a:lnTo>
-                    <a:pt x="1862185" y="437681"/>
-                  </a:lnTo>
-                  <a:lnTo>
-                    <a:pt x="1933808" y="451655"/>
-                  </a:lnTo>
-                  <a:lnTo>
-                    <a:pt x="2005430" y="465443"/>
-                  </a:lnTo>
-                  <a:lnTo>
-                    <a:pt x="2077053" y="479047"/>
-                  </a:lnTo>
-                  <a:lnTo>
-                    <a:pt x="2148675" y="492470"/>
-                  </a:lnTo>
-                  <a:lnTo>
-                    <a:pt x="2220298" y="505713"/>
-                  </a:lnTo>
-                  <a:lnTo>
-                    <a:pt x="2291920" y="518781"/>
-                  </a:lnTo>
-                  <a:lnTo>
-                    <a:pt x="2363543" y="531674"/>
-                  </a:lnTo>
-                  <a:lnTo>
-                    <a:pt x="2435165" y="544395"/>
-                  </a:lnTo>
-                  <a:lnTo>
-                    <a:pt x="2506788" y="556946"/>
-                  </a:lnTo>
-                  <a:lnTo>
-                    <a:pt x="2578410" y="569331"/>
-                  </a:lnTo>
-                  <a:lnTo>
-                    <a:pt x="2650033" y="581550"/>
-                  </a:lnTo>
-                  <a:lnTo>
-                    <a:pt x="2721655" y="593607"/>
-                  </a:lnTo>
-                  <a:lnTo>
-                    <a:pt x="2793278" y="605502"/>
-                  </a:lnTo>
-                  <a:lnTo>
-                    <a:pt x="2864901" y="617239"/>
-                  </a:lnTo>
-                  <a:lnTo>
-                    <a:pt x="2936523" y="628820"/>
-                  </a:lnTo>
-                  <a:lnTo>
-                    <a:pt x="3008146" y="640247"/>
-                  </a:lnTo>
-                  <a:lnTo>
-                    <a:pt x="3079768" y="651521"/>
-                  </a:lnTo>
-                  <a:lnTo>
-                    <a:pt x="3151391" y="662645"/>
-                  </a:lnTo>
-                  <a:lnTo>
-                    <a:pt x="3223013" y="673620"/>
-                  </a:lnTo>
-                  <a:lnTo>
-                    <a:pt x="3294636" y="684449"/>
-                  </a:lnTo>
-                  <a:lnTo>
-                    <a:pt x="3366258" y="695134"/>
-                  </a:lnTo>
-                  <a:lnTo>
-                    <a:pt x="3437881" y="705677"/>
-                  </a:lnTo>
-                  <a:lnTo>
-                    <a:pt x="3509503" y="716079"/>
-                  </a:lnTo>
-                  <a:lnTo>
-                    <a:pt x="3581126" y="726342"/>
-                  </a:lnTo>
-                  <a:lnTo>
-                    <a:pt x="3652748" y="736469"/>
-                  </a:lnTo>
-                  <a:lnTo>
-                    <a:pt x="3724371" y="746460"/>
-                  </a:lnTo>
-                  <a:lnTo>
-                    <a:pt x="3795993" y="756319"/>
-                  </a:lnTo>
-                  <a:lnTo>
-                    <a:pt x="3867616" y="766046"/>
-                  </a:lnTo>
-                  <a:lnTo>
-                    <a:pt x="3939238" y="775643"/>
-                  </a:lnTo>
-                  <a:lnTo>
-                    <a:pt x="4010861" y="785113"/>
-                  </a:lnTo>
-                  <a:lnTo>
-                    <a:pt x="4082483" y="794456"/>
-                  </a:lnTo>
-                  <a:lnTo>
-                    <a:pt x="4154106" y="803675"/>
-                  </a:lnTo>
-                  <a:lnTo>
-                    <a:pt x="4225729" y="812771"/>
-                  </a:lnTo>
-                  <a:lnTo>
-                    <a:pt x="4297351" y="821745"/>
-                  </a:lnTo>
-                  <a:lnTo>
-                    <a:pt x="4368974" y="830600"/>
-                  </a:lnTo>
-                  <a:lnTo>
-                    <a:pt x="4440596" y="839337"/>
-                  </a:lnTo>
-                  <a:lnTo>
-                    <a:pt x="4512219" y="847958"/>
-                  </a:lnTo>
-                  <a:lnTo>
-                    <a:pt x="4583841" y="856464"/>
-                  </a:lnTo>
-                  <a:lnTo>
-                    <a:pt x="4655464" y="864856"/>
-                  </a:lnTo>
-                  <a:lnTo>
-                    <a:pt x="4727086" y="873136"/>
-                  </a:lnTo>
-                  <a:lnTo>
-                    <a:pt x="4798709" y="881306"/>
-                  </a:lnTo>
-                  <a:lnTo>
-                    <a:pt x="4870331" y="889368"/>
-                  </a:lnTo>
-                  <a:lnTo>
-                    <a:pt x="4941954" y="897321"/>
-                  </a:lnTo>
-                  <a:lnTo>
-                    <a:pt x="5013576" y="905169"/>
-                  </a:lnTo>
-                  <a:lnTo>
-                    <a:pt x="5085199" y="912912"/>
-                  </a:lnTo>
-                  <a:lnTo>
-                    <a:pt x="5156821" y="920552"/>
-                  </a:lnTo>
-                  <a:lnTo>
-                    <a:pt x="5228444" y="928090"/>
-                  </a:lnTo>
-                  <a:lnTo>
-                    <a:pt x="5300066" y="935528"/>
-                  </a:lnTo>
-                  <a:lnTo>
-                    <a:pt x="5371689" y="942866"/>
-                  </a:lnTo>
-                  <a:lnTo>
-                    <a:pt x="5443311" y="950107"/>
-                  </a:lnTo>
-                  <a:lnTo>
-                    <a:pt x="5514934" y="957251"/>
-                  </a:lnTo>
-                  <a:lnTo>
-                    <a:pt x="5586557" y="964300"/>
-                  </a:lnTo>
-                  <a:lnTo>
-                    <a:pt x="5658179" y="971255"/>
-                  </a:lnTo>
-                  <a:lnTo>
-                    <a:pt x="5729802" y="978118"/>
-                  </a:lnTo>
-                  <a:lnTo>
-                    <a:pt x="5801424" y="984888"/>
-                  </a:lnTo>
-                  <a:lnTo>
-                    <a:pt x="5873047" y="991569"/>
-                  </a:lnTo>
-                  <a:lnTo>
-                    <a:pt x="5944669" y="998161"/>
-                  </a:lnTo>
-                  <a:lnTo>
-                    <a:pt x="6016292" y="1004664"/>
-                  </a:lnTo>
-                  <a:lnTo>
-                    <a:pt x="6087914" y="1011081"/>
-                  </a:lnTo>
-                  <a:lnTo>
-                    <a:pt x="6159537" y="1017413"/>
-                  </a:lnTo>
-                  <a:lnTo>
-                    <a:pt x="6231159" y="1023660"/>
-                  </a:lnTo>
-                  <a:lnTo>
-                    <a:pt x="6302782" y="1029824"/>
-                  </a:lnTo>
-                  <a:lnTo>
-                    <a:pt x="6374404" y="1035905"/>
-                  </a:lnTo>
-                  <a:lnTo>
-                    <a:pt x="6446027" y="1041906"/>
-                  </a:lnTo>
-                  <a:lnTo>
-                    <a:pt x="6517649" y="1047827"/>
-                  </a:lnTo>
-                  <a:lnTo>
-                    <a:pt x="6589272" y="1053669"/>
-                  </a:lnTo>
-                  <a:lnTo>
-                    <a:pt x="6660894" y="1059432"/>
-                  </a:lnTo>
-                  <a:lnTo>
-                    <a:pt x="6732517" y="1065119"/>
-                  </a:lnTo>
-                  <a:lnTo>
-                    <a:pt x="6804139" y="1070731"/>
-                  </a:lnTo>
-                  <a:lnTo>
-                    <a:pt x="6875762" y="1076267"/>
-                  </a:lnTo>
-                  <a:lnTo>
-                    <a:pt x="6947385" y="1081730"/>
-                  </a:lnTo>
-                  <a:lnTo>
-                    <a:pt x="7019007" y="1087120"/>
-                  </a:lnTo>
-                  <a:lnTo>
-                    <a:pt x="7090630" y="1092438"/>
+                    <a:pt x="70344" y="7148"/>
+                  </a:lnTo>
+                  <a:lnTo>
+                    <a:pt x="140688" y="14200"/>
+                  </a:lnTo>
+                  <a:lnTo>
+                    <a:pt x="211033" y="21159"/>
+                  </a:lnTo>
+                  <a:lnTo>
+                    <a:pt x="281377" y="28025"/>
+                  </a:lnTo>
+                  <a:lnTo>
+                    <a:pt x="351722" y="34800"/>
+                  </a:lnTo>
+                  <a:lnTo>
+                    <a:pt x="422066" y="41484"/>
+                  </a:lnTo>
+                  <a:lnTo>
+                    <a:pt x="492411" y="48079"/>
+                  </a:lnTo>
+                  <a:lnTo>
+                    <a:pt x="562755" y="54586"/>
+                  </a:lnTo>
+                  <a:lnTo>
+                    <a:pt x="633100" y="61007"/>
+                  </a:lnTo>
+                  <a:lnTo>
+                    <a:pt x="703444" y="67342"/>
+                  </a:lnTo>
+                  <a:lnTo>
+                    <a:pt x="773789" y="73592"/>
+                  </a:lnTo>
+                  <a:lnTo>
+                    <a:pt x="844133" y="79760"/>
+                  </a:lnTo>
+                  <a:lnTo>
+                    <a:pt x="914478" y="85845"/>
+                  </a:lnTo>
+                  <a:lnTo>
+                    <a:pt x="984822" y="91848"/>
+                  </a:lnTo>
+                  <a:lnTo>
+                    <a:pt x="1055167" y="97772"/>
+                  </a:lnTo>
+                  <a:lnTo>
+                    <a:pt x="1125511" y="103617"/>
+                  </a:lnTo>
+                  <a:lnTo>
+                    <a:pt x="1195856" y="109384"/>
+                  </a:lnTo>
+                  <a:lnTo>
+                    <a:pt x="1266200" y="115074"/>
+                  </a:lnTo>
+                  <a:lnTo>
+                    <a:pt x="1336545" y="120689"/>
+                  </a:lnTo>
+                  <a:lnTo>
+                    <a:pt x="1406889" y="126228"/>
+                  </a:lnTo>
+                  <a:lnTo>
+                    <a:pt x="1477234" y="131694"/>
+                  </a:lnTo>
+                  <a:lnTo>
+                    <a:pt x="1547578" y="137087"/>
+                  </a:lnTo>
+                  <a:lnTo>
+                    <a:pt x="1617923" y="142408"/>
+                  </a:lnTo>
+                  <a:lnTo>
+                    <a:pt x="1688267" y="147658"/>
+                  </a:lnTo>
+                  <a:lnTo>
+                    <a:pt x="1758612" y="152838"/>
+                  </a:lnTo>
+                  <a:lnTo>
+                    <a:pt x="1828956" y="157949"/>
+                  </a:lnTo>
+                  <a:lnTo>
+                    <a:pt x="1899301" y="162991"/>
+                  </a:lnTo>
+                  <a:lnTo>
+                    <a:pt x="1969645" y="167967"/>
+                  </a:lnTo>
+                  <a:lnTo>
+                    <a:pt x="2039990" y="172876"/>
+                  </a:lnTo>
+                  <a:lnTo>
+                    <a:pt x="2110334" y="177720"/>
+                  </a:lnTo>
+                  <a:lnTo>
+                    <a:pt x="2180679" y="182500"/>
+                  </a:lnTo>
+                  <a:lnTo>
+                    <a:pt x="2251023" y="187215"/>
+                  </a:lnTo>
+                  <a:lnTo>
+                    <a:pt x="2321368" y="191868"/>
+                  </a:lnTo>
+                  <a:lnTo>
+                    <a:pt x="2391712" y="196459"/>
+                  </a:lnTo>
+                  <a:lnTo>
+                    <a:pt x="2462057" y="200989"/>
+                  </a:lnTo>
+                  <a:lnTo>
+                    <a:pt x="2532401" y="205458"/>
+                  </a:lnTo>
+                  <a:lnTo>
+                    <a:pt x="2602746" y="209867"/>
+                  </a:lnTo>
+                  <a:lnTo>
+                    <a:pt x="2673090" y="214218"/>
+                  </a:lnTo>
+                  <a:lnTo>
+                    <a:pt x="2743435" y="218511"/>
+                  </a:lnTo>
+                  <a:lnTo>
+                    <a:pt x="2813779" y="222747"/>
+                  </a:lnTo>
+                  <a:lnTo>
+                    <a:pt x="2884124" y="226926"/>
+                  </a:lnTo>
+                  <a:lnTo>
+                    <a:pt x="2954468" y="231050"/>
+                  </a:lnTo>
+                  <a:lnTo>
+                    <a:pt x="3024813" y="235118"/>
+                  </a:lnTo>
+                  <a:lnTo>
+                    <a:pt x="3095157" y="239132"/>
+                  </a:lnTo>
+                  <a:lnTo>
+                    <a:pt x="3165502" y="243093"/>
+                  </a:lnTo>
+                  <a:lnTo>
+                    <a:pt x="3235846" y="247001"/>
+                  </a:lnTo>
+                  <a:lnTo>
+                    <a:pt x="3306191" y="250857"/>
+                  </a:lnTo>
+                  <a:lnTo>
+                    <a:pt x="3376535" y="254662"/>
+                  </a:lnTo>
+                  <a:lnTo>
+                    <a:pt x="3446880" y="258416"/>
+                  </a:lnTo>
+                  <a:lnTo>
+                    <a:pt x="3517224" y="262120"/>
+                  </a:lnTo>
+                  <a:lnTo>
+                    <a:pt x="3587569" y="265774"/>
+                  </a:lnTo>
+                  <a:lnTo>
+                    <a:pt x="3657913" y="269380"/>
+                  </a:lnTo>
+                  <a:lnTo>
+                    <a:pt x="3728257" y="272937"/>
+                  </a:lnTo>
+                  <a:lnTo>
+                    <a:pt x="3798602" y="276448"/>
+                  </a:lnTo>
+                  <a:lnTo>
+                    <a:pt x="3868946" y="279911"/>
+                  </a:lnTo>
+                  <a:lnTo>
+                    <a:pt x="3939291" y="283328"/>
+                  </a:lnTo>
+                  <a:lnTo>
+                    <a:pt x="4009635" y="286700"/>
+                  </a:lnTo>
+                  <a:lnTo>
+                    <a:pt x="4079980" y="290027"/>
+                  </a:lnTo>
+                  <a:lnTo>
+                    <a:pt x="4150324" y="293310"/>
+                  </a:lnTo>
+                  <a:lnTo>
+                    <a:pt x="4220669" y="296548"/>
+                  </a:lnTo>
+                  <a:lnTo>
+                    <a:pt x="4291013" y="299744"/>
+                  </a:lnTo>
+                  <a:lnTo>
+                    <a:pt x="4361358" y="302897"/>
+                  </a:lnTo>
+                  <a:lnTo>
+                    <a:pt x="4431702" y="306008"/>
+                  </a:lnTo>
+                  <a:lnTo>
+                    <a:pt x="4502047" y="309077"/>
+                  </a:lnTo>
+                  <a:lnTo>
+                    <a:pt x="4572391" y="312106"/>
+                  </a:lnTo>
+                  <a:lnTo>
+                    <a:pt x="4642736" y="315094"/>
+                  </a:lnTo>
+                  <a:lnTo>
+                    <a:pt x="4713080" y="318042"/>
+                  </a:lnTo>
+                  <a:lnTo>
+                    <a:pt x="4783425" y="320952"/>
+                  </a:lnTo>
+                  <a:lnTo>
+                    <a:pt x="4853769" y="323822"/>
+                  </a:lnTo>
+                  <a:lnTo>
+                    <a:pt x="4924114" y="326654"/>
+                  </a:lnTo>
+                  <a:lnTo>
+                    <a:pt x="4994458" y="329448"/>
+                  </a:lnTo>
+                  <a:lnTo>
+                    <a:pt x="5064803" y="332205"/>
+                  </a:lnTo>
+                  <a:lnTo>
+                    <a:pt x="5135147" y="334926"/>
+                  </a:lnTo>
+                  <a:lnTo>
+                    <a:pt x="5205492" y="337610"/>
+                  </a:lnTo>
+                  <a:lnTo>
+                    <a:pt x="5275836" y="340258"/>
+                  </a:lnTo>
+                  <a:lnTo>
+                    <a:pt x="5346181" y="342871"/>
+                  </a:lnTo>
+                  <a:lnTo>
+                    <a:pt x="5416525" y="345449"/>
+                  </a:lnTo>
+                  <a:lnTo>
+                    <a:pt x="5486870" y="347993"/>
+                  </a:lnTo>
+                  <a:lnTo>
+                    <a:pt x="5557214" y="350503"/>
+                  </a:lnTo>
+                  <a:lnTo>
+                    <a:pt x="5627559" y="352979"/>
+                  </a:lnTo>
+                  <a:lnTo>
+                    <a:pt x="5697903" y="355423"/>
+                  </a:lnTo>
+                  <a:lnTo>
+                    <a:pt x="5768248" y="357834"/>
+                  </a:lnTo>
+                  <a:lnTo>
+                    <a:pt x="5838592" y="360212"/>
+                  </a:lnTo>
+                  <a:lnTo>
+                    <a:pt x="5908937" y="362559"/>
+                  </a:lnTo>
+                  <a:lnTo>
+                    <a:pt x="5979281" y="364875"/>
+                  </a:lnTo>
+                  <a:lnTo>
+                    <a:pt x="6049626" y="367160"/>
+                  </a:lnTo>
+                  <a:lnTo>
+                    <a:pt x="6119970" y="369414"/>
+                  </a:lnTo>
+                  <a:lnTo>
+                    <a:pt x="6190315" y="371639"/>
+                  </a:lnTo>
+                  <a:lnTo>
+                    <a:pt x="6260659" y="373834"/>
+                  </a:lnTo>
+                  <a:lnTo>
+                    <a:pt x="6331004" y="375999"/>
+                  </a:lnTo>
+                  <a:lnTo>
+                    <a:pt x="6401348" y="378136"/>
+                  </a:lnTo>
+                  <a:lnTo>
+                    <a:pt x="6471693" y="380244"/>
+                  </a:lnTo>
+                  <a:lnTo>
+                    <a:pt x="6542037" y="382324"/>
+                  </a:lnTo>
+                  <a:lnTo>
+                    <a:pt x="6612382" y="384376"/>
+                  </a:lnTo>
+                  <a:lnTo>
+                    <a:pt x="6682726" y="386401"/>
+                  </a:lnTo>
+                  <a:lnTo>
+                    <a:pt x="6753071" y="388399"/>
+                  </a:lnTo>
+                  <a:lnTo>
+                    <a:pt x="6823415" y="390371"/>
+                  </a:lnTo>
+                  <a:lnTo>
+                    <a:pt x="6893760" y="392316"/>
+                  </a:lnTo>
+                  <a:lnTo>
+                    <a:pt x="6964104" y="394235"/>
                   </a:lnTo>
                 </a:path>
               </a:pathLst>
@@ -4654,27 +4689,27 @@
         </p:sp>
         <p:sp>
           <p:nvSpPr>
-            <p:cNvPr id="26" name="pl26"/>
+            <p:cNvPr id="27" name="pl27"/>
             <p:cNvSpPr/>
             <p:nvPr/>
           </p:nvSpPr>
           <p:spPr>
             <a:xfrm>
-              <a:off x="817517" y="4727786"/>
-              <a:ext cx="7799693" cy="0"/>
+              <a:off x="887106" y="3100960"/>
+              <a:ext cx="7660515" cy="0"/>
             </a:xfrm>
             <a:custGeom>
               <a:avLst/>
               <a:pathLst>
-                <a:path w="7799693" h="0">
+                <a:path w="7660515" h="0">
                   <a:moveTo>
                     <a:pt x="0" y="0"/>
                   </a:moveTo>
                   <a:lnTo>
-                    <a:pt x="7799693" y="0"/>
-                  </a:lnTo>
-                  <a:lnTo>
-                    <a:pt x="7799693" y="0"/>
+                    <a:pt x="7660515" y="0"/>
+                  </a:lnTo>
+                  <a:lnTo>
+                    <a:pt x="7660515" y="0"/>
                   </a:lnTo>
                 </a:path>
               </a:pathLst>
@@ -4697,21 +4732,21 @@
         </p:sp>
         <p:sp>
           <p:nvSpPr>
-            <p:cNvPr id="27" name="pl27"/>
+            <p:cNvPr id="28" name="pl28"/>
             <p:cNvSpPr/>
             <p:nvPr/>
           </p:nvSpPr>
           <p:spPr>
             <a:xfrm>
-              <a:off x="4284781" y="2073503"/>
-              <a:ext cx="0" cy="3649639"/>
+              <a:off x="4292500" y="2143092"/>
+              <a:ext cx="0" cy="1317069"/>
             </a:xfrm>
             <a:custGeom>
               <a:avLst/>
               <a:pathLst>
-                <a:path w="0" h="3649639">
+                <a:path w="0" h="1317069">
                   <a:moveTo>
-                    <a:pt x="0" y="3649639"/>
+                    <a:pt x="0" y="1317069"/>
                   </a:moveTo>
                   <a:lnTo>
                     <a:pt x="0" y="0"/>
@@ -4740,21 +4775,21 @@
         </p:sp>
         <p:sp>
           <p:nvSpPr>
-            <p:cNvPr id="28" name="pl28"/>
+            <p:cNvPr id="29" name="pl29"/>
             <p:cNvSpPr/>
             <p:nvPr/>
           </p:nvSpPr>
           <p:spPr>
             <a:xfrm>
-              <a:off x="3095906" y="2073503"/>
-              <a:ext cx="0" cy="3649639"/>
+              <a:off x="3124839" y="2143092"/>
+              <a:ext cx="0" cy="1317069"/>
             </a:xfrm>
             <a:custGeom>
               <a:avLst/>
               <a:pathLst>
-                <a:path w="0" h="3649639">
+                <a:path w="0" h="1317069">
                   <a:moveTo>
-                    <a:pt x="0" y="3649639"/>
+                    <a:pt x="0" y="1317069"/>
                   </a:moveTo>
                   <a:lnTo>
                     <a:pt x="0" y="0"/>
@@ -4783,21 +4818,21 @@
         </p:sp>
         <p:sp>
           <p:nvSpPr>
-            <p:cNvPr id="29" name="pl29"/>
+            <p:cNvPr id="30" name="pl30"/>
             <p:cNvSpPr/>
             <p:nvPr/>
           </p:nvSpPr>
           <p:spPr>
             <a:xfrm>
-              <a:off x="5522967" y="2073503"/>
-              <a:ext cx="0" cy="3649639"/>
+              <a:off x="5508592" y="2143092"/>
+              <a:ext cx="0" cy="1317069"/>
             </a:xfrm>
             <a:custGeom>
               <a:avLst/>
               <a:pathLst>
-                <a:path w="0" h="3649639">
+                <a:path w="0" h="1317069">
                   <a:moveTo>
-                    <a:pt x="0" y="3649639"/>
+                    <a:pt x="0" y="1317069"/>
                   </a:moveTo>
                   <a:lnTo>
                     <a:pt x="0" y="0"/>
@@ -4826,13 +4861,13 @@
         </p:sp>
         <p:sp>
           <p:nvSpPr>
-            <p:cNvPr id="30" name="tx30"/>
+            <p:cNvPr id="31" name="tx31"/>
             <p:cNvSpPr/>
             <p:nvPr/>
           </p:nvSpPr>
           <p:spPr>
             <a:xfrm>
-              <a:off x="692708" y="5517199"/>
+              <a:off x="762297" y="3360243"/>
               <a:ext cx="62179" cy="80101"/>
             </a:xfrm>
             <a:prstGeom prst="rect">
@@ -4872,13 +4907,13 @@
         </p:sp>
         <p:sp>
           <p:nvSpPr>
-            <p:cNvPr id="31" name="tx31"/>
+            <p:cNvPr id="32" name="tx32"/>
             <p:cNvSpPr/>
             <p:nvPr/>
           </p:nvSpPr>
           <p:spPr>
             <a:xfrm>
-              <a:off x="692708" y="4687735"/>
+              <a:off x="762297" y="3060909"/>
               <a:ext cx="62179" cy="80101"/>
             </a:xfrm>
             <a:prstGeom prst="rect">
@@ -4918,13 +4953,13 @@
         </p:sp>
         <p:sp>
           <p:nvSpPr>
-            <p:cNvPr id="32" name="tx32"/>
+            <p:cNvPr id="33" name="tx33"/>
             <p:cNvSpPr/>
             <p:nvPr/>
           </p:nvSpPr>
           <p:spPr>
             <a:xfrm>
-              <a:off x="692708" y="3858272"/>
+              <a:off x="762297" y="2761575"/>
               <a:ext cx="62179" cy="80101"/>
             </a:xfrm>
             <a:prstGeom prst="rect">
@@ -4964,13 +4999,13 @@
         </p:sp>
         <p:sp>
           <p:nvSpPr>
-            <p:cNvPr id="33" name="tx33"/>
+            <p:cNvPr id="34" name="tx34"/>
             <p:cNvSpPr/>
             <p:nvPr/>
           </p:nvSpPr>
           <p:spPr>
             <a:xfrm>
-              <a:off x="692708" y="3028808"/>
+              <a:off x="762297" y="2462242"/>
               <a:ext cx="62179" cy="80101"/>
             </a:xfrm>
             <a:prstGeom prst="rect">
@@ -5010,13 +5045,13 @@
         </p:sp>
         <p:sp>
           <p:nvSpPr>
-            <p:cNvPr id="34" name="tx34"/>
+            <p:cNvPr id="35" name="tx35"/>
             <p:cNvSpPr/>
             <p:nvPr/>
           </p:nvSpPr>
           <p:spPr>
             <a:xfrm>
-              <a:off x="692708" y="2199345"/>
+              <a:off x="762297" y="2162908"/>
               <a:ext cx="62179" cy="80101"/>
             </a:xfrm>
             <a:prstGeom prst="rect">
@@ -5056,13 +5091,13 @@
         </p:sp>
         <p:sp>
           <p:nvSpPr>
-            <p:cNvPr id="35" name="tx35"/>
+            <p:cNvPr id="36" name="tx36"/>
             <p:cNvSpPr/>
             <p:nvPr/>
           </p:nvSpPr>
           <p:spPr>
             <a:xfrm>
-              <a:off x="2152181" y="5785772"/>
+              <a:off x="2196512" y="3522791"/>
               <a:ext cx="161574" cy="80101"/>
             </a:xfrm>
             <a:prstGeom prst="rect">
@@ -5102,13 +5137,13 @@
         </p:sp>
         <p:sp>
           <p:nvSpPr>
-            <p:cNvPr id="36" name="tx36"/>
+            <p:cNvPr id="37" name="tx37"/>
             <p:cNvSpPr/>
             <p:nvPr/>
           </p:nvSpPr>
           <p:spPr>
             <a:xfrm>
-              <a:off x="3884104" y="5785772"/>
+              <a:off x="3897531" y="3522791"/>
               <a:ext cx="161574" cy="80101"/>
             </a:xfrm>
             <a:prstGeom prst="rect">
@@ -5148,13 +5183,13 @@
         </p:sp>
         <p:sp>
           <p:nvSpPr>
-            <p:cNvPr id="37" name="tx37"/>
+            <p:cNvPr id="38" name="tx38"/>
             <p:cNvSpPr/>
             <p:nvPr/>
           </p:nvSpPr>
           <p:spPr>
             <a:xfrm>
-              <a:off x="5665725" y="5785772"/>
+              <a:off x="5648248" y="3522791"/>
               <a:ext cx="62179" cy="80101"/>
             </a:xfrm>
             <a:prstGeom prst="rect">
@@ -5194,13 +5229,13 @@
         </p:sp>
         <p:sp>
           <p:nvSpPr>
-            <p:cNvPr id="38" name="tx38"/>
+            <p:cNvPr id="39" name="tx39"/>
             <p:cNvSpPr/>
             <p:nvPr/>
           </p:nvSpPr>
           <p:spPr>
             <a:xfrm>
-              <a:off x="7366559" y="5785772"/>
+              <a:off x="7318177" y="3522791"/>
               <a:ext cx="124358" cy="80101"/>
             </a:xfrm>
             <a:prstGeom prst="rect">
@@ -5240,13 +5275,13 @@
         </p:sp>
         <p:sp>
           <p:nvSpPr>
-            <p:cNvPr id="39" name="tx39"/>
+            <p:cNvPr id="40" name="tx40"/>
             <p:cNvSpPr/>
             <p:nvPr/>
           </p:nvSpPr>
           <p:spPr>
             <a:xfrm>
-              <a:off x="1561815" y="5925448"/>
+              <a:off x="1561815" y="3662467"/>
               <a:ext cx="6311097" cy="100218"/>
             </a:xfrm>
             <a:prstGeom prst="rect">
@@ -5286,13 +5321,13 @@
         </p:sp>
         <p:sp>
           <p:nvSpPr>
-            <p:cNvPr id="40" name="tx40"/>
+            <p:cNvPr id="41" name="tx41"/>
             <p:cNvSpPr/>
             <p:nvPr/>
           </p:nvSpPr>
           <p:spPr>
             <a:xfrm rot="-5400000">
-              <a:off x="68446" y="3848213"/>
+              <a:off x="138035" y="2751517"/>
               <a:ext cx="1016904" cy="100218"/>
             </a:xfrm>
             <a:prstGeom prst="rect">
@@ -5332,13 +5367,13 @@
         </p:sp>
         <p:sp>
           <p:nvSpPr>
-            <p:cNvPr id="41" name="tx41"/>
+            <p:cNvPr id="42" name="tx42"/>
             <p:cNvSpPr/>
             <p:nvPr/>
           </p:nvSpPr>
           <p:spPr>
             <a:xfrm>
-              <a:off x="817517" y="1896563"/>
+              <a:off x="887106" y="1966152"/>
               <a:ext cx="6959864" cy="82021"/>
             </a:xfrm>
             <a:prstGeom prst="rect">
@@ -5378,13 +5413,3789 @@
         </p:sp>
         <p:sp>
           <p:nvSpPr>
-            <p:cNvPr id="42" name="tx42"/>
+            <p:cNvPr id="43" name="tx43"/>
             <p:cNvSpPr/>
             <p:nvPr/>
           </p:nvSpPr>
           <p:spPr>
             <a:xfrm>
-              <a:off x="817517" y="1669789"/>
+              <a:off x="887106" y="1739378"/>
+              <a:ext cx="3901470" cy="120152"/>
+            </a:xfrm>
+            <a:prstGeom prst="rect">
+              <a:avLst/>
+            </a:prstGeom>
+            <a:noFill/>
+          </p:spPr>
+          <p:txBody>
+            <a:bodyPr lIns="0" rIns="0" tIns="0" bIns="0" anchorCtr="1" anchor="ctr" wrap="none"/>
+            <a:lstStyle/>
+            <a:p>
+              <a:pPr algn="l" marL="0" marR="0" indent="0">
+                <a:lnSpc>
+                  <a:spcPts val="1320"/>
+                </a:lnSpc>
+                <a:spcBef>
+                  <a:spcPts val="0"/>
+                </a:spcBef>
+                <a:spcAft>
+                  <a:spcPts val="0"/>
+                </a:spcAft>
+              </a:pPr>
+              <a:r>
+                <a:rPr sz="1320">
+                  <a:solidFill>
+                    <a:srgbClr val="000000">
+                      <a:alpha val="100000"/>
+                    </a:srgbClr>
+                  </a:solidFill>
+                  <a:latin typeface="Helvetica"/>
+                  <a:cs typeface="Helvetica"/>
+                </a:rPr>
+                <a:t>Thrombocytopenia Grade 2 (Sensitivity, Carboplatin)</a:t>
+              </a:r>
+            </a:p>
+          </p:txBody>
+        </p:sp>
+        <p:sp>
+          <p:nvSpPr>
+            <p:cNvPr id="44" name="pl44"/>
+            <p:cNvSpPr/>
+            <p:nvPr/>
+          </p:nvSpPr>
+          <p:spPr>
+            <a:xfrm>
+              <a:off x="887106" y="5444019"/>
+              <a:ext cx="7660515" cy="0"/>
+            </a:xfrm>
+            <a:custGeom>
+              <a:avLst/>
+              <a:pathLst>
+                <a:path w="7660515" h="0">
+                  <a:moveTo>
+                    <a:pt x="0" y="0"/>
+                  </a:moveTo>
+                  <a:lnTo>
+                    <a:pt x="7660515" y="0"/>
+                  </a:lnTo>
+                  <a:lnTo>
+                    <a:pt x="7660515" y="0"/>
+                  </a:lnTo>
+                </a:path>
+              </a:pathLst>
+            </a:custGeom>
+            <a:ln w="6775" cap="flat">
+              <a:solidFill>
+                <a:srgbClr val="EBEBEB">
+                  <a:alpha val="100000"/>
+                </a:srgbClr>
+              </a:solidFill>
+              <a:prstDash val="solid"/>
+              <a:round/>
+            </a:ln>
+          </p:spPr>
+          <p:txBody>
+            <a:bodyPr/>
+            <a:lstStyle/>
+            <a:p/>
+          </p:txBody>
+        </p:sp>
+        <p:sp>
+          <p:nvSpPr>
+            <p:cNvPr id="45" name="pl45"/>
+            <p:cNvSpPr/>
+            <p:nvPr/>
+          </p:nvSpPr>
+          <p:spPr>
+            <a:xfrm>
+              <a:off x="887106" y="5144686"/>
+              <a:ext cx="7660515" cy="0"/>
+            </a:xfrm>
+            <a:custGeom>
+              <a:avLst/>
+              <a:pathLst>
+                <a:path w="7660515" h="0">
+                  <a:moveTo>
+                    <a:pt x="0" y="0"/>
+                  </a:moveTo>
+                  <a:lnTo>
+                    <a:pt x="7660515" y="0"/>
+                  </a:lnTo>
+                  <a:lnTo>
+                    <a:pt x="7660515" y="0"/>
+                  </a:lnTo>
+                </a:path>
+              </a:pathLst>
+            </a:custGeom>
+            <a:ln w="6775" cap="flat">
+              <a:solidFill>
+                <a:srgbClr val="EBEBEB">
+                  <a:alpha val="100000"/>
+                </a:srgbClr>
+              </a:solidFill>
+              <a:prstDash val="solid"/>
+              <a:round/>
+            </a:ln>
+          </p:spPr>
+          <p:txBody>
+            <a:bodyPr/>
+            <a:lstStyle/>
+            <a:p/>
+          </p:txBody>
+        </p:sp>
+        <p:sp>
+          <p:nvSpPr>
+            <p:cNvPr id="46" name="pl46"/>
+            <p:cNvSpPr/>
+            <p:nvPr/>
+          </p:nvSpPr>
+          <p:spPr>
+            <a:xfrm>
+              <a:off x="887106" y="4845352"/>
+              <a:ext cx="7660515" cy="0"/>
+            </a:xfrm>
+            <a:custGeom>
+              <a:avLst/>
+              <a:pathLst>
+                <a:path w="7660515" h="0">
+                  <a:moveTo>
+                    <a:pt x="0" y="0"/>
+                  </a:moveTo>
+                  <a:lnTo>
+                    <a:pt x="7660515" y="0"/>
+                  </a:lnTo>
+                  <a:lnTo>
+                    <a:pt x="7660515" y="0"/>
+                  </a:lnTo>
+                </a:path>
+              </a:pathLst>
+            </a:custGeom>
+            <a:ln w="6775" cap="flat">
+              <a:solidFill>
+                <a:srgbClr val="EBEBEB">
+                  <a:alpha val="100000"/>
+                </a:srgbClr>
+              </a:solidFill>
+              <a:prstDash val="solid"/>
+              <a:round/>
+            </a:ln>
+          </p:spPr>
+          <p:txBody>
+            <a:bodyPr/>
+            <a:lstStyle/>
+            <a:p/>
+          </p:txBody>
+        </p:sp>
+        <p:sp>
+          <p:nvSpPr>
+            <p:cNvPr id="47" name="pl47"/>
+            <p:cNvSpPr/>
+            <p:nvPr/>
+          </p:nvSpPr>
+          <p:spPr>
+            <a:xfrm>
+              <a:off x="887106" y="4546018"/>
+              <a:ext cx="7660515" cy="0"/>
+            </a:xfrm>
+            <a:custGeom>
+              <a:avLst/>
+              <a:pathLst>
+                <a:path w="7660515" h="0">
+                  <a:moveTo>
+                    <a:pt x="0" y="0"/>
+                  </a:moveTo>
+                  <a:lnTo>
+                    <a:pt x="7660515" y="0"/>
+                  </a:lnTo>
+                  <a:lnTo>
+                    <a:pt x="7660515" y="0"/>
+                  </a:lnTo>
+                </a:path>
+              </a:pathLst>
+            </a:custGeom>
+            <a:ln w="6775" cap="flat">
+              <a:solidFill>
+                <a:srgbClr val="EBEBEB">
+                  <a:alpha val="100000"/>
+                </a:srgbClr>
+              </a:solidFill>
+              <a:prstDash val="solid"/>
+              <a:round/>
+            </a:ln>
+          </p:spPr>
+          <p:txBody>
+            <a:bodyPr/>
+            <a:lstStyle/>
+            <a:p/>
+          </p:txBody>
+        </p:sp>
+        <p:sp>
+          <p:nvSpPr>
+            <p:cNvPr id="48" name="pl48"/>
+            <p:cNvSpPr/>
+            <p:nvPr/>
+          </p:nvSpPr>
+          <p:spPr>
+            <a:xfrm>
+              <a:off x="1001535" y="4336484"/>
+              <a:ext cx="0" cy="1317069"/>
+            </a:xfrm>
+            <a:custGeom>
+              <a:avLst/>
+              <a:pathLst>
+                <a:path w="0" h="1317069">
+                  <a:moveTo>
+                    <a:pt x="0" y="1317069"/>
+                  </a:moveTo>
+                  <a:lnTo>
+                    <a:pt x="0" y="0"/>
+                  </a:lnTo>
+                  <a:lnTo>
+                    <a:pt x="0" y="0"/>
+                  </a:lnTo>
+                </a:path>
+              </a:pathLst>
+            </a:custGeom>
+            <a:ln w="6775" cap="flat">
+              <a:solidFill>
+                <a:srgbClr val="EBEBEB">
+                  <a:alpha val="100000"/>
+                </a:srgbClr>
+              </a:solidFill>
+              <a:prstDash val="solid"/>
+              <a:round/>
+            </a:ln>
+          </p:spPr>
+          <p:txBody>
+            <a:bodyPr/>
+            <a:lstStyle/>
+            <a:p/>
+          </p:txBody>
+        </p:sp>
+        <p:sp>
+          <p:nvSpPr>
+            <p:cNvPr id="49" name="pl49"/>
+            <p:cNvSpPr/>
+            <p:nvPr/>
+          </p:nvSpPr>
+          <p:spPr>
+            <a:xfrm>
+              <a:off x="1852045" y="4336484"/>
+              <a:ext cx="0" cy="1317069"/>
+            </a:xfrm>
+            <a:custGeom>
+              <a:avLst/>
+              <a:pathLst>
+                <a:path w="0" h="1317069">
+                  <a:moveTo>
+                    <a:pt x="0" y="1317069"/>
+                  </a:moveTo>
+                  <a:lnTo>
+                    <a:pt x="0" y="0"/>
+                  </a:lnTo>
+                  <a:lnTo>
+                    <a:pt x="0" y="0"/>
+                  </a:lnTo>
+                </a:path>
+              </a:pathLst>
+            </a:custGeom>
+            <a:ln w="6775" cap="flat">
+              <a:solidFill>
+                <a:srgbClr val="EBEBEB">
+                  <a:alpha val="100000"/>
+                </a:srgbClr>
+              </a:solidFill>
+              <a:prstDash val="solid"/>
+              <a:round/>
+            </a:ln>
+          </p:spPr>
+          <p:txBody>
+            <a:bodyPr/>
+            <a:lstStyle/>
+            <a:p/>
+          </p:txBody>
+        </p:sp>
+        <p:sp>
+          <p:nvSpPr>
+            <p:cNvPr id="50" name="pl50"/>
+            <p:cNvSpPr/>
+            <p:nvPr/>
+          </p:nvSpPr>
+          <p:spPr>
+            <a:xfrm>
+              <a:off x="2702554" y="4336484"/>
+              <a:ext cx="0" cy="1317069"/>
+            </a:xfrm>
+            <a:custGeom>
+              <a:avLst/>
+              <a:pathLst>
+                <a:path w="0" h="1317069">
+                  <a:moveTo>
+                    <a:pt x="0" y="1317069"/>
+                  </a:moveTo>
+                  <a:lnTo>
+                    <a:pt x="0" y="0"/>
+                  </a:lnTo>
+                  <a:lnTo>
+                    <a:pt x="0" y="0"/>
+                  </a:lnTo>
+                </a:path>
+              </a:pathLst>
+            </a:custGeom>
+            <a:ln w="6775" cap="flat">
+              <a:solidFill>
+                <a:srgbClr val="EBEBEB">
+                  <a:alpha val="100000"/>
+                </a:srgbClr>
+              </a:solidFill>
+              <a:prstDash val="solid"/>
+              <a:round/>
+            </a:ln>
+          </p:spPr>
+          <p:txBody>
+            <a:bodyPr/>
+            <a:lstStyle/>
+            <a:p/>
+          </p:txBody>
+        </p:sp>
+        <p:sp>
+          <p:nvSpPr>
+            <p:cNvPr id="51" name="pl51"/>
+            <p:cNvSpPr/>
+            <p:nvPr/>
+          </p:nvSpPr>
+          <p:spPr>
+            <a:xfrm>
+              <a:off x="3553064" y="4336484"/>
+              <a:ext cx="0" cy="1317069"/>
+            </a:xfrm>
+            <a:custGeom>
+              <a:avLst/>
+              <a:pathLst>
+                <a:path w="0" h="1317069">
+                  <a:moveTo>
+                    <a:pt x="0" y="1317069"/>
+                  </a:moveTo>
+                  <a:lnTo>
+                    <a:pt x="0" y="0"/>
+                  </a:lnTo>
+                  <a:lnTo>
+                    <a:pt x="0" y="0"/>
+                  </a:lnTo>
+                </a:path>
+              </a:pathLst>
+            </a:custGeom>
+            <a:ln w="6775" cap="flat">
+              <a:solidFill>
+                <a:srgbClr val="EBEBEB">
+                  <a:alpha val="100000"/>
+                </a:srgbClr>
+              </a:solidFill>
+              <a:prstDash val="solid"/>
+              <a:round/>
+            </a:ln>
+          </p:spPr>
+          <p:txBody>
+            <a:bodyPr/>
+            <a:lstStyle/>
+            <a:p/>
+          </p:txBody>
+        </p:sp>
+        <p:sp>
+          <p:nvSpPr>
+            <p:cNvPr id="52" name="pl52"/>
+            <p:cNvSpPr/>
+            <p:nvPr/>
+          </p:nvSpPr>
+          <p:spPr>
+            <a:xfrm>
+              <a:off x="4403573" y="4336484"/>
+              <a:ext cx="0" cy="1317069"/>
+            </a:xfrm>
+            <a:custGeom>
+              <a:avLst/>
+              <a:pathLst>
+                <a:path w="0" h="1317069">
+                  <a:moveTo>
+                    <a:pt x="0" y="1317069"/>
+                  </a:moveTo>
+                  <a:lnTo>
+                    <a:pt x="0" y="0"/>
+                  </a:lnTo>
+                  <a:lnTo>
+                    <a:pt x="0" y="0"/>
+                  </a:lnTo>
+                </a:path>
+              </a:pathLst>
+            </a:custGeom>
+            <a:ln w="6775" cap="flat">
+              <a:solidFill>
+                <a:srgbClr val="EBEBEB">
+                  <a:alpha val="100000"/>
+                </a:srgbClr>
+              </a:solidFill>
+              <a:prstDash val="solid"/>
+              <a:round/>
+            </a:ln>
+          </p:spPr>
+          <p:txBody>
+            <a:bodyPr/>
+            <a:lstStyle/>
+            <a:p/>
+          </p:txBody>
+        </p:sp>
+        <p:sp>
+          <p:nvSpPr>
+            <p:cNvPr id="53" name="pl53"/>
+            <p:cNvSpPr/>
+            <p:nvPr/>
+          </p:nvSpPr>
+          <p:spPr>
+            <a:xfrm>
+              <a:off x="5254082" y="4336484"/>
+              <a:ext cx="0" cy="1317069"/>
+            </a:xfrm>
+            <a:custGeom>
+              <a:avLst/>
+              <a:pathLst>
+                <a:path w="0" h="1317069">
+                  <a:moveTo>
+                    <a:pt x="0" y="1317069"/>
+                  </a:moveTo>
+                  <a:lnTo>
+                    <a:pt x="0" y="0"/>
+                  </a:lnTo>
+                  <a:lnTo>
+                    <a:pt x="0" y="0"/>
+                  </a:lnTo>
+                </a:path>
+              </a:pathLst>
+            </a:custGeom>
+            <a:ln w="6775" cap="flat">
+              <a:solidFill>
+                <a:srgbClr val="EBEBEB">
+                  <a:alpha val="100000"/>
+                </a:srgbClr>
+              </a:solidFill>
+              <a:prstDash val="solid"/>
+              <a:round/>
+            </a:ln>
+          </p:spPr>
+          <p:txBody>
+            <a:bodyPr/>
+            <a:lstStyle/>
+            <a:p/>
+          </p:txBody>
+        </p:sp>
+        <p:sp>
+          <p:nvSpPr>
+            <p:cNvPr id="54" name="pl54"/>
+            <p:cNvSpPr/>
+            <p:nvPr/>
+          </p:nvSpPr>
+          <p:spPr>
+            <a:xfrm>
+              <a:off x="6104592" y="4336484"/>
+              <a:ext cx="0" cy="1317069"/>
+            </a:xfrm>
+            <a:custGeom>
+              <a:avLst/>
+              <a:pathLst>
+                <a:path w="0" h="1317069">
+                  <a:moveTo>
+                    <a:pt x="0" y="1317069"/>
+                  </a:moveTo>
+                  <a:lnTo>
+                    <a:pt x="0" y="0"/>
+                  </a:lnTo>
+                  <a:lnTo>
+                    <a:pt x="0" y="0"/>
+                  </a:lnTo>
+                </a:path>
+              </a:pathLst>
+            </a:custGeom>
+            <a:ln w="6775" cap="flat">
+              <a:solidFill>
+                <a:srgbClr val="EBEBEB">
+                  <a:alpha val="100000"/>
+                </a:srgbClr>
+              </a:solidFill>
+              <a:prstDash val="solid"/>
+              <a:round/>
+            </a:ln>
+          </p:spPr>
+          <p:txBody>
+            <a:bodyPr/>
+            <a:lstStyle/>
+            <a:p/>
+          </p:txBody>
+        </p:sp>
+        <p:sp>
+          <p:nvSpPr>
+            <p:cNvPr id="55" name="pl55"/>
+            <p:cNvSpPr/>
+            <p:nvPr/>
+          </p:nvSpPr>
+          <p:spPr>
+            <a:xfrm>
+              <a:off x="6955101" y="4336484"/>
+              <a:ext cx="0" cy="1317069"/>
+            </a:xfrm>
+            <a:custGeom>
+              <a:avLst/>
+              <a:pathLst>
+                <a:path w="0" h="1317069">
+                  <a:moveTo>
+                    <a:pt x="0" y="1317069"/>
+                  </a:moveTo>
+                  <a:lnTo>
+                    <a:pt x="0" y="0"/>
+                  </a:lnTo>
+                  <a:lnTo>
+                    <a:pt x="0" y="0"/>
+                  </a:lnTo>
+                </a:path>
+              </a:pathLst>
+            </a:custGeom>
+            <a:ln w="6775" cap="flat">
+              <a:solidFill>
+                <a:srgbClr val="EBEBEB">
+                  <a:alpha val="100000"/>
+                </a:srgbClr>
+              </a:solidFill>
+              <a:prstDash val="solid"/>
+              <a:round/>
+            </a:ln>
+          </p:spPr>
+          <p:txBody>
+            <a:bodyPr/>
+            <a:lstStyle/>
+            <a:p/>
+          </p:txBody>
+        </p:sp>
+        <p:sp>
+          <p:nvSpPr>
+            <p:cNvPr id="56" name="pl56"/>
+            <p:cNvSpPr/>
+            <p:nvPr/>
+          </p:nvSpPr>
+          <p:spPr>
+            <a:xfrm>
+              <a:off x="7805611" y="4336484"/>
+              <a:ext cx="0" cy="1317069"/>
+            </a:xfrm>
+            <a:custGeom>
+              <a:avLst/>
+              <a:pathLst>
+                <a:path w="0" h="1317069">
+                  <a:moveTo>
+                    <a:pt x="0" y="1317069"/>
+                  </a:moveTo>
+                  <a:lnTo>
+                    <a:pt x="0" y="0"/>
+                  </a:lnTo>
+                  <a:lnTo>
+                    <a:pt x="0" y="0"/>
+                  </a:lnTo>
+                </a:path>
+              </a:pathLst>
+            </a:custGeom>
+            <a:ln w="6775" cap="flat">
+              <a:solidFill>
+                <a:srgbClr val="EBEBEB">
+                  <a:alpha val="100000"/>
+                </a:srgbClr>
+              </a:solidFill>
+              <a:prstDash val="solid"/>
+              <a:round/>
+            </a:ln>
+          </p:spPr>
+          <p:txBody>
+            <a:bodyPr/>
+            <a:lstStyle/>
+            <a:p/>
+          </p:txBody>
+        </p:sp>
+        <p:sp>
+          <p:nvSpPr>
+            <p:cNvPr id="57" name="pl57"/>
+            <p:cNvSpPr/>
+            <p:nvPr/>
+          </p:nvSpPr>
+          <p:spPr>
+            <a:xfrm>
+              <a:off x="887106" y="5593686"/>
+              <a:ext cx="7660515" cy="0"/>
+            </a:xfrm>
+            <a:custGeom>
+              <a:avLst/>
+              <a:pathLst>
+                <a:path w="7660515" h="0">
+                  <a:moveTo>
+                    <a:pt x="0" y="0"/>
+                  </a:moveTo>
+                  <a:lnTo>
+                    <a:pt x="7660515" y="0"/>
+                  </a:lnTo>
+                  <a:lnTo>
+                    <a:pt x="7660515" y="0"/>
+                  </a:lnTo>
+                </a:path>
+              </a:pathLst>
+            </a:custGeom>
+            <a:ln w="13550" cap="flat">
+              <a:solidFill>
+                <a:srgbClr val="EBEBEB">
+                  <a:alpha val="100000"/>
+                </a:srgbClr>
+              </a:solidFill>
+              <a:prstDash val="solid"/>
+              <a:round/>
+            </a:ln>
+          </p:spPr>
+          <p:txBody>
+            <a:bodyPr/>
+            <a:lstStyle/>
+            <a:p/>
+          </p:txBody>
+        </p:sp>
+        <p:sp>
+          <p:nvSpPr>
+            <p:cNvPr id="58" name="pl58"/>
+            <p:cNvSpPr/>
+            <p:nvPr/>
+          </p:nvSpPr>
+          <p:spPr>
+            <a:xfrm>
+              <a:off x="887106" y="5294352"/>
+              <a:ext cx="7660515" cy="0"/>
+            </a:xfrm>
+            <a:custGeom>
+              <a:avLst/>
+              <a:pathLst>
+                <a:path w="7660515" h="0">
+                  <a:moveTo>
+                    <a:pt x="0" y="0"/>
+                  </a:moveTo>
+                  <a:lnTo>
+                    <a:pt x="7660515" y="0"/>
+                  </a:lnTo>
+                  <a:lnTo>
+                    <a:pt x="7660515" y="0"/>
+                  </a:lnTo>
+                </a:path>
+              </a:pathLst>
+            </a:custGeom>
+            <a:ln w="13550" cap="flat">
+              <a:solidFill>
+                <a:srgbClr val="EBEBEB">
+                  <a:alpha val="100000"/>
+                </a:srgbClr>
+              </a:solidFill>
+              <a:prstDash val="solid"/>
+              <a:round/>
+            </a:ln>
+          </p:spPr>
+          <p:txBody>
+            <a:bodyPr/>
+            <a:lstStyle/>
+            <a:p/>
+          </p:txBody>
+        </p:sp>
+        <p:sp>
+          <p:nvSpPr>
+            <p:cNvPr id="59" name="pl59"/>
+            <p:cNvSpPr/>
+            <p:nvPr/>
+          </p:nvSpPr>
+          <p:spPr>
+            <a:xfrm>
+              <a:off x="887106" y="4995019"/>
+              <a:ext cx="7660515" cy="0"/>
+            </a:xfrm>
+            <a:custGeom>
+              <a:avLst/>
+              <a:pathLst>
+                <a:path w="7660515" h="0">
+                  <a:moveTo>
+                    <a:pt x="0" y="0"/>
+                  </a:moveTo>
+                  <a:lnTo>
+                    <a:pt x="7660515" y="0"/>
+                  </a:lnTo>
+                  <a:lnTo>
+                    <a:pt x="7660515" y="0"/>
+                  </a:lnTo>
+                </a:path>
+              </a:pathLst>
+            </a:custGeom>
+            <a:ln w="13550" cap="flat">
+              <a:solidFill>
+                <a:srgbClr val="EBEBEB">
+                  <a:alpha val="100000"/>
+                </a:srgbClr>
+              </a:solidFill>
+              <a:prstDash val="solid"/>
+              <a:round/>
+            </a:ln>
+          </p:spPr>
+          <p:txBody>
+            <a:bodyPr/>
+            <a:lstStyle/>
+            <a:p/>
+          </p:txBody>
+        </p:sp>
+        <p:sp>
+          <p:nvSpPr>
+            <p:cNvPr id="60" name="pl60"/>
+            <p:cNvSpPr/>
+            <p:nvPr/>
+          </p:nvSpPr>
+          <p:spPr>
+            <a:xfrm>
+              <a:off x="887106" y="4695685"/>
+              <a:ext cx="7660515" cy="0"/>
+            </a:xfrm>
+            <a:custGeom>
+              <a:avLst/>
+              <a:pathLst>
+                <a:path w="7660515" h="0">
+                  <a:moveTo>
+                    <a:pt x="0" y="0"/>
+                  </a:moveTo>
+                  <a:lnTo>
+                    <a:pt x="7660515" y="0"/>
+                  </a:lnTo>
+                  <a:lnTo>
+                    <a:pt x="7660515" y="0"/>
+                  </a:lnTo>
+                </a:path>
+              </a:pathLst>
+            </a:custGeom>
+            <a:ln w="13550" cap="flat">
+              <a:solidFill>
+                <a:srgbClr val="EBEBEB">
+                  <a:alpha val="100000"/>
+                </a:srgbClr>
+              </a:solidFill>
+              <a:prstDash val="solid"/>
+              <a:round/>
+            </a:ln>
+          </p:spPr>
+          <p:txBody>
+            <a:bodyPr/>
+            <a:lstStyle/>
+            <a:p/>
+          </p:txBody>
+        </p:sp>
+        <p:sp>
+          <p:nvSpPr>
+            <p:cNvPr id="61" name="pl61"/>
+            <p:cNvSpPr/>
+            <p:nvPr/>
+          </p:nvSpPr>
+          <p:spPr>
+            <a:xfrm>
+              <a:off x="887106" y="4396351"/>
+              <a:ext cx="7660515" cy="0"/>
+            </a:xfrm>
+            <a:custGeom>
+              <a:avLst/>
+              <a:pathLst>
+                <a:path w="7660515" h="0">
+                  <a:moveTo>
+                    <a:pt x="0" y="0"/>
+                  </a:moveTo>
+                  <a:lnTo>
+                    <a:pt x="7660515" y="0"/>
+                  </a:lnTo>
+                  <a:lnTo>
+                    <a:pt x="7660515" y="0"/>
+                  </a:lnTo>
+                </a:path>
+              </a:pathLst>
+            </a:custGeom>
+            <a:ln w="13550" cap="flat">
+              <a:solidFill>
+                <a:srgbClr val="EBEBEB">
+                  <a:alpha val="100000"/>
+                </a:srgbClr>
+              </a:solidFill>
+              <a:prstDash val="solid"/>
+              <a:round/>
+            </a:ln>
+          </p:spPr>
+          <p:txBody>
+            <a:bodyPr/>
+            <a:lstStyle/>
+            <a:p/>
+          </p:txBody>
+        </p:sp>
+        <p:sp>
+          <p:nvSpPr>
+            <p:cNvPr id="62" name="pl62"/>
+            <p:cNvSpPr/>
+            <p:nvPr/>
+          </p:nvSpPr>
+          <p:spPr>
+            <a:xfrm>
+              <a:off x="1426790" y="4336484"/>
+              <a:ext cx="0" cy="1317069"/>
+            </a:xfrm>
+            <a:custGeom>
+              <a:avLst/>
+              <a:pathLst>
+                <a:path w="0" h="1317069">
+                  <a:moveTo>
+                    <a:pt x="0" y="1317069"/>
+                  </a:moveTo>
+                  <a:lnTo>
+                    <a:pt x="0" y="0"/>
+                  </a:lnTo>
+                  <a:lnTo>
+                    <a:pt x="0" y="0"/>
+                  </a:lnTo>
+                </a:path>
+              </a:pathLst>
+            </a:custGeom>
+            <a:ln w="13550" cap="flat">
+              <a:solidFill>
+                <a:srgbClr val="EBEBEB">
+                  <a:alpha val="100000"/>
+                </a:srgbClr>
+              </a:solidFill>
+              <a:prstDash val="solid"/>
+              <a:round/>
+            </a:ln>
+          </p:spPr>
+          <p:txBody>
+            <a:bodyPr/>
+            <a:lstStyle/>
+            <a:p/>
+          </p:txBody>
+        </p:sp>
+        <p:sp>
+          <p:nvSpPr>
+            <p:cNvPr id="63" name="pl63"/>
+            <p:cNvSpPr/>
+            <p:nvPr/>
+          </p:nvSpPr>
+          <p:spPr>
+            <a:xfrm>
+              <a:off x="2277299" y="4336484"/>
+              <a:ext cx="0" cy="1317069"/>
+            </a:xfrm>
+            <a:custGeom>
+              <a:avLst/>
+              <a:pathLst>
+                <a:path w="0" h="1317069">
+                  <a:moveTo>
+                    <a:pt x="0" y="1317069"/>
+                  </a:moveTo>
+                  <a:lnTo>
+                    <a:pt x="0" y="0"/>
+                  </a:lnTo>
+                  <a:lnTo>
+                    <a:pt x="0" y="0"/>
+                  </a:lnTo>
+                </a:path>
+              </a:pathLst>
+            </a:custGeom>
+            <a:ln w="13550" cap="flat">
+              <a:solidFill>
+                <a:srgbClr val="EBEBEB">
+                  <a:alpha val="100000"/>
+                </a:srgbClr>
+              </a:solidFill>
+              <a:prstDash val="solid"/>
+              <a:round/>
+            </a:ln>
+          </p:spPr>
+          <p:txBody>
+            <a:bodyPr/>
+            <a:lstStyle/>
+            <a:p/>
+          </p:txBody>
+        </p:sp>
+        <p:sp>
+          <p:nvSpPr>
+            <p:cNvPr id="64" name="pl64"/>
+            <p:cNvSpPr/>
+            <p:nvPr/>
+          </p:nvSpPr>
+          <p:spPr>
+            <a:xfrm>
+              <a:off x="3127809" y="4336484"/>
+              <a:ext cx="0" cy="1317069"/>
+            </a:xfrm>
+            <a:custGeom>
+              <a:avLst/>
+              <a:pathLst>
+                <a:path w="0" h="1317069">
+                  <a:moveTo>
+                    <a:pt x="0" y="1317069"/>
+                  </a:moveTo>
+                  <a:lnTo>
+                    <a:pt x="0" y="0"/>
+                  </a:lnTo>
+                  <a:lnTo>
+                    <a:pt x="0" y="0"/>
+                  </a:lnTo>
+                </a:path>
+              </a:pathLst>
+            </a:custGeom>
+            <a:ln w="13550" cap="flat">
+              <a:solidFill>
+                <a:srgbClr val="EBEBEB">
+                  <a:alpha val="100000"/>
+                </a:srgbClr>
+              </a:solidFill>
+              <a:prstDash val="solid"/>
+              <a:round/>
+            </a:ln>
+          </p:spPr>
+          <p:txBody>
+            <a:bodyPr/>
+            <a:lstStyle/>
+            <a:p/>
+          </p:txBody>
+        </p:sp>
+        <p:sp>
+          <p:nvSpPr>
+            <p:cNvPr id="65" name="pl65"/>
+            <p:cNvSpPr/>
+            <p:nvPr/>
+          </p:nvSpPr>
+          <p:spPr>
+            <a:xfrm>
+              <a:off x="3978318" y="4336484"/>
+              <a:ext cx="0" cy="1317069"/>
+            </a:xfrm>
+            <a:custGeom>
+              <a:avLst/>
+              <a:pathLst>
+                <a:path w="0" h="1317069">
+                  <a:moveTo>
+                    <a:pt x="0" y="1317069"/>
+                  </a:moveTo>
+                  <a:lnTo>
+                    <a:pt x="0" y="0"/>
+                  </a:lnTo>
+                  <a:lnTo>
+                    <a:pt x="0" y="0"/>
+                  </a:lnTo>
+                </a:path>
+              </a:pathLst>
+            </a:custGeom>
+            <a:ln w="13550" cap="flat">
+              <a:solidFill>
+                <a:srgbClr val="EBEBEB">
+                  <a:alpha val="100000"/>
+                </a:srgbClr>
+              </a:solidFill>
+              <a:prstDash val="solid"/>
+              <a:round/>
+            </a:ln>
+          </p:spPr>
+          <p:txBody>
+            <a:bodyPr/>
+            <a:lstStyle/>
+            <a:p/>
+          </p:txBody>
+        </p:sp>
+        <p:sp>
+          <p:nvSpPr>
+            <p:cNvPr id="66" name="pl66"/>
+            <p:cNvSpPr/>
+            <p:nvPr/>
+          </p:nvSpPr>
+          <p:spPr>
+            <a:xfrm>
+              <a:off x="4828828" y="4336484"/>
+              <a:ext cx="0" cy="1317069"/>
+            </a:xfrm>
+            <a:custGeom>
+              <a:avLst/>
+              <a:pathLst>
+                <a:path w="0" h="1317069">
+                  <a:moveTo>
+                    <a:pt x="0" y="1317069"/>
+                  </a:moveTo>
+                  <a:lnTo>
+                    <a:pt x="0" y="0"/>
+                  </a:lnTo>
+                  <a:lnTo>
+                    <a:pt x="0" y="0"/>
+                  </a:lnTo>
+                </a:path>
+              </a:pathLst>
+            </a:custGeom>
+            <a:ln w="13550" cap="flat">
+              <a:solidFill>
+                <a:srgbClr val="EBEBEB">
+                  <a:alpha val="100000"/>
+                </a:srgbClr>
+              </a:solidFill>
+              <a:prstDash val="solid"/>
+              <a:round/>
+            </a:ln>
+          </p:spPr>
+          <p:txBody>
+            <a:bodyPr/>
+            <a:lstStyle/>
+            <a:p/>
+          </p:txBody>
+        </p:sp>
+        <p:sp>
+          <p:nvSpPr>
+            <p:cNvPr id="67" name="pl67"/>
+            <p:cNvSpPr/>
+            <p:nvPr/>
+          </p:nvSpPr>
+          <p:spPr>
+            <a:xfrm>
+              <a:off x="5679337" y="4336484"/>
+              <a:ext cx="0" cy="1317069"/>
+            </a:xfrm>
+            <a:custGeom>
+              <a:avLst/>
+              <a:pathLst>
+                <a:path w="0" h="1317069">
+                  <a:moveTo>
+                    <a:pt x="0" y="1317069"/>
+                  </a:moveTo>
+                  <a:lnTo>
+                    <a:pt x="0" y="0"/>
+                  </a:lnTo>
+                  <a:lnTo>
+                    <a:pt x="0" y="0"/>
+                  </a:lnTo>
+                </a:path>
+              </a:pathLst>
+            </a:custGeom>
+            <a:ln w="13550" cap="flat">
+              <a:solidFill>
+                <a:srgbClr val="EBEBEB">
+                  <a:alpha val="100000"/>
+                </a:srgbClr>
+              </a:solidFill>
+              <a:prstDash val="solid"/>
+              <a:round/>
+            </a:ln>
+          </p:spPr>
+          <p:txBody>
+            <a:bodyPr/>
+            <a:lstStyle/>
+            <a:p/>
+          </p:txBody>
+        </p:sp>
+        <p:sp>
+          <p:nvSpPr>
+            <p:cNvPr id="68" name="pl68"/>
+            <p:cNvSpPr/>
+            <p:nvPr/>
+          </p:nvSpPr>
+          <p:spPr>
+            <a:xfrm>
+              <a:off x="6529847" y="4336484"/>
+              <a:ext cx="0" cy="1317069"/>
+            </a:xfrm>
+            <a:custGeom>
+              <a:avLst/>
+              <a:pathLst>
+                <a:path w="0" h="1317069">
+                  <a:moveTo>
+                    <a:pt x="0" y="1317069"/>
+                  </a:moveTo>
+                  <a:lnTo>
+                    <a:pt x="0" y="0"/>
+                  </a:lnTo>
+                  <a:lnTo>
+                    <a:pt x="0" y="0"/>
+                  </a:lnTo>
+                </a:path>
+              </a:pathLst>
+            </a:custGeom>
+            <a:ln w="13550" cap="flat">
+              <a:solidFill>
+                <a:srgbClr val="EBEBEB">
+                  <a:alpha val="100000"/>
+                </a:srgbClr>
+              </a:solidFill>
+              <a:prstDash val="solid"/>
+              <a:round/>
+            </a:ln>
+          </p:spPr>
+          <p:txBody>
+            <a:bodyPr/>
+            <a:lstStyle/>
+            <a:p/>
+          </p:txBody>
+        </p:sp>
+        <p:sp>
+          <p:nvSpPr>
+            <p:cNvPr id="69" name="pl69"/>
+            <p:cNvSpPr/>
+            <p:nvPr/>
+          </p:nvSpPr>
+          <p:spPr>
+            <a:xfrm>
+              <a:off x="7380356" y="4336484"/>
+              <a:ext cx="0" cy="1317069"/>
+            </a:xfrm>
+            <a:custGeom>
+              <a:avLst/>
+              <a:pathLst>
+                <a:path w="0" h="1317069">
+                  <a:moveTo>
+                    <a:pt x="0" y="1317069"/>
+                  </a:moveTo>
+                  <a:lnTo>
+                    <a:pt x="0" y="0"/>
+                  </a:lnTo>
+                  <a:lnTo>
+                    <a:pt x="0" y="0"/>
+                  </a:lnTo>
+                </a:path>
+              </a:pathLst>
+            </a:custGeom>
+            <a:ln w="13550" cap="flat">
+              <a:solidFill>
+                <a:srgbClr val="EBEBEB">
+                  <a:alpha val="100000"/>
+                </a:srgbClr>
+              </a:solidFill>
+              <a:prstDash val="solid"/>
+              <a:round/>
+            </a:ln>
+          </p:spPr>
+          <p:txBody>
+            <a:bodyPr/>
+            <a:lstStyle/>
+            <a:p/>
+          </p:txBody>
+        </p:sp>
+        <p:sp>
+          <p:nvSpPr>
+            <p:cNvPr id="70" name="pl70"/>
+            <p:cNvSpPr/>
+            <p:nvPr/>
+          </p:nvSpPr>
+          <p:spPr>
+            <a:xfrm>
+              <a:off x="8230866" y="4336484"/>
+              <a:ext cx="0" cy="1317069"/>
+            </a:xfrm>
+            <a:custGeom>
+              <a:avLst/>
+              <a:pathLst>
+                <a:path w="0" h="1317069">
+                  <a:moveTo>
+                    <a:pt x="0" y="1317069"/>
+                  </a:moveTo>
+                  <a:lnTo>
+                    <a:pt x="0" y="0"/>
+                  </a:lnTo>
+                  <a:lnTo>
+                    <a:pt x="0" y="0"/>
+                  </a:lnTo>
+                </a:path>
+              </a:pathLst>
+            </a:custGeom>
+            <a:ln w="13550" cap="flat">
+              <a:solidFill>
+                <a:srgbClr val="EBEBEB">
+                  <a:alpha val="100000"/>
+                </a:srgbClr>
+              </a:solidFill>
+              <a:prstDash val="solid"/>
+              <a:round/>
+            </a:ln>
+          </p:spPr>
+          <p:txBody>
+            <a:bodyPr/>
+            <a:lstStyle/>
+            <a:p/>
+          </p:txBody>
+        </p:sp>
+        <p:sp>
+          <p:nvSpPr>
+            <p:cNvPr id="71" name="pg71"/>
+            <p:cNvSpPr/>
+            <p:nvPr/>
+          </p:nvSpPr>
+          <p:spPr>
+            <a:xfrm>
+              <a:off x="1235312" y="4694165"/>
+              <a:ext cx="6964104" cy="826156"/>
+            </a:xfrm>
+            <a:custGeom>
+              <a:avLst/>
+              <a:pathLst>
+                <a:path w="6964104" h="826156">
+                  <a:moveTo>
+                    <a:pt x="0" y="0"/>
+                  </a:moveTo>
+                  <a:lnTo>
+                    <a:pt x="70344" y="22487"/>
+                  </a:lnTo>
+                  <a:lnTo>
+                    <a:pt x="140688" y="44413"/>
+                  </a:lnTo>
+                  <a:lnTo>
+                    <a:pt x="211033" y="65790"/>
+                  </a:lnTo>
+                  <a:lnTo>
+                    <a:pt x="281377" y="86633"/>
+                  </a:lnTo>
+                  <a:lnTo>
+                    <a:pt x="351722" y="106955"/>
+                  </a:lnTo>
+                  <a:lnTo>
+                    <a:pt x="422066" y="126769"/>
+                  </a:lnTo>
+                  <a:lnTo>
+                    <a:pt x="492411" y="146087"/>
+                  </a:lnTo>
+                  <a:lnTo>
+                    <a:pt x="562755" y="164923"/>
+                  </a:lnTo>
+                  <a:lnTo>
+                    <a:pt x="633100" y="183288"/>
+                  </a:lnTo>
+                  <a:lnTo>
+                    <a:pt x="703444" y="201193"/>
+                  </a:lnTo>
+                  <a:lnTo>
+                    <a:pt x="773789" y="218651"/>
+                  </a:lnTo>
+                  <a:lnTo>
+                    <a:pt x="844133" y="235673"/>
+                  </a:lnTo>
+                  <a:lnTo>
+                    <a:pt x="914478" y="252269"/>
+                  </a:lnTo>
+                  <a:lnTo>
+                    <a:pt x="984822" y="268450"/>
+                  </a:lnTo>
+                  <a:lnTo>
+                    <a:pt x="1055167" y="284226"/>
+                  </a:lnTo>
+                  <a:lnTo>
+                    <a:pt x="1125511" y="299608"/>
+                  </a:lnTo>
+                  <a:lnTo>
+                    <a:pt x="1195856" y="314606"/>
+                  </a:lnTo>
+                  <a:lnTo>
+                    <a:pt x="1266200" y="329229"/>
+                  </a:lnTo>
+                  <a:lnTo>
+                    <a:pt x="1336545" y="343486"/>
+                  </a:lnTo>
+                  <a:lnTo>
+                    <a:pt x="1406889" y="357386"/>
+                  </a:lnTo>
+                  <a:lnTo>
+                    <a:pt x="1477234" y="370940"/>
+                  </a:lnTo>
+                  <a:lnTo>
+                    <a:pt x="1547578" y="384154"/>
+                  </a:lnTo>
+                  <a:lnTo>
+                    <a:pt x="1617923" y="397038"/>
+                  </a:lnTo>
+                  <a:lnTo>
+                    <a:pt x="1688267" y="409600"/>
+                  </a:lnTo>
+                  <a:lnTo>
+                    <a:pt x="1758612" y="421848"/>
+                  </a:lnTo>
+                  <a:lnTo>
+                    <a:pt x="1828956" y="433789"/>
+                  </a:lnTo>
+                  <a:lnTo>
+                    <a:pt x="1899301" y="445432"/>
+                  </a:lnTo>
+                  <a:lnTo>
+                    <a:pt x="1969645" y="456785"/>
+                  </a:lnTo>
+                  <a:lnTo>
+                    <a:pt x="2039990" y="467853"/>
+                  </a:lnTo>
+                  <a:lnTo>
+                    <a:pt x="2110334" y="478644"/>
+                  </a:lnTo>
+                  <a:lnTo>
+                    <a:pt x="2180679" y="489166"/>
+                  </a:lnTo>
+                  <a:lnTo>
+                    <a:pt x="2251023" y="499425"/>
+                  </a:lnTo>
+                  <a:lnTo>
+                    <a:pt x="2321368" y="509427"/>
+                  </a:lnTo>
+                  <a:lnTo>
+                    <a:pt x="2391712" y="519179"/>
+                  </a:lnTo>
+                  <a:lnTo>
+                    <a:pt x="2462057" y="528688"/>
+                  </a:lnTo>
+                  <a:lnTo>
+                    <a:pt x="2532401" y="537958"/>
+                  </a:lnTo>
+                  <a:lnTo>
+                    <a:pt x="2602746" y="546997"/>
+                  </a:lnTo>
+                  <a:lnTo>
+                    <a:pt x="2673090" y="555810"/>
+                  </a:lnTo>
+                  <a:lnTo>
+                    <a:pt x="2743435" y="564403"/>
+                  </a:lnTo>
+                  <a:lnTo>
+                    <a:pt x="2813779" y="572781"/>
+                  </a:lnTo>
+                  <a:lnTo>
+                    <a:pt x="2884124" y="580949"/>
+                  </a:lnTo>
+                  <a:lnTo>
+                    <a:pt x="2954468" y="588913"/>
+                  </a:lnTo>
+                  <a:lnTo>
+                    <a:pt x="3024813" y="596678"/>
+                  </a:lnTo>
+                  <a:lnTo>
+                    <a:pt x="3095157" y="600432"/>
+                  </a:lnTo>
+                  <a:lnTo>
+                    <a:pt x="3165502" y="600886"/>
+                  </a:lnTo>
+                  <a:lnTo>
+                    <a:pt x="3235846" y="601339"/>
+                  </a:lnTo>
+                  <a:lnTo>
+                    <a:pt x="3306191" y="601791"/>
+                  </a:lnTo>
+                  <a:lnTo>
+                    <a:pt x="3376535" y="602243"/>
+                  </a:lnTo>
+                  <a:lnTo>
+                    <a:pt x="3446880" y="602694"/>
+                  </a:lnTo>
+                  <a:lnTo>
+                    <a:pt x="3517224" y="603144"/>
+                  </a:lnTo>
+                  <a:lnTo>
+                    <a:pt x="3587569" y="603594"/>
+                  </a:lnTo>
+                  <a:lnTo>
+                    <a:pt x="3657913" y="604043"/>
+                  </a:lnTo>
+                  <a:lnTo>
+                    <a:pt x="3728257" y="604491"/>
+                  </a:lnTo>
+                  <a:lnTo>
+                    <a:pt x="3798602" y="604939"/>
+                  </a:lnTo>
+                  <a:lnTo>
+                    <a:pt x="3868946" y="605386"/>
+                  </a:lnTo>
+                  <a:lnTo>
+                    <a:pt x="3939291" y="605832"/>
+                  </a:lnTo>
+                  <a:lnTo>
+                    <a:pt x="4009635" y="606278"/>
+                  </a:lnTo>
+                  <a:lnTo>
+                    <a:pt x="4079980" y="606723"/>
+                  </a:lnTo>
+                  <a:lnTo>
+                    <a:pt x="4150324" y="607167"/>
+                  </a:lnTo>
+                  <a:lnTo>
+                    <a:pt x="4220669" y="607611"/>
+                  </a:lnTo>
+                  <a:lnTo>
+                    <a:pt x="4291013" y="608053"/>
+                  </a:lnTo>
+                  <a:lnTo>
+                    <a:pt x="4361358" y="608496"/>
+                  </a:lnTo>
+                  <a:lnTo>
+                    <a:pt x="4431702" y="608937"/>
+                  </a:lnTo>
+                  <a:lnTo>
+                    <a:pt x="4502047" y="609378"/>
+                  </a:lnTo>
+                  <a:lnTo>
+                    <a:pt x="4572391" y="609818"/>
+                  </a:lnTo>
+                  <a:lnTo>
+                    <a:pt x="4642736" y="610258"/>
+                  </a:lnTo>
+                  <a:lnTo>
+                    <a:pt x="4713080" y="610697"/>
+                  </a:lnTo>
+                  <a:lnTo>
+                    <a:pt x="4783425" y="611135"/>
+                  </a:lnTo>
+                  <a:lnTo>
+                    <a:pt x="4853769" y="611573"/>
+                  </a:lnTo>
+                  <a:lnTo>
+                    <a:pt x="4924114" y="612009"/>
+                  </a:lnTo>
+                  <a:lnTo>
+                    <a:pt x="4994458" y="612446"/>
+                  </a:lnTo>
+                  <a:lnTo>
+                    <a:pt x="5064803" y="612881"/>
+                  </a:lnTo>
+                  <a:lnTo>
+                    <a:pt x="5135147" y="613316"/>
+                  </a:lnTo>
+                  <a:lnTo>
+                    <a:pt x="5205492" y="613750"/>
+                  </a:lnTo>
+                  <a:lnTo>
+                    <a:pt x="5275836" y="614184"/>
+                  </a:lnTo>
+                  <a:lnTo>
+                    <a:pt x="5346181" y="614617"/>
+                  </a:lnTo>
+                  <a:lnTo>
+                    <a:pt x="5416525" y="615049"/>
+                  </a:lnTo>
+                  <a:lnTo>
+                    <a:pt x="5486870" y="615481"/>
+                  </a:lnTo>
+                  <a:lnTo>
+                    <a:pt x="5557214" y="615912"/>
+                  </a:lnTo>
+                  <a:lnTo>
+                    <a:pt x="5627559" y="616342"/>
+                  </a:lnTo>
+                  <a:lnTo>
+                    <a:pt x="5697903" y="616772"/>
+                  </a:lnTo>
+                  <a:lnTo>
+                    <a:pt x="5768248" y="617201"/>
+                  </a:lnTo>
+                  <a:lnTo>
+                    <a:pt x="5838592" y="617629"/>
+                  </a:lnTo>
+                  <a:lnTo>
+                    <a:pt x="5908937" y="618057"/>
+                  </a:lnTo>
+                  <a:lnTo>
+                    <a:pt x="5979281" y="618484"/>
+                  </a:lnTo>
+                  <a:lnTo>
+                    <a:pt x="6049626" y="618910"/>
+                  </a:lnTo>
+                  <a:lnTo>
+                    <a:pt x="6119970" y="619336"/>
+                  </a:lnTo>
+                  <a:lnTo>
+                    <a:pt x="6190315" y="619761"/>
+                  </a:lnTo>
+                  <a:lnTo>
+                    <a:pt x="6260659" y="620186"/>
+                  </a:lnTo>
+                  <a:lnTo>
+                    <a:pt x="6331004" y="620609"/>
+                  </a:lnTo>
+                  <a:lnTo>
+                    <a:pt x="6401348" y="621033"/>
+                  </a:lnTo>
+                  <a:lnTo>
+                    <a:pt x="6471693" y="621455"/>
+                  </a:lnTo>
+                  <a:lnTo>
+                    <a:pt x="6542037" y="621877"/>
+                  </a:lnTo>
+                  <a:lnTo>
+                    <a:pt x="6612382" y="622298"/>
+                  </a:lnTo>
+                  <a:lnTo>
+                    <a:pt x="6682726" y="622719"/>
+                  </a:lnTo>
+                  <a:lnTo>
+                    <a:pt x="6753071" y="623139"/>
+                  </a:lnTo>
+                  <a:lnTo>
+                    <a:pt x="6823415" y="623558"/>
+                  </a:lnTo>
+                  <a:lnTo>
+                    <a:pt x="6893760" y="623977"/>
+                  </a:lnTo>
+                  <a:lnTo>
+                    <a:pt x="6964104" y="624395"/>
+                  </a:lnTo>
+                  <a:lnTo>
+                    <a:pt x="6964104" y="826156"/>
+                  </a:lnTo>
+                  <a:lnTo>
+                    <a:pt x="6893760" y="824275"/>
+                  </a:lnTo>
+                  <a:lnTo>
+                    <a:pt x="6823415" y="822346"/>
+                  </a:lnTo>
+                  <a:lnTo>
+                    <a:pt x="6753071" y="820367"/>
+                  </a:lnTo>
+                  <a:lnTo>
+                    <a:pt x="6682726" y="818338"/>
+                  </a:lnTo>
+                  <a:lnTo>
+                    <a:pt x="6612382" y="816256"/>
+                  </a:lnTo>
+                  <a:lnTo>
+                    <a:pt x="6542037" y="814121"/>
+                  </a:lnTo>
+                  <a:lnTo>
+                    <a:pt x="6471693" y="811931"/>
+                  </a:lnTo>
+                  <a:lnTo>
+                    <a:pt x="6401348" y="809686"/>
+                  </a:lnTo>
+                  <a:lnTo>
+                    <a:pt x="6331004" y="807382"/>
+                  </a:lnTo>
+                  <a:lnTo>
+                    <a:pt x="6260659" y="805020"/>
+                  </a:lnTo>
+                  <a:lnTo>
+                    <a:pt x="6190315" y="802597"/>
+                  </a:lnTo>
+                  <a:lnTo>
+                    <a:pt x="6119970" y="800111"/>
+                  </a:lnTo>
+                  <a:lnTo>
+                    <a:pt x="6049626" y="797562"/>
+                  </a:lnTo>
+                  <a:lnTo>
+                    <a:pt x="5979281" y="794948"/>
+                  </a:lnTo>
+                  <a:lnTo>
+                    <a:pt x="5908937" y="792267"/>
+                  </a:lnTo>
+                  <a:lnTo>
+                    <a:pt x="5838592" y="789517"/>
+                  </a:lnTo>
+                  <a:lnTo>
+                    <a:pt x="5768248" y="786696"/>
+                  </a:lnTo>
+                  <a:lnTo>
+                    <a:pt x="5697903" y="783803"/>
+                  </a:lnTo>
+                  <a:lnTo>
+                    <a:pt x="5627559" y="780836"/>
+                  </a:lnTo>
+                  <a:lnTo>
+                    <a:pt x="5557214" y="777793"/>
+                  </a:lnTo>
+                  <a:lnTo>
+                    <a:pt x="5486870" y="774672"/>
+                  </a:lnTo>
+                  <a:lnTo>
+                    <a:pt x="5416525" y="771471"/>
+                  </a:lnTo>
+                  <a:lnTo>
+                    <a:pt x="5346181" y="768188"/>
+                  </a:lnTo>
+                  <a:lnTo>
+                    <a:pt x="5275836" y="764820"/>
+                  </a:lnTo>
+                  <a:lnTo>
+                    <a:pt x="5205492" y="761366"/>
+                  </a:lnTo>
+                  <a:lnTo>
+                    <a:pt x="5135147" y="757824"/>
+                  </a:lnTo>
+                  <a:lnTo>
+                    <a:pt x="5064803" y="754191"/>
+                  </a:lnTo>
+                  <a:lnTo>
+                    <a:pt x="4994458" y="750464"/>
+                  </a:lnTo>
+                  <a:lnTo>
+                    <a:pt x="4924114" y="746642"/>
+                  </a:lnTo>
+                  <a:lnTo>
+                    <a:pt x="4853769" y="742723"/>
+                  </a:lnTo>
+                  <a:lnTo>
+                    <a:pt x="4783425" y="738702"/>
+                  </a:lnTo>
+                  <a:lnTo>
+                    <a:pt x="4713080" y="734579"/>
+                  </a:lnTo>
+                  <a:lnTo>
+                    <a:pt x="4642736" y="730349"/>
+                  </a:lnTo>
+                  <a:lnTo>
+                    <a:pt x="4572391" y="726012"/>
+                  </a:lnTo>
+                  <a:lnTo>
+                    <a:pt x="4502047" y="721563"/>
+                  </a:lnTo>
+                  <a:lnTo>
+                    <a:pt x="4431702" y="717000"/>
+                  </a:lnTo>
+                  <a:lnTo>
+                    <a:pt x="4361358" y="712320"/>
+                  </a:lnTo>
+                  <a:lnTo>
+                    <a:pt x="4291013" y="707520"/>
+                  </a:lnTo>
+                  <a:lnTo>
+                    <a:pt x="4220669" y="702597"/>
+                  </a:lnTo>
+                  <a:lnTo>
+                    <a:pt x="4150324" y="697548"/>
+                  </a:lnTo>
+                  <a:lnTo>
+                    <a:pt x="4079980" y="692369"/>
+                  </a:lnTo>
+                  <a:lnTo>
+                    <a:pt x="4009635" y="687058"/>
+                  </a:lnTo>
+                  <a:lnTo>
+                    <a:pt x="3939291" y="681610"/>
+                  </a:lnTo>
+                  <a:lnTo>
+                    <a:pt x="3868946" y="676023"/>
+                  </a:lnTo>
+                  <a:lnTo>
+                    <a:pt x="3798602" y="670292"/>
+                  </a:lnTo>
+                  <a:lnTo>
+                    <a:pt x="3728257" y="664414"/>
+                  </a:lnTo>
+                  <a:lnTo>
+                    <a:pt x="3657913" y="658386"/>
+                  </a:lnTo>
+                  <a:lnTo>
+                    <a:pt x="3587569" y="652203"/>
+                  </a:lnTo>
+                  <a:lnTo>
+                    <a:pt x="3517224" y="645862"/>
+                  </a:lnTo>
+                  <a:lnTo>
+                    <a:pt x="3446880" y="639358"/>
+                  </a:lnTo>
+                  <a:lnTo>
+                    <a:pt x="3376535" y="632687"/>
+                  </a:lnTo>
+                  <a:lnTo>
+                    <a:pt x="3306191" y="625845"/>
+                  </a:lnTo>
+                  <a:lnTo>
+                    <a:pt x="3235846" y="618828"/>
+                  </a:lnTo>
+                  <a:lnTo>
+                    <a:pt x="3165502" y="611631"/>
+                  </a:lnTo>
+                  <a:lnTo>
+                    <a:pt x="3095157" y="604249"/>
+                  </a:lnTo>
+                  <a:lnTo>
+                    <a:pt x="3024813" y="599977"/>
+                  </a:lnTo>
+                  <a:lnTo>
+                    <a:pt x="2954468" y="599522"/>
+                  </a:lnTo>
+                  <a:lnTo>
+                    <a:pt x="2884124" y="599066"/>
+                  </a:lnTo>
+                  <a:lnTo>
+                    <a:pt x="2813779" y="598610"/>
+                  </a:lnTo>
+                  <a:lnTo>
+                    <a:pt x="2743435" y="598152"/>
+                  </a:lnTo>
+                  <a:lnTo>
+                    <a:pt x="2673090" y="597695"/>
+                  </a:lnTo>
+                  <a:lnTo>
+                    <a:pt x="2602746" y="597236"/>
+                  </a:lnTo>
+                  <a:lnTo>
+                    <a:pt x="2532401" y="596777"/>
+                  </a:lnTo>
+                  <a:lnTo>
+                    <a:pt x="2462057" y="596317"/>
+                  </a:lnTo>
+                  <a:lnTo>
+                    <a:pt x="2391712" y="595856"/>
+                  </a:lnTo>
+                  <a:lnTo>
+                    <a:pt x="2321368" y="595394"/>
+                  </a:lnTo>
+                  <a:lnTo>
+                    <a:pt x="2251023" y="594932"/>
+                  </a:lnTo>
+                  <a:lnTo>
+                    <a:pt x="2180679" y="594469"/>
+                  </a:lnTo>
+                  <a:lnTo>
+                    <a:pt x="2110334" y="594006"/>
+                  </a:lnTo>
+                  <a:lnTo>
+                    <a:pt x="2039990" y="593542"/>
+                  </a:lnTo>
+                  <a:lnTo>
+                    <a:pt x="1969645" y="593077"/>
+                  </a:lnTo>
+                  <a:lnTo>
+                    <a:pt x="1899301" y="592611"/>
+                  </a:lnTo>
+                  <a:lnTo>
+                    <a:pt x="1828956" y="592145"/>
+                  </a:lnTo>
+                  <a:lnTo>
+                    <a:pt x="1758612" y="591677"/>
+                  </a:lnTo>
+                  <a:lnTo>
+                    <a:pt x="1688267" y="591210"/>
+                  </a:lnTo>
+                  <a:lnTo>
+                    <a:pt x="1617923" y="590741"/>
+                  </a:lnTo>
+                  <a:lnTo>
+                    <a:pt x="1547578" y="590272"/>
+                  </a:lnTo>
+                  <a:lnTo>
+                    <a:pt x="1477234" y="589802"/>
+                  </a:lnTo>
+                  <a:lnTo>
+                    <a:pt x="1406889" y="589331"/>
+                  </a:lnTo>
+                  <a:lnTo>
+                    <a:pt x="1336545" y="588860"/>
+                  </a:lnTo>
+                  <a:lnTo>
+                    <a:pt x="1266200" y="588388"/>
+                  </a:lnTo>
+                  <a:lnTo>
+                    <a:pt x="1195856" y="587915"/>
+                  </a:lnTo>
+                  <a:lnTo>
+                    <a:pt x="1125511" y="587442"/>
+                  </a:lnTo>
+                  <a:lnTo>
+                    <a:pt x="1055167" y="586967"/>
+                  </a:lnTo>
+                  <a:lnTo>
+                    <a:pt x="984822" y="586493"/>
+                  </a:lnTo>
+                  <a:lnTo>
+                    <a:pt x="914478" y="586017"/>
+                  </a:lnTo>
+                  <a:lnTo>
+                    <a:pt x="844133" y="585540"/>
+                  </a:lnTo>
+                  <a:lnTo>
+                    <a:pt x="773789" y="585063"/>
+                  </a:lnTo>
+                  <a:lnTo>
+                    <a:pt x="703444" y="584586"/>
+                  </a:lnTo>
+                  <a:lnTo>
+                    <a:pt x="633100" y="584107"/>
+                  </a:lnTo>
+                  <a:lnTo>
+                    <a:pt x="562755" y="583628"/>
+                  </a:lnTo>
+                  <a:lnTo>
+                    <a:pt x="492411" y="583148"/>
+                  </a:lnTo>
+                  <a:lnTo>
+                    <a:pt x="422066" y="582667"/>
+                  </a:lnTo>
+                  <a:lnTo>
+                    <a:pt x="351722" y="582185"/>
+                  </a:lnTo>
+                  <a:lnTo>
+                    <a:pt x="281377" y="581703"/>
+                  </a:lnTo>
+                  <a:lnTo>
+                    <a:pt x="211033" y="581220"/>
+                  </a:lnTo>
+                  <a:lnTo>
+                    <a:pt x="140688" y="580737"/>
+                  </a:lnTo>
+                  <a:lnTo>
+                    <a:pt x="70344" y="580252"/>
+                  </a:lnTo>
+                  <a:lnTo>
+                    <a:pt x="0" y="579767"/>
+                  </a:lnTo>
+                  <a:close/>
+                </a:path>
+              </a:pathLst>
+            </a:custGeom>
+            <a:solidFill>
+              <a:srgbClr val="FF8C00">
+                <a:alpha val="20000"/>
+              </a:srgbClr>
+            </a:solidFill>
+          </p:spPr>
+          <p:txBody>
+            <a:bodyPr/>
+            <a:lstStyle/>
+            <a:p/>
+          </p:txBody>
+        </p:sp>
+        <p:sp>
+          <p:nvSpPr>
+            <p:cNvPr id="72" name="pl72"/>
+            <p:cNvSpPr/>
+            <p:nvPr/>
+          </p:nvSpPr>
+          <p:spPr>
+            <a:xfrm>
+              <a:off x="1235312" y="4694165"/>
+              <a:ext cx="6964104" cy="624395"/>
+            </a:xfrm>
+            <a:custGeom>
+              <a:avLst/>
+              <a:pathLst>
+                <a:path w="6964104" h="624395">
+                  <a:moveTo>
+                    <a:pt x="0" y="0"/>
+                  </a:moveTo>
+                  <a:lnTo>
+                    <a:pt x="70344" y="22487"/>
+                  </a:lnTo>
+                  <a:lnTo>
+                    <a:pt x="140688" y="44413"/>
+                  </a:lnTo>
+                  <a:lnTo>
+                    <a:pt x="211033" y="65790"/>
+                  </a:lnTo>
+                  <a:lnTo>
+                    <a:pt x="281377" y="86633"/>
+                  </a:lnTo>
+                  <a:lnTo>
+                    <a:pt x="351722" y="106955"/>
+                  </a:lnTo>
+                  <a:lnTo>
+                    <a:pt x="422066" y="126769"/>
+                  </a:lnTo>
+                  <a:lnTo>
+                    <a:pt x="492411" y="146087"/>
+                  </a:lnTo>
+                  <a:lnTo>
+                    <a:pt x="562755" y="164923"/>
+                  </a:lnTo>
+                  <a:lnTo>
+                    <a:pt x="633100" y="183288"/>
+                  </a:lnTo>
+                  <a:lnTo>
+                    <a:pt x="703444" y="201193"/>
+                  </a:lnTo>
+                  <a:lnTo>
+                    <a:pt x="773789" y="218651"/>
+                  </a:lnTo>
+                  <a:lnTo>
+                    <a:pt x="844133" y="235673"/>
+                  </a:lnTo>
+                  <a:lnTo>
+                    <a:pt x="914478" y="252269"/>
+                  </a:lnTo>
+                  <a:lnTo>
+                    <a:pt x="984822" y="268450"/>
+                  </a:lnTo>
+                  <a:lnTo>
+                    <a:pt x="1055167" y="284226"/>
+                  </a:lnTo>
+                  <a:lnTo>
+                    <a:pt x="1125511" y="299608"/>
+                  </a:lnTo>
+                  <a:lnTo>
+                    <a:pt x="1195856" y="314606"/>
+                  </a:lnTo>
+                  <a:lnTo>
+                    <a:pt x="1266200" y="329229"/>
+                  </a:lnTo>
+                  <a:lnTo>
+                    <a:pt x="1336545" y="343486"/>
+                  </a:lnTo>
+                  <a:lnTo>
+                    <a:pt x="1406889" y="357386"/>
+                  </a:lnTo>
+                  <a:lnTo>
+                    <a:pt x="1477234" y="370940"/>
+                  </a:lnTo>
+                  <a:lnTo>
+                    <a:pt x="1547578" y="384154"/>
+                  </a:lnTo>
+                  <a:lnTo>
+                    <a:pt x="1617923" y="397038"/>
+                  </a:lnTo>
+                  <a:lnTo>
+                    <a:pt x="1688267" y="409600"/>
+                  </a:lnTo>
+                  <a:lnTo>
+                    <a:pt x="1758612" y="421848"/>
+                  </a:lnTo>
+                  <a:lnTo>
+                    <a:pt x="1828956" y="433789"/>
+                  </a:lnTo>
+                  <a:lnTo>
+                    <a:pt x="1899301" y="445432"/>
+                  </a:lnTo>
+                  <a:lnTo>
+                    <a:pt x="1969645" y="456785"/>
+                  </a:lnTo>
+                  <a:lnTo>
+                    <a:pt x="2039990" y="467853"/>
+                  </a:lnTo>
+                  <a:lnTo>
+                    <a:pt x="2110334" y="478644"/>
+                  </a:lnTo>
+                  <a:lnTo>
+                    <a:pt x="2180679" y="489166"/>
+                  </a:lnTo>
+                  <a:lnTo>
+                    <a:pt x="2251023" y="499425"/>
+                  </a:lnTo>
+                  <a:lnTo>
+                    <a:pt x="2321368" y="509427"/>
+                  </a:lnTo>
+                  <a:lnTo>
+                    <a:pt x="2391712" y="519179"/>
+                  </a:lnTo>
+                  <a:lnTo>
+                    <a:pt x="2462057" y="528688"/>
+                  </a:lnTo>
+                  <a:lnTo>
+                    <a:pt x="2532401" y="537958"/>
+                  </a:lnTo>
+                  <a:lnTo>
+                    <a:pt x="2602746" y="546997"/>
+                  </a:lnTo>
+                  <a:lnTo>
+                    <a:pt x="2673090" y="555810"/>
+                  </a:lnTo>
+                  <a:lnTo>
+                    <a:pt x="2743435" y="564403"/>
+                  </a:lnTo>
+                  <a:lnTo>
+                    <a:pt x="2813779" y="572781"/>
+                  </a:lnTo>
+                  <a:lnTo>
+                    <a:pt x="2884124" y="580949"/>
+                  </a:lnTo>
+                  <a:lnTo>
+                    <a:pt x="2954468" y="588913"/>
+                  </a:lnTo>
+                  <a:lnTo>
+                    <a:pt x="3024813" y="596678"/>
+                  </a:lnTo>
+                  <a:lnTo>
+                    <a:pt x="3095157" y="600432"/>
+                  </a:lnTo>
+                  <a:lnTo>
+                    <a:pt x="3165502" y="600886"/>
+                  </a:lnTo>
+                  <a:lnTo>
+                    <a:pt x="3235846" y="601339"/>
+                  </a:lnTo>
+                  <a:lnTo>
+                    <a:pt x="3306191" y="601791"/>
+                  </a:lnTo>
+                  <a:lnTo>
+                    <a:pt x="3376535" y="602243"/>
+                  </a:lnTo>
+                  <a:lnTo>
+                    <a:pt x="3446880" y="602694"/>
+                  </a:lnTo>
+                  <a:lnTo>
+                    <a:pt x="3517224" y="603144"/>
+                  </a:lnTo>
+                  <a:lnTo>
+                    <a:pt x="3587569" y="603594"/>
+                  </a:lnTo>
+                  <a:lnTo>
+                    <a:pt x="3657913" y="604043"/>
+                  </a:lnTo>
+                  <a:lnTo>
+                    <a:pt x="3728257" y="604491"/>
+                  </a:lnTo>
+                  <a:lnTo>
+                    <a:pt x="3798602" y="604939"/>
+                  </a:lnTo>
+                  <a:lnTo>
+                    <a:pt x="3868946" y="605386"/>
+                  </a:lnTo>
+                  <a:lnTo>
+                    <a:pt x="3939291" y="605832"/>
+                  </a:lnTo>
+                  <a:lnTo>
+                    <a:pt x="4009635" y="606278"/>
+                  </a:lnTo>
+                  <a:lnTo>
+                    <a:pt x="4079980" y="606723"/>
+                  </a:lnTo>
+                  <a:lnTo>
+                    <a:pt x="4150324" y="607167"/>
+                  </a:lnTo>
+                  <a:lnTo>
+                    <a:pt x="4220669" y="607611"/>
+                  </a:lnTo>
+                  <a:lnTo>
+                    <a:pt x="4291013" y="608053"/>
+                  </a:lnTo>
+                  <a:lnTo>
+                    <a:pt x="4361358" y="608496"/>
+                  </a:lnTo>
+                  <a:lnTo>
+                    <a:pt x="4431702" y="608937"/>
+                  </a:lnTo>
+                  <a:lnTo>
+                    <a:pt x="4502047" y="609378"/>
+                  </a:lnTo>
+                  <a:lnTo>
+                    <a:pt x="4572391" y="609818"/>
+                  </a:lnTo>
+                  <a:lnTo>
+                    <a:pt x="4642736" y="610258"/>
+                  </a:lnTo>
+                  <a:lnTo>
+                    <a:pt x="4713080" y="610697"/>
+                  </a:lnTo>
+                  <a:lnTo>
+                    <a:pt x="4783425" y="611135"/>
+                  </a:lnTo>
+                  <a:lnTo>
+                    <a:pt x="4853769" y="611573"/>
+                  </a:lnTo>
+                  <a:lnTo>
+                    <a:pt x="4924114" y="612009"/>
+                  </a:lnTo>
+                  <a:lnTo>
+                    <a:pt x="4994458" y="612446"/>
+                  </a:lnTo>
+                  <a:lnTo>
+                    <a:pt x="5064803" y="612881"/>
+                  </a:lnTo>
+                  <a:lnTo>
+                    <a:pt x="5135147" y="613316"/>
+                  </a:lnTo>
+                  <a:lnTo>
+                    <a:pt x="5205492" y="613750"/>
+                  </a:lnTo>
+                  <a:lnTo>
+                    <a:pt x="5275836" y="614184"/>
+                  </a:lnTo>
+                  <a:lnTo>
+                    <a:pt x="5346181" y="614617"/>
+                  </a:lnTo>
+                  <a:lnTo>
+                    <a:pt x="5416525" y="615049"/>
+                  </a:lnTo>
+                  <a:lnTo>
+                    <a:pt x="5486870" y="615481"/>
+                  </a:lnTo>
+                  <a:lnTo>
+                    <a:pt x="5557214" y="615912"/>
+                  </a:lnTo>
+                  <a:lnTo>
+                    <a:pt x="5627559" y="616342"/>
+                  </a:lnTo>
+                  <a:lnTo>
+                    <a:pt x="5697903" y="616772"/>
+                  </a:lnTo>
+                  <a:lnTo>
+                    <a:pt x="5768248" y="617201"/>
+                  </a:lnTo>
+                  <a:lnTo>
+                    <a:pt x="5838592" y="617629"/>
+                  </a:lnTo>
+                  <a:lnTo>
+                    <a:pt x="5908937" y="618057"/>
+                  </a:lnTo>
+                  <a:lnTo>
+                    <a:pt x="5979281" y="618484"/>
+                  </a:lnTo>
+                  <a:lnTo>
+                    <a:pt x="6049626" y="618910"/>
+                  </a:lnTo>
+                  <a:lnTo>
+                    <a:pt x="6119970" y="619336"/>
+                  </a:lnTo>
+                  <a:lnTo>
+                    <a:pt x="6190315" y="619761"/>
+                  </a:lnTo>
+                  <a:lnTo>
+                    <a:pt x="6260659" y="620186"/>
+                  </a:lnTo>
+                  <a:lnTo>
+                    <a:pt x="6331004" y="620609"/>
+                  </a:lnTo>
+                  <a:lnTo>
+                    <a:pt x="6401348" y="621033"/>
+                  </a:lnTo>
+                  <a:lnTo>
+                    <a:pt x="6471693" y="621455"/>
+                  </a:lnTo>
+                  <a:lnTo>
+                    <a:pt x="6542037" y="621877"/>
+                  </a:lnTo>
+                  <a:lnTo>
+                    <a:pt x="6612382" y="622298"/>
+                  </a:lnTo>
+                  <a:lnTo>
+                    <a:pt x="6682726" y="622719"/>
+                  </a:lnTo>
+                  <a:lnTo>
+                    <a:pt x="6753071" y="623139"/>
+                  </a:lnTo>
+                  <a:lnTo>
+                    <a:pt x="6823415" y="623558"/>
+                  </a:lnTo>
+                  <a:lnTo>
+                    <a:pt x="6893760" y="623977"/>
+                  </a:lnTo>
+                  <a:lnTo>
+                    <a:pt x="6964104" y="624395"/>
+                  </a:lnTo>
+                </a:path>
+              </a:pathLst>
+            </a:custGeom>
+          </p:spPr>
+          <p:txBody>
+            <a:bodyPr/>
+            <a:lstStyle/>
+            <a:p/>
+          </p:txBody>
+        </p:sp>
+        <p:sp>
+          <p:nvSpPr>
+            <p:cNvPr id="73" name="pl73"/>
+            <p:cNvSpPr/>
+            <p:nvPr/>
+          </p:nvSpPr>
+          <p:spPr>
+            <a:xfrm>
+              <a:off x="1235312" y="5273933"/>
+              <a:ext cx="6964104" cy="246389"/>
+            </a:xfrm>
+            <a:custGeom>
+              <a:avLst/>
+              <a:pathLst>
+                <a:path w="6964104" h="246389">
+                  <a:moveTo>
+                    <a:pt x="6964104" y="246389"/>
+                  </a:moveTo>
+                  <a:lnTo>
+                    <a:pt x="6893760" y="244508"/>
+                  </a:lnTo>
+                  <a:lnTo>
+                    <a:pt x="6823415" y="242578"/>
+                  </a:lnTo>
+                  <a:lnTo>
+                    <a:pt x="6753071" y="240600"/>
+                  </a:lnTo>
+                  <a:lnTo>
+                    <a:pt x="6682726" y="238570"/>
+                  </a:lnTo>
+                  <a:lnTo>
+                    <a:pt x="6612382" y="236489"/>
+                  </a:lnTo>
+                  <a:lnTo>
+                    <a:pt x="6542037" y="234354"/>
+                  </a:lnTo>
+                  <a:lnTo>
+                    <a:pt x="6471693" y="232164"/>
+                  </a:lnTo>
+                  <a:lnTo>
+                    <a:pt x="6401348" y="229918"/>
+                  </a:lnTo>
+                  <a:lnTo>
+                    <a:pt x="6331004" y="227615"/>
+                  </a:lnTo>
+                  <a:lnTo>
+                    <a:pt x="6260659" y="225252"/>
+                  </a:lnTo>
+                  <a:lnTo>
+                    <a:pt x="6190315" y="222829"/>
+                  </a:lnTo>
+                  <a:lnTo>
+                    <a:pt x="6119970" y="220344"/>
+                  </a:lnTo>
+                  <a:lnTo>
+                    <a:pt x="6049626" y="217795"/>
+                  </a:lnTo>
+                  <a:lnTo>
+                    <a:pt x="5979281" y="215181"/>
+                  </a:lnTo>
+                  <a:lnTo>
+                    <a:pt x="5908937" y="212499"/>
+                  </a:lnTo>
+                  <a:lnTo>
+                    <a:pt x="5838592" y="209749"/>
+                  </a:lnTo>
+                  <a:lnTo>
+                    <a:pt x="5768248" y="206929"/>
+                  </a:lnTo>
+                  <a:lnTo>
+                    <a:pt x="5697903" y="204036"/>
+                  </a:lnTo>
+                  <a:lnTo>
+                    <a:pt x="5627559" y="201069"/>
+                  </a:lnTo>
+                  <a:lnTo>
+                    <a:pt x="5557214" y="198026"/>
+                  </a:lnTo>
+                  <a:lnTo>
+                    <a:pt x="5486870" y="194905"/>
+                  </a:lnTo>
+                  <a:lnTo>
+                    <a:pt x="5416525" y="191703"/>
+                  </a:lnTo>
+                  <a:lnTo>
+                    <a:pt x="5346181" y="188420"/>
+                  </a:lnTo>
+                  <a:lnTo>
+                    <a:pt x="5275836" y="185053"/>
+                  </a:lnTo>
+                  <a:lnTo>
+                    <a:pt x="5205492" y="181599"/>
+                  </a:lnTo>
+                  <a:lnTo>
+                    <a:pt x="5135147" y="178056"/>
+                  </a:lnTo>
+                  <a:lnTo>
+                    <a:pt x="5064803" y="174423"/>
+                  </a:lnTo>
+                  <a:lnTo>
+                    <a:pt x="4994458" y="170697"/>
+                  </a:lnTo>
+                  <a:lnTo>
+                    <a:pt x="4924114" y="166875"/>
+                  </a:lnTo>
+                  <a:lnTo>
+                    <a:pt x="4853769" y="162955"/>
+                  </a:lnTo>
+                  <a:lnTo>
+                    <a:pt x="4783425" y="158935"/>
+                  </a:lnTo>
+                  <a:lnTo>
+                    <a:pt x="4713080" y="154811"/>
+                  </a:lnTo>
+                  <a:lnTo>
+                    <a:pt x="4642736" y="150582"/>
+                  </a:lnTo>
+                  <a:lnTo>
+                    <a:pt x="4572391" y="146244"/>
+                  </a:lnTo>
+                  <a:lnTo>
+                    <a:pt x="4502047" y="141795"/>
+                  </a:lnTo>
+                  <a:lnTo>
+                    <a:pt x="4431702" y="137232"/>
+                  </a:lnTo>
+                  <a:lnTo>
+                    <a:pt x="4361358" y="132553"/>
+                  </a:lnTo>
+                  <a:lnTo>
+                    <a:pt x="4291013" y="127753"/>
+                  </a:lnTo>
+                  <a:lnTo>
+                    <a:pt x="4220669" y="122830"/>
+                  </a:lnTo>
+                  <a:lnTo>
+                    <a:pt x="4150324" y="117780"/>
+                  </a:lnTo>
+                  <a:lnTo>
+                    <a:pt x="4079980" y="112602"/>
+                  </a:lnTo>
+                  <a:lnTo>
+                    <a:pt x="4009635" y="107290"/>
+                  </a:lnTo>
+                  <a:lnTo>
+                    <a:pt x="3939291" y="101842"/>
+                  </a:lnTo>
+                  <a:lnTo>
+                    <a:pt x="3868946" y="96255"/>
+                  </a:lnTo>
+                  <a:lnTo>
+                    <a:pt x="3798602" y="90524"/>
+                  </a:lnTo>
+                  <a:lnTo>
+                    <a:pt x="3728257" y="84647"/>
+                  </a:lnTo>
+                  <a:lnTo>
+                    <a:pt x="3657913" y="78619"/>
+                  </a:lnTo>
+                  <a:lnTo>
+                    <a:pt x="3587569" y="72436"/>
+                  </a:lnTo>
+                  <a:lnTo>
+                    <a:pt x="3517224" y="66094"/>
+                  </a:lnTo>
+                  <a:lnTo>
+                    <a:pt x="3446880" y="59590"/>
+                  </a:lnTo>
+                  <a:lnTo>
+                    <a:pt x="3376535" y="52920"/>
+                  </a:lnTo>
+                  <a:lnTo>
+                    <a:pt x="3306191" y="46078"/>
+                  </a:lnTo>
+                  <a:lnTo>
+                    <a:pt x="3235846" y="39061"/>
+                  </a:lnTo>
+                  <a:lnTo>
+                    <a:pt x="3165502" y="31863"/>
+                  </a:lnTo>
+                  <a:lnTo>
+                    <a:pt x="3095157" y="24482"/>
+                  </a:lnTo>
+                  <a:lnTo>
+                    <a:pt x="3024813" y="20210"/>
+                  </a:lnTo>
+                  <a:lnTo>
+                    <a:pt x="2954468" y="19755"/>
+                  </a:lnTo>
+                  <a:lnTo>
+                    <a:pt x="2884124" y="19299"/>
+                  </a:lnTo>
+                  <a:lnTo>
+                    <a:pt x="2813779" y="18842"/>
+                  </a:lnTo>
+                  <a:lnTo>
+                    <a:pt x="2743435" y="18385"/>
+                  </a:lnTo>
+                  <a:lnTo>
+                    <a:pt x="2673090" y="17927"/>
+                  </a:lnTo>
+                  <a:lnTo>
+                    <a:pt x="2602746" y="17468"/>
+                  </a:lnTo>
+                  <a:lnTo>
+                    <a:pt x="2532401" y="17009"/>
+                  </a:lnTo>
+                  <a:lnTo>
+                    <a:pt x="2462057" y="16549"/>
+                  </a:lnTo>
+                  <a:lnTo>
+                    <a:pt x="2391712" y="16088"/>
+                  </a:lnTo>
+                  <a:lnTo>
+                    <a:pt x="2321368" y="15627"/>
+                  </a:lnTo>
+                  <a:lnTo>
+                    <a:pt x="2251023" y="15165"/>
+                  </a:lnTo>
+                  <a:lnTo>
+                    <a:pt x="2180679" y="14702"/>
+                  </a:lnTo>
+                  <a:lnTo>
+                    <a:pt x="2110334" y="14238"/>
+                  </a:lnTo>
+                  <a:lnTo>
+                    <a:pt x="2039990" y="13774"/>
+                  </a:lnTo>
+                  <a:lnTo>
+                    <a:pt x="1969645" y="13309"/>
+                  </a:lnTo>
+                  <a:lnTo>
+                    <a:pt x="1899301" y="12843"/>
+                  </a:lnTo>
+                  <a:lnTo>
+                    <a:pt x="1828956" y="12377"/>
+                  </a:lnTo>
+                  <a:lnTo>
+                    <a:pt x="1758612" y="11910"/>
+                  </a:lnTo>
+                  <a:lnTo>
+                    <a:pt x="1688267" y="11442"/>
+                  </a:lnTo>
+                  <a:lnTo>
+                    <a:pt x="1617923" y="10974"/>
+                  </a:lnTo>
+                  <a:lnTo>
+                    <a:pt x="1547578" y="10504"/>
+                  </a:lnTo>
+                  <a:lnTo>
+                    <a:pt x="1477234" y="10035"/>
+                  </a:lnTo>
+                  <a:lnTo>
+                    <a:pt x="1406889" y="9564"/>
+                  </a:lnTo>
+                  <a:lnTo>
+                    <a:pt x="1336545" y="9093"/>
+                  </a:lnTo>
+                  <a:lnTo>
+                    <a:pt x="1266200" y="8620"/>
+                  </a:lnTo>
+                  <a:lnTo>
+                    <a:pt x="1195856" y="8148"/>
+                  </a:lnTo>
+                  <a:lnTo>
+                    <a:pt x="1125511" y="7674"/>
+                  </a:lnTo>
+                  <a:lnTo>
+                    <a:pt x="1055167" y="7200"/>
+                  </a:lnTo>
+                  <a:lnTo>
+                    <a:pt x="984822" y="6725"/>
+                  </a:lnTo>
+                  <a:lnTo>
+                    <a:pt x="914478" y="6249"/>
+                  </a:lnTo>
+                  <a:lnTo>
+                    <a:pt x="844133" y="5773"/>
+                  </a:lnTo>
+                  <a:lnTo>
+                    <a:pt x="773789" y="5296"/>
+                  </a:lnTo>
+                  <a:lnTo>
+                    <a:pt x="703444" y="4818"/>
+                  </a:lnTo>
+                  <a:lnTo>
+                    <a:pt x="633100" y="4339"/>
+                  </a:lnTo>
+                  <a:lnTo>
+                    <a:pt x="562755" y="3860"/>
+                  </a:lnTo>
+                  <a:lnTo>
+                    <a:pt x="492411" y="3380"/>
+                  </a:lnTo>
+                  <a:lnTo>
+                    <a:pt x="422066" y="2899"/>
+                  </a:lnTo>
+                  <a:lnTo>
+                    <a:pt x="351722" y="2418"/>
+                  </a:lnTo>
+                  <a:lnTo>
+                    <a:pt x="281377" y="1936"/>
+                  </a:lnTo>
+                  <a:lnTo>
+                    <a:pt x="211033" y="1453"/>
+                  </a:lnTo>
+                  <a:lnTo>
+                    <a:pt x="140688" y="969"/>
+                  </a:lnTo>
+                  <a:lnTo>
+                    <a:pt x="70344" y="485"/>
+                  </a:lnTo>
+                  <a:lnTo>
+                    <a:pt x="0" y="0"/>
+                  </a:lnTo>
+                </a:path>
+              </a:pathLst>
+            </a:custGeom>
+          </p:spPr>
+          <p:txBody>
+            <a:bodyPr/>
+            <a:lstStyle/>
+            <a:p/>
+          </p:txBody>
+        </p:sp>
+        <p:sp>
+          <p:nvSpPr>
+            <p:cNvPr id="74" name="pl74"/>
+            <p:cNvSpPr/>
+            <p:nvPr/>
+          </p:nvSpPr>
+          <p:spPr>
+            <a:xfrm>
+              <a:off x="1235312" y="5057380"/>
+              <a:ext cx="6964104" cy="394235"/>
+            </a:xfrm>
+            <a:custGeom>
+              <a:avLst/>
+              <a:pathLst>
+                <a:path w="6964104" h="394235">
+                  <a:moveTo>
+                    <a:pt x="0" y="0"/>
+                  </a:moveTo>
+                  <a:lnTo>
+                    <a:pt x="70344" y="7148"/>
+                  </a:lnTo>
+                  <a:lnTo>
+                    <a:pt x="140688" y="14200"/>
+                  </a:lnTo>
+                  <a:lnTo>
+                    <a:pt x="211033" y="21159"/>
+                  </a:lnTo>
+                  <a:lnTo>
+                    <a:pt x="281377" y="28025"/>
+                  </a:lnTo>
+                  <a:lnTo>
+                    <a:pt x="351722" y="34800"/>
+                  </a:lnTo>
+                  <a:lnTo>
+                    <a:pt x="422066" y="41484"/>
+                  </a:lnTo>
+                  <a:lnTo>
+                    <a:pt x="492411" y="48079"/>
+                  </a:lnTo>
+                  <a:lnTo>
+                    <a:pt x="562755" y="54586"/>
+                  </a:lnTo>
+                  <a:lnTo>
+                    <a:pt x="633100" y="61007"/>
+                  </a:lnTo>
+                  <a:lnTo>
+                    <a:pt x="703444" y="67342"/>
+                  </a:lnTo>
+                  <a:lnTo>
+                    <a:pt x="773789" y="73592"/>
+                  </a:lnTo>
+                  <a:lnTo>
+                    <a:pt x="844133" y="79760"/>
+                  </a:lnTo>
+                  <a:lnTo>
+                    <a:pt x="914478" y="85845"/>
+                  </a:lnTo>
+                  <a:lnTo>
+                    <a:pt x="984822" y="91848"/>
+                  </a:lnTo>
+                  <a:lnTo>
+                    <a:pt x="1055167" y="97772"/>
+                  </a:lnTo>
+                  <a:lnTo>
+                    <a:pt x="1125511" y="103617"/>
+                  </a:lnTo>
+                  <a:lnTo>
+                    <a:pt x="1195856" y="109384"/>
+                  </a:lnTo>
+                  <a:lnTo>
+                    <a:pt x="1266200" y="115074"/>
+                  </a:lnTo>
+                  <a:lnTo>
+                    <a:pt x="1336545" y="120689"/>
+                  </a:lnTo>
+                  <a:lnTo>
+                    <a:pt x="1406889" y="126228"/>
+                  </a:lnTo>
+                  <a:lnTo>
+                    <a:pt x="1477234" y="131694"/>
+                  </a:lnTo>
+                  <a:lnTo>
+                    <a:pt x="1547578" y="137087"/>
+                  </a:lnTo>
+                  <a:lnTo>
+                    <a:pt x="1617923" y="142408"/>
+                  </a:lnTo>
+                  <a:lnTo>
+                    <a:pt x="1688267" y="147658"/>
+                  </a:lnTo>
+                  <a:lnTo>
+                    <a:pt x="1758612" y="152838"/>
+                  </a:lnTo>
+                  <a:lnTo>
+                    <a:pt x="1828956" y="157949"/>
+                  </a:lnTo>
+                  <a:lnTo>
+                    <a:pt x="1899301" y="162991"/>
+                  </a:lnTo>
+                  <a:lnTo>
+                    <a:pt x="1969645" y="167967"/>
+                  </a:lnTo>
+                  <a:lnTo>
+                    <a:pt x="2039990" y="172876"/>
+                  </a:lnTo>
+                  <a:lnTo>
+                    <a:pt x="2110334" y="177720"/>
+                  </a:lnTo>
+                  <a:lnTo>
+                    <a:pt x="2180679" y="182500"/>
+                  </a:lnTo>
+                  <a:lnTo>
+                    <a:pt x="2251023" y="187215"/>
+                  </a:lnTo>
+                  <a:lnTo>
+                    <a:pt x="2321368" y="191868"/>
+                  </a:lnTo>
+                  <a:lnTo>
+                    <a:pt x="2391712" y="196459"/>
+                  </a:lnTo>
+                  <a:lnTo>
+                    <a:pt x="2462057" y="200989"/>
+                  </a:lnTo>
+                  <a:lnTo>
+                    <a:pt x="2532401" y="205458"/>
+                  </a:lnTo>
+                  <a:lnTo>
+                    <a:pt x="2602746" y="209867"/>
+                  </a:lnTo>
+                  <a:lnTo>
+                    <a:pt x="2673090" y="214218"/>
+                  </a:lnTo>
+                  <a:lnTo>
+                    <a:pt x="2743435" y="218511"/>
+                  </a:lnTo>
+                  <a:lnTo>
+                    <a:pt x="2813779" y="222747"/>
+                  </a:lnTo>
+                  <a:lnTo>
+                    <a:pt x="2884124" y="226926"/>
+                  </a:lnTo>
+                  <a:lnTo>
+                    <a:pt x="2954468" y="231050"/>
+                  </a:lnTo>
+                  <a:lnTo>
+                    <a:pt x="3024813" y="235118"/>
+                  </a:lnTo>
+                  <a:lnTo>
+                    <a:pt x="3095157" y="239132"/>
+                  </a:lnTo>
+                  <a:lnTo>
+                    <a:pt x="3165502" y="243093"/>
+                  </a:lnTo>
+                  <a:lnTo>
+                    <a:pt x="3235846" y="247001"/>
+                  </a:lnTo>
+                  <a:lnTo>
+                    <a:pt x="3306191" y="250857"/>
+                  </a:lnTo>
+                  <a:lnTo>
+                    <a:pt x="3376535" y="254662"/>
+                  </a:lnTo>
+                  <a:lnTo>
+                    <a:pt x="3446880" y="258416"/>
+                  </a:lnTo>
+                  <a:lnTo>
+                    <a:pt x="3517224" y="262120"/>
+                  </a:lnTo>
+                  <a:lnTo>
+                    <a:pt x="3587569" y="265774"/>
+                  </a:lnTo>
+                  <a:lnTo>
+                    <a:pt x="3657913" y="269380"/>
+                  </a:lnTo>
+                  <a:lnTo>
+                    <a:pt x="3728257" y="272937"/>
+                  </a:lnTo>
+                  <a:lnTo>
+                    <a:pt x="3798602" y="276448"/>
+                  </a:lnTo>
+                  <a:lnTo>
+                    <a:pt x="3868946" y="279911"/>
+                  </a:lnTo>
+                  <a:lnTo>
+                    <a:pt x="3939291" y="283328"/>
+                  </a:lnTo>
+                  <a:lnTo>
+                    <a:pt x="4009635" y="286700"/>
+                  </a:lnTo>
+                  <a:lnTo>
+                    <a:pt x="4079980" y="290027"/>
+                  </a:lnTo>
+                  <a:lnTo>
+                    <a:pt x="4150324" y="293310"/>
+                  </a:lnTo>
+                  <a:lnTo>
+                    <a:pt x="4220669" y="296548"/>
+                  </a:lnTo>
+                  <a:lnTo>
+                    <a:pt x="4291013" y="299744"/>
+                  </a:lnTo>
+                  <a:lnTo>
+                    <a:pt x="4361358" y="302897"/>
+                  </a:lnTo>
+                  <a:lnTo>
+                    <a:pt x="4431702" y="306008"/>
+                  </a:lnTo>
+                  <a:lnTo>
+                    <a:pt x="4502047" y="309077"/>
+                  </a:lnTo>
+                  <a:lnTo>
+                    <a:pt x="4572391" y="312106"/>
+                  </a:lnTo>
+                  <a:lnTo>
+                    <a:pt x="4642736" y="315094"/>
+                  </a:lnTo>
+                  <a:lnTo>
+                    <a:pt x="4713080" y="318042"/>
+                  </a:lnTo>
+                  <a:lnTo>
+                    <a:pt x="4783425" y="320952"/>
+                  </a:lnTo>
+                  <a:lnTo>
+                    <a:pt x="4853769" y="323822"/>
+                  </a:lnTo>
+                  <a:lnTo>
+                    <a:pt x="4924114" y="326654"/>
+                  </a:lnTo>
+                  <a:lnTo>
+                    <a:pt x="4994458" y="329448"/>
+                  </a:lnTo>
+                  <a:lnTo>
+                    <a:pt x="5064803" y="332205"/>
+                  </a:lnTo>
+                  <a:lnTo>
+                    <a:pt x="5135147" y="334926"/>
+                  </a:lnTo>
+                  <a:lnTo>
+                    <a:pt x="5205492" y="337610"/>
+                  </a:lnTo>
+                  <a:lnTo>
+                    <a:pt x="5275836" y="340258"/>
+                  </a:lnTo>
+                  <a:lnTo>
+                    <a:pt x="5346181" y="342871"/>
+                  </a:lnTo>
+                  <a:lnTo>
+                    <a:pt x="5416525" y="345449"/>
+                  </a:lnTo>
+                  <a:lnTo>
+                    <a:pt x="5486870" y="347993"/>
+                  </a:lnTo>
+                  <a:lnTo>
+                    <a:pt x="5557214" y="350503"/>
+                  </a:lnTo>
+                  <a:lnTo>
+                    <a:pt x="5627559" y="352979"/>
+                  </a:lnTo>
+                  <a:lnTo>
+                    <a:pt x="5697903" y="355423"/>
+                  </a:lnTo>
+                  <a:lnTo>
+                    <a:pt x="5768248" y="357834"/>
+                  </a:lnTo>
+                  <a:lnTo>
+                    <a:pt x="5838592" y="360212"/>
+                  </a:lnTo>
+                  <a:lnTo>
+                    <a:pt x="5908937" y="362559"/>
+                  </a:lnTo>
+                  <a:lnTo>
+                    <a:pt x="5979281" y="364875"/>
+                  </a:lnTo>
+                  <a:lnTo>
+                    <a:pt x="6049626" y="367160"/>
+                  </a:lnTo>
+                  <a:lnTo>
+                    <a:pt x="6119970" y="369414"/>
+                  </a:lnTo>
+                  <a:lnTo>
+                    <a:pt x="6190315" y="371639"/>
+                  </a:lnTo>
+                  <a:lnTo>
+                    <a:pt x="6260659" y="373834"/>
+                  </a:lnTo>
+                  <a:lnTo>
+                    <a:pt x="6331004" y="375999"/>
+                  </a:lnTo>
+                  <a:lnTo>
+                    <a:pt x="6401348" y="378136"/>
+                  </a:lnTo>
+                  <a:lnTo>
+                    <a:pt x="6471693" y="380244"/>
+                  </a:lnTo>
+                  <a:lnTo>
+                    <a:pt x="6542037" y="382324"/>
+                  </a:lnTo>
+                  <a:lnTo>
+                    <a:pt x="6612382" y="384376"/>
+                  </a:lnTo>
+                  <a:lnTo>
+                    <a:pt x="6682726" y="386401"/>
+                  </a:lnTo>
+                  <a:lnTo>
+                    <a:pt x="6753071" y="388399"/>
+                  </a:lnTo>
+                  <a:lnTo>
+                    <a:pt x="6823415" y="390371"/>
+                  </a:lnTo>
+                  <a:lnTo>
+                    <a:pt x="6893760" y="392316"/>
+                  </a:lnTo>
+                  <a:lnTo>
+                    <a:pt x="6964104" y="394235"/>
+                  </a:lnTo>
+                </a:path>
+              </a:pathLst>
+            </a:custGeom>
+            <a:ln w="27101" cap="flat">
+              <a:solidFill>
+                <a:srgbClr val="FF8C00">
+                  <a:alpha val="100000"/>
+                </a:srgbClr>
+              </a:solidFill>
+              <a:prstDash val="solid"/>
+              <a:round/>
+            </a:ln>
+          </p:spPr>
+          <p:txBody>
+            <a:bodyPr/>
+            <a:lstStyle/>
+            <a:p/>
+          </p:txBody>
+        </p:sp>
+        <p:sp>
+          <p:nvSpPr>
+            <p:cNvPr id="75" name="pl75"/>
+            <p:cNvSpPr/>
+            <p:nvPr/>
+          </p:nvSpPr>
+          <p:spPr>
+            <a:xfrm>
+              <a:off x="887106" y="5294352"/>
+              <a:ext cx="7660515" cy="0"/>
+            </a:xfrm>
+            <a:custGeom>
+              <a:avLst/>
+              <a:pathLst>
+                <a:path w="7660515" h="0">
+                  <a:moveTo>
+                    <a:pt x="0" y="0"/>
+                  </a:moveTo>
+                  <a:lnTo>
+                    <a:pt x="7660515" y="0"/>
+                  </a:lnTo>
+                  <a:lnTo>
+                    <a:pt x="7660515" y="0"/>
+                  </a:lnTo>
+                </a:path>
+              </a:pathLst>
+            </a:custGeom>
+            <a:ln w="13550" cap="flat">
+              <a:solidFill>
+                <a:srgbClr val="7F7F7F">
+                  <a:alpha val="100000"/>
+                </a:srgbClr>
+              </a:solidFill>
+              <a:prstDash val="dash"/>
+              <a:round/>
+            </a:ln>
+          </p:spPr>
+          <p:txBody>
+            <a:bodyPr/>
+            <a:lstStyle/>
+            <a:p/>
+          </p:txBody>
+        </p:sp>
+        <p:sp>
+          <p:nvSpPr>
+            <p:cNvPr id="76" name="pl76"/>
+            <p:cNvSpPr/>
+            <p:nvPr/>
+          </p:nvSpPr>
+          <p:spPr>
+            <a:xfrm>
+              <a:off x="4292500" y="4336484"/>
+              <a:ext cx="0" cy="1317069"/>
+            </a:xfrm>
+            <a:custGeom>
+              <a:avLst/>
+              <a:pathLst>
+                <a:path w="0" h="1317069">
+                  <a:moveTo>
+                    <a:pt x="0" y="1317069"/>
+                  </a:moveTo>
+                  <a:lnTo>
+                    <a:pt x="0" y="0"/>
+                  </a:lnTo>
+                  <a:lnTo>
+                    <a:pt x="0" y="0"/>
+                  </a:lnTo>
+                </a:path>
+              </a:pathLst>
+            </a:custGeom>
+            <a:ln w="13550" cap="flat">
+              <a:solidFill>
+                <a:srgbClr val="666666">
+                  <a:alpha val="100000"/>
+                </a:srgbClr>
+              </a:solidFill>
+              <a:prstDash val="dot"/>
+              <a:round/>
+            </a:ln>
+          </p:spPr>
+          <p:txBody>
+            <a:bodyPr/>
+            <a:lstStyle/>
+            <a:p/>
+          </p:txBody>
+        </p:sp>
+        <p:sp>
+          <p:nvSpPr>
+            <p:cNvPr id="77" name="pl77"/>
+            <p:cNvSpPr/>
+            <p:nvPr/>
+          </p:nvSpPr>
+          <p:spPr>
+            <a:xfrm>
+              <a:off x="3124839" y="4336484"/>
+              <a:ext cx="0" cy="1317069"/>
+            </a:xfrm>
+            <a:custGeom>
+              <a:avLst/>
+              <a:pathLst>
+                <a:path w="0" h="1317069">
+                  <a:moveTo>
+                    <a:pt x="0" y="1317069"/>
+                  </a:moveTo>
+                  <a:lnTo>
+                    <a:pt x="0" y="0"/>
+                  </a:lnTo>
+                  <a:lnTo>
+                    <a:pt x="0" y="0"/>
+                  </a:lnTo>
+                </a:path>
+              </a:pathLst>
+            </a:custGeom>
+            <a:ln w="13550" cap="flat">
+              <a:solidFill>
+                <a:srgbClr val="4682B4">
+                  <a:alpha val="69803"/>
+                </a:srgbClr>
+              </a:solidFill>
+              <a:prstDash val="dash"/>
+              <a:round/>
+            </a:ln>
+          </p:spPr>
+          <p:txBody>
+            <a:bodyPr/>
+            <a:lstStyle/>
+            <a:p/>
+          </p:txBody>
+        </p:sp>
+        <p:sp>
+          <p:nvSpPr>
+            <p:cNvPr id="78" name="pl78"/>
+            <p:cNvSpPr/>
+            <p:nvPr/>
+          </p:nvSpPr>
+          <p:spPr>
+            <a:xfrm>
+              <a:off x="5508592" y="4336484"/>
+              <a:ext cx="0" cy="1317069"/>
+            </a:xfrm>
+            <a:custGeom>
+              <a:avLst/>
+              <a:pathLst>
+                <a:path w="0" h="1317069">
+                  <a:moveTo>
+                    <a:pt x="0" y="1317069"/>
+                  </a:moveTo>
+                  <a:lnTo>
+                    <a:pt x="0" y="0"/>
+                  </a:lnTo>
+                  <a:lnTo>
+                    <a:pt x="0" y="0"/>
+                  </a:lnTo>
+                </a:path>
+              </a:pathLst>
+            </a:custGeom>
+            <a:ln w="13550" cap="flat">
+              <a:solidFill>
+                <a:srgbClr val="4682B4">
+                  <a:alpha val="69803"/>
+                </a:srgbClr>
+              </a:solidFill>
+              <a:prstDash val="dash"/>
+              <a:round/>
+            </a:ln>
+          </p:spPr>
+          <p:txBody>
+            <a:bodyPr/>
+            <a:lstStyle/>
+            <a:p/>
+          </p:txBody>
+        </p:sp>
+        <p:sp>
+          <p:nvSpPr>
+            <p:cNvPr id="79" name="tx79"/>
+            <p:cNvSpPr/>
+            <p:nvPr/>
+          </p:nvSpPr>
+          <p:spPr>
+            <a:xfrm>
+              <a:off x="762297" y="5553636"/>
+              <a:ext cx="62179" cy="80101"/>
+            </a:xfrm>
+            <a:prstGeom prst="rect">
+              <a:avLst/>
+            </a:prstGeom>
+            <a:noFill/>
+          </p:spPr>
+          <p:txBody>
+            <a:bodyPr lIns="0" rIns="0" tIns="0" bIns="0" anchorCtr="1" anchor="ctr" wrap="none"/>
+            <a:lstStyle/>
+            <a:p>
+              <a:pPr algn="l" marL="0" marR="0" indent="0">
+                <a:lnSpc>
+                  <a:spcPts val="880"/>
+                </a:lnSpc>
+                <a:spcBef>
+                  <a:spcPts val="0"/>
+                </a:spcBef>
+                <a:spcAft>
+                  <a:spcPts val="0"/>
+                </a:spcAft>
+              </a:pPr>
+              <a:r>
+                <a:rPr sz="880">
+                  <a:solidFill>
+                    <a:srgbClr val="4D4D4D">
+                      <a:alpha val="100000"/>
+                    </a:srgbClr>
+                  </a:solidFill>
+                  <a:latin typeface="Helvetica"/>
+                  <a:cs typeface="Helvetica"/>
+                </a:rPr>
+                <a:t>0</a:t>
+              </a:r>
+            </a:p>
+          </p:txBody>
+        </p:sp>
+        <p:sp>
+          <p:nvSpPr>
+            <p:cNvPr id="80" name="tx80"/>
+            <p:cNvSpPr/>
+            <p:nvPr/>
+          </p:nvSpPr>
+          <p:spPr>
+            <a:xfrm>
+              <a:off x="762297" y="5254302"/>
+              <a:ext cx="62179" cy="80101"/>
+            </a:xfrm>
+            <a:prstGeom prst="rect">
+              <a:avLst/>
+            </a:prstGeom>
+            <a:noFill/>
+          </p:spPr>
+          <p:txBody>
+            <a:bodyPr lIns="0" rIns="0" tIns="0" bIns="0" anchorCtr="1" anchor="ctr" wrap="none"/>
+            <a:lstStyle/>
+            <a:p>
+              <a:pPr algn="l" marL="0" marR="0" indent="0">
+                <a:lnSpc>
+                  <a:spcPts val="880"/>
+                </a:lnSpc>
+                <a:spcBef>
+                  <a:spcPts val="0"/>
+                </a:spcBef>
+                <a:spcAft>
+                  <a:spcPts val="0"/>
+                </a:spcAft>
+              </a:pPr>
+              <a:r>
+                <a:rPr sz="880">
+                  <a:solidFill>
+                    <a:srgbClr val="4D4D4D">
+                      <a:alpha val="100000"/>
+                    </a:srgbClr>
+                  </a:solidFill>
+                  <a:latin typeface="Helvetica"/>
+                  <a:cs typeface="Helvetica"/>
+                </a:rPr>
+                <a:t>1</a:t>
+              </a:r>
+            </a:p>
+          </p:txBody>
+        </p:sp>
+        <p:sp>
+          <p:nvSpPr>
+            <p:cNvPr id="81" name="tx81"/>
+            <p:cNvSpPr/>
+            <p:nvPr/>
+          </p:nvSpPr>
+          <p:spPr>
+            <a:xfrm>
+              <a:off x="762297" y="4954968"/>
+              <a:ext cx="62179" cy="80101"/>
+            </a:xfrm>
+            <a:prstGeom prst="rect">
+              <a:avLst/>
+            </a:prstGeom>
+            <a:noFill/>
+          </p:spPr>
+          <p:txBody>
+            <a:bodyPr lIns="0" rIns="0" tIns="0" bIns="0" anchorCtr="1" anchor="ctr" wrap="none"/>
+            <a:lstStyle/>
+            <a:p>
+              <a:pPr algn="l" marL="0" marR="0" indent="0">
+                <a:lnSpc>
+                  <a:spcPts val="880"/>
+                </a:lnSpc>
+                <a:spcBef>
+                  <a:spcPts val="0"/>
+                </a:spcBef>
+                <a:spcAft>
+                  <a:spcPts val="0"/>
+                </a:spcAft>
+              </a:pPr>
+              <a:r>
+                <a:rPr sz="880">
+                  <a:solidFill>
+                    <a:srgbClr val="4D4D4D">
+                      <a:alpha val="100000"/>
+                    </a:srgbClr>
+                  </a:solidFill>
+                  <a:latin typeface="Helvetica"/>
+                  <a:cs typeface="Helvetica"/>
+                </a:rPr>
+                <a:t>2</a:t>
+              </a:r>
+            </a:p>
+          </p:txBody>
+        </p:sp>
+        <p:sp>
+          <p:nvSpPr>
+            <p:cNvPr id="82" name="tx82"/>
+            <p:cNvSpPr/>
+            <p:nvPr/>
+          </p:nvSpPr>
+          <p:spPr>
+            <a:xfrm>
+              <a:off x="762297" y="4655634"/>
+              <a:ext cx="62179" cy="80101"/>
+            </a:xfrm>
+            <a:prstGeom prst="rect">
+              <a:avLst/>
+            </a:prstGeom>
+            <a:noFill/>
+          </p:spPr>
+          <p:txBody>
+            <a:bodyPr lIns="0" rIns="0" tIns="0" bIns="0" anchorCtr="1" anchor="ctr" wrap="none"/>
+            <a:lstStyle/>
+            <a:p>
+              <a:pPr algn="l" marL="0" marR="0" indent="0">
+                <a:lnSpc>
+                  <a:spcPts val="880"/>
+                </a:lnSpc>
+                <a:spcBef>
+                  <a:spcPts val="0"/>
+                </a:spcBef>
+                <a:spcAft>
+                  <a:spcPts val="0"/>
+                </a:spcAft>
+              </a:pPr>
+              <a:r>
+                <a:rPr sz="880">
+                  <a:solidFill>
+                    <a:srgbClr val="4D4D4D">
+                      <a:alpha val="100000"/>
+                    </a:srgbClr>
+                  </a:solidFill>
+                  <a:latin typeface="Helvetica"/>
+                  <a:cs typeface="Helvetica"/>
+                </a:rPr>
+                <a:t>3</a:t>
+              </a:r>
+            </a:p>
+          </p:txBody>
+        </p:sp>
+        <p:sp>
+          <p:nvSpPr>
+            <p:cNvPr id="83" name="tx83"/>
+            <p:cNvSpPr/>
+            <p:nvPr/>
+          </p:nvSpPr>
+          <p:spPr>
+            <a:xfrm>
+              <a:off x="762297" y="4356300"/>
+              <a:ext cx="62179" cy="80101"/>
+            </a:xfrm>
+            <a:prstGeom prst="rect">
+              <a:avLst/>
+            </a:prstGeom>
+            <a:noFill/>
+          </p:spPr>
+          <p:txBody>
+            <a:bodyPr lIns="0" rIns="0" tIns="0" bIns="0" anchorCtr="1" anchor="ctr" wrap="none"/>
+            <a:lstStyle/>
+            <a:p>
+              <a:pPr algn="l" marL="0" marR="0" indent="0">
+                <a:lnSpc>
+                  <a:spcPts val="880"/>
+                </a:lnSpc>
+                <a:spcBef>
+                  <a:spcPts val="0"/>
+                </a:spcBef>
+                <a:spcAft>
+                  <a:spcPts val="0"/>
+                </a:spcAft>
+              </a:pPr>
+              <a:r>
+                <a:rPr sz="880">
+                  <a:solidFill>
+                    <a:srgbClr val="4D4D4D">
+                      <a:alpha val="100000"/>
+                    </a:srgbClr>
+                  </a:solidFill>
+                  <a:latin typeface="Helvetica"/>
+                  <a:cs typeface="Helvetica"/>
+                </a:rPr>
+                <a:t>4</a:t>
+              </a:r>
+            </a:p>
+          </p:txBody>
+        </p:sp>
+        <p:sp>
+          <p:nvSpPr>
+            <p:cNvPr id="84" name="tx84"/>
+            <p:cNvSpPr/>
+            <p:nvPr/>
+          </p:nvSpPr>
+          <p:spPr>
+            <a:xfrm>
+              <a:off x="1346003" y="5716183"/>
+              <a:ext cx="161574" cy="80101"/>
+            </a:xfrm>
+            <a:prstGeom prst="rect">
+              <a:avLst/>
+            </a:prstGeom>
+            <a:noFill/>
+          </p:spPr>
+          <p:txBody>
+            <a:bodyPr lIns="0" rIns="0" tIns="0" bIns="0" anchorCtr="1" anchor="ctr" wrap="none"/>
+            <a:lstStyle/>
+            <a:p>
+              <a:pPr algn="l" marL="0" marR="0" indent="0">
+                <a:lnSpc>
+                  <a:spcPts val="880"/>
+                </a:lnSpc>
+                <a:spcBef>
+                  <a:spcPts val="0"/>
+                </a:spcBef>
+                <a:spcAft>
+                  <a:spcPts val="0"/>
+                </a:spcAft>
+              </a:pPr>
+              <a:r>
+                <a:rPr sz="880">
+                  <a:solidFill>
+                    <a:srgbClr val="4D4D4D">
+                      <a:alpha val="100000"/>
+                    </a:srgbClr>
+                  </a:solidFill>
+                  <a:latin typeface="Helvetica"/>
+                  <a:cs typeface="Helvetica"/>
+                </a:rPr>
+                <a:t>-50</a:t>
+              </a:r>
+            </a:p>
+          </p:txBody>
+        </p:sp>
+        <p:sp>
+          <p:nvSpPr>
+            <p:cNvPr id="85" name="tx85"/>
+            <p:cNvSpPr/>
+            <p:nvPr/>
+          </p:nvSpPr>
+          <p:spPr>
+            <a:xfrm>
+              <a:off x="2196512" y="5716183"/>
+              <a:ext cx="161574" cy="80101"/>
+            </a:xfrm>
+            <a:prstGeom prst="rect">
+              <a:avLst/>
+            </a:prstGeom>
+            <a:noFill/>
+          </p:spPr>
+          <p:txBody>
+            <a:bodyPr lIns="0" rIns="0" tIns="0" bIns="0" anchorCtr="1" anchor="ctr" wrap="none"/>
+            <a:lstStyle/>
+            <a:p>
+              <a:pPr algn="l" marL="0" marR="0" indent="0">
+                <a:lnSpc>
+                  <a:spcPts val="880"/>
+                </a:lnSpc>
+                <a:spcBef>
+                  <a:spcPts val="0"/>
+                </a:spcBef>
+                <a:spcAft>
+                  <a:spcPts val="0"/>
+                </a:spcAft>
+              </a:pPr>
+              <a:r>
+                <a:rPr sz="880">
+                  <a:solidFill>
+                    <a:srgbClr val="4D4D4D">
+                      <a:alpha val="100000"/>
+                    </a:srgbClr>
+                  </a:solidFill>
+                  <a:latin typeface="Helvetica"/>
+                  <a:cs typeface="Helvetica"/>
+                </a:rPr>
+                <a:t>-40</a:t>
+              </a:r>
+            </a:p>
+          </p:txBody>
+        </p:sp>
+        <p:sp>
+          <p:nvSpPr>
+            <p:cNvPr id="86" name="tx86"/>
+            <p:cNvSpPr/>
+            <p:nvPr/>
+          </p:nvSpPr>
+          <p:spPr>
+            <a:xfrm>
+              <a:off x="3047022" y="5716183"/>
+              <a:ext cx="161574" cy="80101"/>
+            </a:xfrm>
+            <a:prstGeom prst="rect">
+              <a:avLst/>
+            </a:prstGeom>
+            <a:noFill/>
+          </p:spPr>
+          <p:txBody>
+            <a:bodyPr lIns="0" rIns="0" tIns="0" bIns="0" anchorCtr="1" anchor="ctr" wrap="none"/>
+            <a:lstStyle/>
+            <a:p>
+              <a:pPr algn="l" marL="0" marR="0" indent="0">
+                <a:lnSpc>
+                  <a:spcPts val="880"/>
+                </a:lnSpc>
+                <a:spcBef>
+                  <a:spcPts val="0"/>
+                </a:spcBef>
+                <a:spcAft>
+                  <a:spcPts val="0"/>
+                </a:spcAft>
+              </a:pPr>
+              <a:r>
+                <a:rPr sz="880">
+                  <a:solidFill>
+                    <a:srgbClr val="4D4D4D">
+                      <a:alpha val="100000"/>
+                    </a:srgbClr>
+                  </a:solidFill>
+                  <a:latin typeface="Helvetica"/>
+                  <a:cs typeface="Helvetica"/>
+                </a:rPr>
+                <a:t>-30</a:t>
+              </a:r>
+            </a:p>
+          </p:txBody>
+        </p:sp>
+        <p:sp>
+          <p:nvSpPr>
+            <p:cNvPr id="87" name="tx87"/>
+            <p:cNvSpPr/>
+            <p:nvPr/>
+          </p:nvSpPr>
+          <p:spPr>
+            <a:xfrm>
+              <a:off x="3897531" y="5716183"/>
+              <a:ext cx="161574" cy="80101"/>
+            </a:xfrm>
+            <a:prstGeom prst="rect">
+              <a:avLst/>
+            </a:prstGeom>
+            <a:noFill/>
+          </p:spPr>
+          <p:txBody>
+            <a:bodyPr lIns="0" rIns="0" tIns="0" bIns="0" anchorCtr="1" anchor="ctr" wrap="none"/>
+            <a:lstStyle/>
+            <a:p>
+              <a:pPr algn="l" marL="0" marR="0" indent="0">
+                <a:lnSpc>
+                  <a:spcPts val="880"/>
+                </a:lnSpc>
+                <a:spcBef>
+                  <a:spcPts val="0"/>
+                </a:spcBef>
+                <a:spcAft>
+                  <a:spcPts val="0"/>
+                </a:spcAft>
+              </a:pPr>
+              <a:r>
+                <a:rPr sz="880">
+                  <a:solidFill>
+                    <a:srgbClr val="4D4D4D">
+                      <a:alpha val="100000"/>
+                    </a:srgbClr>
+                  </a:solidFill>
+                  <a:latin typeface="Helvetica"/>
+                  <a:cs typeface="Helvetica"/>
+                </a:rPr>
+                <a:t>-20</a:t>
+              </a:r>
+            </a:p>
+          </p:txBody>
+        </p:sp>
+        <p:sp>
+          <p:nvSpPr>
+            <p:cNvPr id="88" name="tx88"/>
+            <p:cNvSpPr/>
+            <p:nvPr/>
+          </p:nvSpPr>
+          <p:spPr>
+            <a:xfrm>
+              <a:off x="4748041" y="5716183"/>
+              <a:ext cx="161574" cy="80101"/>
+            </a:xfrm>
+            <a:prstGeom prst="rect">
+              <a:avLst/>
+            </a:prstGeom>
+            <a:noFill/>
+          </p:spPr>
+          <p:txBody>
+            <a:bodyPr lIns="0" rIns="0" tIns="0" bIns="0" anchorCtr="1" anchor="ctr" wrap="none"/>
+            <a:lstStyle/>
+            <a:p>
+              <a:pPr algn="l" marL="0" marR="0" indent="0">
+                <a:lnSpc>
+                  <a:spcPts val="880"/>
+                </a:lnSpc>
+                <a:spcBef>
+                  <a:spcPts val="0"/>
+                </a:spcBef>
+                <a:spcAft>
+                  <a:spcPts val="0"/>
+                </a:spcAft>
+              </a:pPr>
+              <a:r>
+                <a:rPr sz="880">
+                  <a:solidFill>
+                    <a:srgbClr val="4D4D4D">
+                      <a:alpha val="100000"/>
+                    </a:srgbClr>
+                  </a:solidFill>
+                  <a:latin typeface="Helvetica"/>
+                  <a:cs typeface="Helvetica"/>
+                </a:rPr>
+                <a:t>-10</a:t>
+              </a:r>
+            </a:p>
+          </p:txBody>
+        </p:sp>
+        <p:sp>
+          <p:nvSpPr>
+            <p:cNvPr id="89" name="tx89"/>
+            <p:cNvSpPr/>
+            <p:nvPr/>
+          </p:nvSpPr>
+          <p:spPr>
+            <a:xfrm>
+              <a:off x="5648248" y="5716183"/>
+              <a:ext cx="62179" cy="80101"/>
+            </a:xfrm>
+            <a:prstGeom prst="rect">
+              <a:avLst/>
+            </a:prstGeom>
+            <a:noFill/>
+          </p:spPr>
+          <p:txBody>
+            <a:bodyPr lIns="0" rIns="0" tIns="0" bIns="0" anchorCtr="1" anchor="ctr" wrap="none"/>
+            <a:lstStyle/>
+            <a:p>
+              <a:pPr algn="l" marL="0" marR="0" indent="0">
+                <a:lnSpc>
+                  <a:spcPts val="880"/>
+                </a:lnSpc>
+                <a:spcBef>
+                  <a:spcPts val="0"/>
+                </a:spcBef>
+                <a:spcAft>
+                  <a:spcPts val="0"/>
+                </a:spcAft>
+              </a:pPr>
+              <a:r>
+                <a:rPr sz="880">
+                  <a:solidFill>
+                    <a:srgbClr val="4D4D4D">
+                      <a:alpha val="100000"/>
+                    </a:srgbClr>
+                  </a:solidFill>
+                  <a:latin typeface="Helvetica"/>
+                  <a:cs typeface="Helvetica"/>
+                </a:rPr>
+                <a:t>0</a:t>
+              </a:r>
+            </a:p>
+          </p:txBody>
+        </p:sp>
+        <p:sp>
+          <p:nvSpPr>
+            <p:cNvPr id="90" name="tx90"/>
+            <p:cNvSpPr/>
+            <p:nvPr/>
+          </p:nvSpPr>
+          <p:spPr>
+            <a:xfrm>
+              <a:off x="6467667" y="5716183"/>
+              <a:ext cx="124358" cy="80101"/>
+            </a:xfrm>
+            <a:prstGeom prst="rect">
+              <a:avLst/>
+            </a:prstGeom>
+            <a:noFill/>
+          </p:spPr>
+          <p:txBody>
+            <a:bodyPr lIns="0" rIns="0" tIns="0" bIns="0" anchorCtr="1" anchor="ctr" wrap="none"/>
+            <a:lstStyle/>
+            <a:p>
+              <a:pPr algn="l" marL="0" marR="0" indent="0">
+                <a:lnSpc>
+                  <a:spcPts val="880"/>
+                </a:lnSpc>
+                <a:spcBef>
+                  <a:spcPts val="0"/>
+                </a:spcBef>
+                <a:spcAft>
+                  <a:spcPts val="0"/>
+                </a:spcAft>
+              </a:pPr>
+              <a:r>
+                <a:rPr sz="880">
+                  <a:solidFill>
+                    <a:srgbClr val="4D4D4D">
+                      <a:alpha val="100000"/>
+                    </a:srgbClr>
+                  </a:solidFill>
+                  <a:latin typeface="Helvetica"/>
+                  <a:cs typeface="Helvetica"/>
+                </a:rPr>
+                <a:t>10</a:t>
+              </a:r>
+            </a:p>
+          </p:txBody>
+        </p:sp>
+        <p:sp>
+          <p:nvSpPr>
+            <p:cNvPr id="91" name="tx91"/>
+            <p:cNvSpPr/>
+            <p:nvPr/>
+          </p:nvSpPr>
+          <p:spPr>
+            <a:xfrm>
+              <a:off x="7318177" y="5716183"/>
+              <a:ext cx="124358" cy="80101"/>
+            </a:xfrm>
+            <a:prstGeom prst="rect">
+              <a:avLst/>
+            </a:prstGeom>
+            <a:noFill/>
+          </p:spPr>
+          <p:txBody>
+            <a:bodyPr lIns="0" rIns="0" tIns="0" bIns="0" anchorCtr="1" anchor="ctr" wrap="none"/>
+            <a:lstStyle/>
+            <a:p>
+              <a:pPr algn="l" marL="0" marR="0" indent="0">
+                <a:lnSpc>
+                  <a:spcPts val="880"/>
+                </a:lnSpc>
+                <a:spcBef>
+                  <a:spcPts val="0"/>
+                </a:spcBef>
+                <a:spcAft>
+                  <a:spcPts val="0"/>
+                </a:spcAft>
+              </a:pPr>
+              <a:r>
+                <a:rPr sz="880">
+                  <a:solidFill>
+                    <a:srgbClr val="4D4D4D">
+                      <a:alpha val="100000"/>
+                    </a:srgbClr>
+                  </a:solidFill>
+                  <a:latin typeface="Helvetica"/>
+                  <a:cs typeface="Helvetica"/>
+                </a:rPr>
+                <a:t>20</a:t>
+              </a:r>
+            </a:p>
+          </p:txBody>
+        </p:sp>
+        <p:sp>
+          <p:nvSpPr>
+            <p:cNvPr id="92" name="tx92"/>
+            <p:cNvSpPr/>
+            <p:nvPr/>
+          </p:nvSpPr>
+          <p:spPr>
+            <a:xfrm>
+              <a:off x="8168686" y="5716183"/>
+              <a:ext cx="124358" cy="80101"/>
+            </a:xfrm>
+            <a:prstGeom prst="rect">
+              <a:avLst/>
+            </a:prstGeom>
+            <a:noFill/>
+          </p:spPr>
+          <p:txBody>
+            <a:bodyPr lIns="0" rIns="0" tIns="0" bIns="0" anchorCtr="1" anchor="ctr" wrap="none"/>
+            <a:lstStyle/>
+            <a:p>
+              <a:pPr algn="l" marL="0" marR="0" indent="0">
+                <a:lnSpc>
+                  <a:spcPts val="880"/>
+                </a:lnSpc>
+                <a:spcBef>
+                  <a:spcPts val="0"/>
+                </a:spcBef>
+                <a:spcAft>
+                  <a:spcPts val="0"/>
+                </a:spcAft>
+              </a:pPr>
+              <a:r>
+                <a:rPr sz="880">
+                  <a:solidFill>
+                    <a:srgbClr val="4D4D4D">
+                      <a:alpha val="100000"/>
+                    </a:srgbClr>
+                  </a:solidFill>
+                  <a:latin typeface="Helvetica"/>
+                  <a:cs typeface="Helvetica"/>
+                </a:rPr>
+                <a:t>30</a:t>
+              </a:r>
+            </a:p>
+          </p:txBody>
+        </p:sp>
+        <p:sp>
+          <p:nvSpPr>
+            <p:cNvPr id="93" name="tx93"/>
+            <p:cNvSpPr/>
+            <p:nvPr/>
+          </p:nvSpPr>
+          <p:spPr>
+            <a:xfrm>
+              <a:off x="1561815" y="5855859"/>
+              <a:ext cx="6311097" cy="100218"/>
+            </a:xfrm>
+            <a:prstGeom prst="rect">
+              <a:avLst/>
+            </a:prstGeom>
+            <a:noFill/>
+          </p:spPr>
+          <p:txBody>
+            <a:bodyPr lIns="0" rIns="0" tIns="0" bIns="0" anchorCtr="1" anchor="ctr" wrap="none"/>
+            <a:lstStyle/>
+            <a:p>
+              <a:pPr algn="l" marL="0" marR="0" indent="0">
+                <a:lnSpc>
+                  <a:spcPts val="1100"/>
+                </a:lnSpc>
+                <a:spcBef>
+                  <a:spcPts val="0"/>
+                </a:spcBef>
+                <a:spcAft>
+                  <a:spcPts val="0"/>
+                </a:spcAft>
+              </a:pPr>
+              <a:r>
+                <a:rPr sz="1100">
+                  <a:solidFill>
+                    <a:srgbClr val="000000">
+                      <a:alpha val="100000"/>
+                    </a:srgbClr>
+                  </a:solidFill>
+                  <a:latin typeface="Helvetica"/>
+                  <a:cs typeface="Helvetica"/>
+                </a:rPr>
+                <a:t>Sensitivity eGFR Difference (%): 100 × (CKD-EPI 2012 CysC − CKD-EPI 2021 Cr) / CKD-EPI 2021 Cr</a:t>
+              </a:r>
+            </a:p>
+          </p:txBody>
+        </p:sp>
+        <p:sp>
+          <p:nvSpPr>
+            <p:cNvPr id="94" name="tx94"/>
+            <p:cNvSpPr/>
+            <p:nvPr/>
+          </p:nvSpPr>
+          <p:spPr>
+            <a:xfrm rot="-5400000">
+              <a:off x="138035" y="4944909"/>
+              <a:ext cx="1016904" cy="100218"/>
+            </a:xfrm>
+            <a:prstGeom prst="rect">
+              <a:avLst/>
+            </a:prstGeom>
+            <a:noFill/>
+          </p:spPr>
+          <p:txBody>
+            <a:bodyPr lIns="0" rIns="0" tIns="0" bIns="0" anchorCtr="1" anchor="ctr" wrap="none"/>
+            <a:lstStyle/>
+            <a:p>
+              <a:pPr algn="l" marL="0" marR="0" indent="0">
+                <a:lnSpc>
+                  <a:spcPts val="1100"/>
+                </a:lnSpc>
+                <a:spcBef>
+                  <a:spcPts val="0"/>
+                </a:spcBef>
+                <a:spcAft>
+                  <a:spcPts val="0"/>
+                </a:spcAft>
+              </a:pPr>
+              <a:r>
+                <a:rPr sz="1100">
+                  <a:solidFill>
+                    <a:srgbClr val="000000">
+                      <a:alpha val="100000"/>
+                    </a:srgbClr>
+                  </a:solidFill>
+                  <a:latin typeface="Helvetica"/>
+                  <a:cs typeface="Helvetica"/>
+                </a:rPr>
+                <a:t>subHR (95% CI)</a:t>
+              </a:r>
+            </a:p>
+          </p:txBody>
+        </p:sp>
+        <p:sp>
+          <p:nvSpPr>
+            <p:cNvPr id="95" name="tx95"/>
+            <p:cNvSpPr/>
+            <p:nvPr/>
+          </p:nvSpPr>
+          <p:spPr>
+            <a:xfrm>
+              <a:off x="887106" y="4159544"/>
+              <a:ext cx="6959864" cy="82021"/>
+            </a:xfrm>
+            <a:prstGeom prst="rect">
+              <a:avLst/>
+            </a:prstGeom>
+            <a:noFill/>
+          </p:spPr>
+          <p:txBody>
+            <a:bodyPr lIns="0" rIns="0" tIns="0" bIns="0" anchorCtr="1" anchor="ctr" wrap="none"/>
+            <a:lstStyle/>
+            <a:p>
+              <a:pPr algn="l" marL="0" marR="0" indent="0">
+                <a:lnSpc>
+                  <a:spcPts val="900"/>
+                </a:lnSpc>
+                <a:spcBef>
+                  <a:spcPts val="0"/>
+                </a:spcBef>
+                <a:spcAft>
+                  <a:spcPts val="0"/>
+                </a:spcAft>
+              </a:pPr>
+              <a:r>
+                <a:rPr sz="900">
+                  <a:solidFill>
+                    <a:srgbClr val="404040">
+                      <a:alpha val="100000"/>
+                    </a:srgbClr>
+                  </a:solidFill>
+                  <a:latin typeface="Helvetica"/>
+                  <a:cs typeface="Helvetica"/>
+                </a:rPr>
+                <a:t>subHR per 10 % decline: 1.18 (1.02-1.36), p_Bonf = 0.163 (n = 6)  |  per IQR decline (Δ = 28.0 %): 1.58 (1.05-2.36)  |  IQR: [-30.0, -2.0] %</a:t>
+              </a:r>
+            </a:p>
+          </p:txBody>
+        </p:sp>
+        <p:sp>
+          <p:nvSpPr>
+            <p:cNvPr id="96" name="tx96"/>
+            <p:cNvSpPr/>
+            <p:nvPr/>
+          </p:nvSpPr>
+          <p:spPr>
+            <a:xfrm>
+              <a:off x="887106" y="3932770"/>
               <a:ext cx="3901470" cy="120152"/>
             </a:xfrm>
             <a:prstGeom prst="rect">
